--- a/SLIDE_THUYET_TRINH_MINIBANK.pptx
+++ b/SLIDE_THUYET_TRINH_MINIBANK.pptx
@@ -5,25 +5,25 @@
     <p:sldMasterId id="2147483648" r:id="rId1"/>
   </p:sldMasterIdLst>
   <p:sldIdLst>
-    <p:sldId id="256" r:id="rId7"/>
-    <p:sldId id="257" r:id="rId8"/>
-    <p:sldId id="258" r:id="rId9"/>
-    <p:sldId id="259" r:id="rId10"/>
-    <p:sldId id="260" r:id="rId11"/>
-    <p:sldId id="261" r:id="rId12"/>
-    <p:sldId id="262" r:id="rId13"/>
-    <p:sldId id="263" r:id="rId14"/>
-    <p:sldId id="264" r:id="rId15"/>
-    <p:sldId id="265" r:id="rId16"/>
-    <p:sldId id="266" r:id="rId17"/>
-    <p:sldId id="267" r:id="rId18"/>
-    <p:sldId id="268" r:id="rId19"/>
-    <p:sldId id="269" r:id="rId20"/>
-    <p:sldId id="270" r:id="rId21"/>
-    <p:sldId id="271" r:id="rId22"/>
-    <p:sldId id="272" r:id="rId23"/>
+    <p:sldId id="256" r:id="rId2"/>
+    <p:sldId id="257" r:id="rId3"/>
+    <p:sldId id="258" r:id="rId4"/>
+    <p:sldId id="259" r:id="rId5"/>
+    <p:sldId id="260" r:id="rId6"/>
+    <p:sldId id="261" r:id="rId7"/>
+    <p:sldId id="262" r:id="rId8"/>
+    <p:sldId id="263" r:id="rId9"/>
+    <p:sldId id="264" r:id="rId10"/>
+    <p:sldId id="265" r:id="rId11"/>
+    <p:sldId id="266" r:id="rId12"/>
+    <p:sldId id="267" r:id="rId13"/>
+    <p:sldId id="268" r:id="rId14"/>
+    <p:sldId id="269" r:id="rId15"/>
+    <p:sldId id="270" r:id="rId16"/>
+    <p:sldId id="271" r:id="rId17"/>
+    <p:sldId id="272" r:id="rId18"/>
   </p:sldIdLst>
-  <p:sldSz cx="12191695" cy="6858000" type="screen4x3"/>
+  <p:sldSz cx="12192000" cy="6858000"/>
   <p:notesSz cx="6858000" cy="9144000"/>
   <p:defaultTextStyle>
     <a:defPPr>
@@ -120,6 +120,22 @@
       </a:defRPr>
     </a:lvl9pPr>
   </p:defaultTextStyle>
+  <p:extLst>
+    <p:ext uri="{EFAFB233-063F-42B5-8137-9DF3F51BA10A}">
+      <p15:sldGuideLst xmlns:p15="http://schemas.microsoft.com/office/powerpoint/2012/main">
+        <p15:guide id="1" orient="horz" pos="2160">
+          <p15:clr>
+            <a:srgbClr val="A4A3A4"/>
+          </p15:clr>
+        </p15:guide>
+        <p15:guide id="2" pos="2880">
+          <p15:clr>
+            <a:srgbClr val="A4A3A4"/>
+          </p15:clr>
+        </p15:guide>
+      </p15:sldGuideLst>
+    </p:ext>
+  </p:extLst>
 </p:presentation>
 </file>
 
@@ -161,10 +177,9 @@
           <a:lstStyle/>
           <a:p>
             <a:r>
-              <a:rPr lang="en-US" smtClean="0"/>
+              <a:rPr lang="en-US"/>
               <a:t>Click to edit Master title style</a:t>
             </a:r>
-            <a:endParaRPr lang="en-US"/>
           </a:p>
         </p:txBody>
       </p:sp>
@@ -280,10 +295,9 @@
           </a:lstStyle>
           <a:p>
             <a:r>
-              <a:rPr lang="en-US" smtClean="0"/>
+              <a:rPr lang="en-US"/>
               <a:t>Click to edit Master subtitle style</a:t>
             </a:r>
-            <a:endParaRPr lang="en-US"/>
           </a:p>
         </p:txBody>
       </p:sp>
@@ -304,7 +318,7 @@
           <a:p>
             <a:fld id="{5BCAD085-E8A6-8845-BD4E-CB4CCA059FC4}" type="datetimeFigureOut">
               <a:rPr lang="en-US" smtClean="0"/>
-              <a:t>1/27/13</a:t>
+              <a:t>10/30/2026</a:t>
             </a:fld>
             <a:endParaRPr lang="en-US"/>
           </a:p>
@@ -398,10 +412,9 @@
           <a:lstStyle/>
           <a:p>
             <a:r>
-              <a:rPr lang="en-US" smtClean="0"/>
+              <a:rPr lang="en-US"/>
               <a:t>Click to edit Master title style</a:t>
             </a:r>
-            <a:endParaRPr lang="en-US"/>
           </a:p>
         </p:txBody>
       </p:sp>
@@ -422,38 +435,37 @@
           <a:p>
             <a:pPr lvl="0"/>
             <a:r>
-              <a:rPr lang="en-US" smtClean="0"/>
+              <a:rPr lang="en-US"/>
               <a:t>Click to edit Master text styles</a:t>
             </a:r>
           </a:p>
           <a:p>
             <a:pPr lvl="1"/>
             <a:r>
-              <a:rPr lang="en-US" smtClean="0"/>
+              <a:rPr lang="en-US"/>
               <a:t>Second level</a:t>
             </a:r>
           </a:p>
           <a:p>
             <a:pPr lvl="2"/>
             <a:r>
-              <a:rPr lang="en-US" smtClean="0"/>
+              <a:rPr lang="en-US"/>
               <a:t>Third level</a:t>
             </a:r>
           </a:p>
           <a:p>
             <a:pPr lvl="3"/>
             <a:r>
-              <a:rPr lang="en-US" smtClean="0"/>
+              <a:rPr lang="en-US"/>
               <a:t>Fourth level</a:t>
             </a:r>
           </a:p>
           <a:p>
             <a:pPr lvl="4"/>
             <a:r>
-              <a:rPr lang="en-US" smtClean="0"/>
+              <a:rPr lang="en-US"/>
               <a:t>Fifth level</a:t>
             </a:r>
-            <a:endParaRPr lang="en-US"/>
           </a:p>
         </p:txBody>
       </p:sp>
@@ -474,7 +486,7 @@
           <a:p>
             <a:fld id="{5BCAD085-E8A6-8845-BD4E-CB4CCA059FC4}" type="datetimeFigureOut">
               <a:rPr lang="en-US" smtClean="0"/>
-              <a:t>1/27/13</a:t>
+              <a:t>10/30/2026</a:t>
             </a:fld>
             <a:endParaRPr lang="en-US"/>
           </a:p>
@@ -573,10 +585,9 @@
           <a:lstStyle/>
           <a:p>
             <a:r>
-              <a:rPr lang="en-US" smtClean="0"/>
+              <a:rPr lang="en-US"/>
               <a:t>Click to edit Master title style</a:t>
             </a:r>
-            <a:endParaRPr lang="en-US"/>
           </a:p>
         </p:txBody>
       </p:sp>
@@ -602,38 +613,37 @@
           <a:p>
             <a:pPr lvl="0"/>
             <a:r>
-              <a:rPr lang="en-US" smtClean="0"/>
+              <a:rPr lang="en-US"/>
               <a:t>Click to edit Master text styles</a:t>
             </a:r>
           </a:p>
           <a:p>
             <a:pPr lvl="1"/>
             <a:r>
-              <a:rPr lang="en-US" smtClean="0"/>
+              <a:rPr lang="en-US"/>
               <a:t>Second level</a:t>
             </a:r>
           </a:p>
           <a:p>
             <a:pPr lvl="2"/>
             <a:r>
-              <a:rPr lang="en-US" smtClean="0"/>
+              <a:rPr lang="en-US"/>
               <a:t>Third level</a:t>
             </a:r>
           </a:p>
           <a:p>
             <a:pPr lvl="3"/>
             <a:r>
-              <a:rPr lang="en-US" smtClean="0"/>
+              <a:rPr lang="en-US"/>
               <a:t>Fourth level</a:t>
             </a:r>
           </a:p>
           <a:p>
             <a:pPr lvl="4"/>
             <a:r>
-              <a:rPr lang="en-US" smtClean="0"/>
+              <a:rPr lang="en-US"/>
               <a:t>Fifth level</a:t>
             </a:r>
-            <a:endParaRPr lang="en-US"/>
           </a:p>
         </p:txBody>
       </p:sp>
@@ -654,7 +664,7 @@
           <a:p>
             <a:fld id="{5BCAD085-E8A6-8845-BD4E-CB4CCA059FC4}" type="datetimeFigureOut">
               <a:rPr lang="en-US" smtClean="0"/>
-              <a:t>1/27/13</a:t>
+              <a:t>10/30/2026</a:t>
             </a:fld>
             <a:endParaRPr lang="en-US"/>
           </a:p>
@@ -748,10 +758,9 @@
           <a:lstStyle/>
           <a:p>
             <a:r>
-              <a:rPr lang="en-US" smtClean="0"/>
+              <a:rPr lang="en-US"/>
               <a:t>Click to edit Master title style</a:t>
             </a:r>
-            <a:endParaRPr lang="en-US"/>
           </a:p>
         </p:txBody>
       </p:sp>
@@ -772,38 +781,37 @@
           <a:p>
             <a:pPr lvl="0"/>
             <a:r>
-              <a:rPr lang="en-US" smtClean="0"/>
+              <a:rPr lang="en-US"/>
               <a:t>Click to edit Master text styles</a:t>
             </a:r>
           </a:p>
           <a:p>
             <a:pPr lvl="1"/>
             <a:r>
-              <a:rPr lang="en-US" smtClean="0"/>
+              <a:rPr lang="en-US"/>
               <a:t>Second level</a:t>
             </a:r>
           </a:p>
           <a:p>
             <a:pPr lvl="2"/>
             <a:r>
-              <a:rPr lang="en-US" smtClean="0"/>
+              <a:rPr lang="en-US"/>
               <a:t>Third level</a:t>
             </a:r>
           </a:p>
           <a:p>
             <a:pPr lvl="3"/>
             <a:r>
-              <a:rPr lang="en-US" smtClean="0"/>
+              <a:rPr lang="en-US"/>
               <a:t>Fourth level</a:t>
             </a:r>
           </a:p>
           <a:p>
             <a:pPr lvl="4"/>
             <a:r>
-              <a:rPr lang="en-US" smtClean="0"/>
+              <a:rPr lang="en-US"/>
               <a:t>Fifth level</a:t>
             </a:r>
-            <a:endParaRPr lang="en-US"/>
           </a:p>
         </p:txBody>
       </p:sp>
@@ -824,7 +832,7 @@
           <a:p>
             <a:fld id="{5BCAD085-E8A6-8845-BD4E-CB4CCA059FC4}" type="datetimeFigureOut">
               <a:rPr lang="en-US" smtClean="0"/>
-              <a:t>1/27/13</a:t>
+              <a:t>10/30/2026</a:t>
             </a:fld>
             <a:endParaRPr lang="en-US"/>
           </a:p>
@@ -927,10 +935,9 @@
           </a:lstStyle>
           <a:p>
             <a:r>
-              <a:rPr lang="en-US" smtClean="0"/>
+              <a:rPr lang="en-US"/>
               <a:t>Click to edit Master title style</a:t>
             </a:r>
-            <a:endParaRPr lang="en-US"/>
           </a:p>
         </p:txBody>
       </p:sp>
@@ -1047,7 +1054,7 @@
           <a:p>
             <a:pPr lvl="0"/>
             <a:r>
-              <a:rPr lang="en-US" smtClean="0"/>
+              <a:rPr lang="en-US"/>
               <a:t>Click to edit Master text styles</a:t>
             </a:r>
           </a:p>
@@ -1070,7 +1077,7 @@
           <a:p>
             <a:fld id="{5BCAD085-E8A6-8845-BD4E-CB4CCA059FC4}" type="datetimeFigureOut">
               <a:rPr lang="en-US" smtClean="0"/>
-              <a:t>1/27/13</a:t>
+              <a:t>10/30/2026</a:t>
             </a:fld>
             <a:endParaRPr lang="en-US"/>
           </a:p>
@@ -1164,10 +1171,9 @@
           <a:lstStyle/>
           <a:p>
             <a:r>
-              <a:rPr lang="en-US" smtClean="0"/>
+              <a:rPr lang="en-US"/>
               <a:t>Click to edit Master title style</a:t>
             </a:r>
-            <a:endParaRPr lang="en-US"/>
           </a:p>
         </p:txBody>
       </p:sp>
@@ -1221,38 +1227,37 @@
           <a:p>
             <a:pPr lvl="0"/>
             <a:r>
-              <a:rPr lang="en-US" smtClean="0"/>
+              <a:rPr lang="en-US"/>
               <a:t>Click to edit Master text styles</a:t>
             </a:r>
           </a:p>
           <a:p>
             <a:pPr lvl="1"/>
             <a:r>
-              <a:rPr lang="en-US" smtClean="0"/>
+              <a:rPr lang="en-US"/>
               <a:t>Second level</a:t>
             </a:r>
           </a:p>
           <a:p>
             <a:pPr lvl="2"/>
             <a:r>
-              <a:rPr lang="en-US" smtClean="0"/>
+              <a:rPr lang="en-US"/>
               <a:t>Third level</a:t>
             </a:r>
           </a:p>
           <a:p>
             <a:pPr lvl="3"/>
             <a:r>
-              <a:rPr lang="en-US" smtClean="0"/>
+              <a:rPr lang="en-US"/>
               <a:t>Fourth level</a:t>
             </a:r>
           </a:p>
           <a:p>
             <a:pPr lvl="4"/>
             <a:r>
-              <a:rPr lang="en-US" smtClean="0"/>
+              <a:rPr lang="en-US"/>
               <a:t>Fifth level</a:t>
             </a:r>
-            <a:endParaRPr lang="en-US"/>
           </a:p>
         </p:txBody>
       </p:sp>
@@ -1306,38 +1311,37 @@
           <a:p>
             <a:pPr lvl="0"/>
             <a:r>
-              <a:rPr lang="en-US" smtClean="0"/>
+              <a:rPr lang="en-US"/>
               <a:t>Click to edit Master text styles</a:t>
             </a:r>
           </a:p>
           <a:p>
             <a:pPr lvl="1"/>
             <a:r>
-              <a:rPr lang="en-US" smtClean="0"/>
+              <a:rPr lang="en-US"/>
               <a:t>Second level</a:t>
             </a:r>
           </a:p>
           <a:p>
             <a:pPr lvl="2"/>
             <a:r>
-              <a:rPr lang="en-US" smtClean="0"/>
+              <a:rPr lang="en-US"/>
               <a:t>Third level</a:t>
             </a:r>
           </a:p>
           <a:p>
             <a:pPr lvl="3"/>
             <a:r>
-              <a:rPr lang="en-US" smtClean="0"/>
+              <a:rPr lang="en-US"/>
               <a:t>Fourth level</a:t>
             </a:r>
           </a:p>
           <a:p>
             <a:pPr lvl="4"/>
             <a:r>
-              <a:rPr lang="en-US" smtClean="0"/>
+              <a:rPr lang="en-US"/>
               <a:t>Fifth level</a:t>
             </a:r>
-            <a:endParaRPr lang="en-US"/>
           </a:p>
         </p:txBody>
       </p:sp>
@@ -1358,7 +1362,7 @@
           <a:p>
             <a:fld id="{5BCAD085-E8A6-8845-BD4E-CB4CCA059FC4}" type="datetimeFigureOut">
               <a:rPr lang="en-US" smtClean="0"/>
-              <a:t>1/27/13</a:t>
+              <a:t>10/30/2026</a:t>
             </a:fld>
             <a:endParaRPr lang="en-US"/>
           </a:p>
@@ -1456,10 +1460,9 @@
           </a:lstStyle>
           <a:p>
             <a:r>
-              <a:rPr lang="en-US" smtClean="0"/>
+              <a:rPr lang="en-US"/>
               <a:t>Click to edit Master title style</a:t>
             </a:r>
-            <a:endParaRPr lang="en-US"/>
           </a:p>
         </p:txBody>
       </p:sp>
@@ -1522,7 +1525,7 @@
           <a:p>
             <a:pPr lvl="0"/>
             <a:r>
-              <a:rPr lang="en-US" smtClean="0"/>
+              <a:rPr lang="en-US"/>
               <a:t>Click to edit Master text styles</a:t>
             </a:r>
           </a:p>
@@ -1578,38 +1581,37 @@
           <a:p>
             <a:pPr lvl="0"/>
             <a:r>
-              <a:rPr lang="en-US" smtClean="0"/>
+              <a:rPr lang="en-US"/>
               <a:t>Click to edit Master text styles</a:t>
             </a:r>
           </a:p>
           <a:p>
             <a:pPr lvl="1"/>
             <a:r>
-              <a:rPr lang="en-US" smtClean="0"/>
+              <a:rPr lang="en-US"/>
               <a:t>Second level</a:t>
             </a:r>
           </a:p>
           <a:p>
             <a:pPr lvl="2"/>
             <a:r>
-              <a:rPr lang="en-US" smtClean="0"/>
+              <a:rPr lang="en-US"/>
               <a:t>Third level</a:t>
             </a:r>
           </a:p>
           <a:p>
             <a:pPr lvl="3"/>
             <a:r>
-              <a:rPr lang="en-US" smtClean="0"/>
+              <a:rPr lang="en-US"/>
               <a:t>Fourth level</a:t>
             </a:r>
           </a:p>
           <a:p>
             <a:pPr lvl="4"/>
             <a:r>
-              <a:rPr lang="en-US" smtClean="0"/>
+              <a:rPr lang="en-US"/>
               <a:t>Fifth level</a:t>
             </a:r>
-            <a:endParaRPr lang="en-US"/>
           </a:p>
         </p:txBody>
       </p:sp>
@@ -1672,7 +1674,7 @@
           <a:p>
             <a:pPr lvl="0"/>
             <a:r>
-              <a:rPr lang="en-US" smtClean="0"/>
+              <a:rPr lang="en-US"/>
               <a:t>Click to edit Master text styles</a:t>
             </a:r>
           </a:p>
@@ -1728,38 +1730,37 @@
           <a:p>
             <a:pPr lvl="0"/>
             <a:r>
-              <a:rPr lang="en-US" smtClean="0"/>
+              <a:rPr lang="en-US"/>
               <a:t>Click to edit Master text styles</a:t>
             </a:r>
           </a:p>
           <a:p>
             <a:pPr lvl="1"/>
             <a:r>
-              <a:rPr lang="en-US" smtClean="0"/>
+              <a:rPr lang="en-US"/>
               <a:t>Second level</a:t>
             </a:r>
           </a:p>
           <a:p>
             <a:pPr lvl="2"/>
             <a:r>
-              <a:rPr lang="en-US" smtClean="0"/>
+              <a:rPr lang="en-US"/>
               <a:t>Third level</a:t>
             </a:r>
           </a:p>
           <a:p>
             <a:pPr lvl="3"/>
             <a:r>
-              <a:rPr lang="en-US" smtClean="0"/>
+              <a:rPr lang="en-US"/>
               <a:t>Fourth level</a:t>
             </a:r>
           </a:p>
           <a:p>
             <a:pPr lvl="4"/>
             <a:r>
-              <a:rPr lang="en-US" smtClean="0"/>
+              <a:rPr lang="en-US"/>
               <a:t>Fifth level</a:t>
             </a:r>
-            <a:endParaRPr lang="en-US"/>
           </a:p>
         </p:txBody>
       </p:sp>
@@ -1780,7 +1781,7 @@
           <a:p>
             <a:fld id="{5BCAD085-E8A6-8845-BD4E-CB4CCA059FC4}" type="datetimeFigureOut">
               <a:rPr lang="en-US" smtClean="0"/>
-              <a:t>1/27/13</a:t>
+              <a:t>10/30/2026</a:t>
             </a:fld>
             <a:endParaRPr lang="en-US"/>
           </a:p>
@@ -1874,10 +1875,9 @@
           <a:lstStyle/>
           <a:p>
             <a:r>
-              <a:rPr lang="en-US" smtClean="0"/>
+              <a:rPr lang="en-US"/>
               <a:t>Click to edit Master title style</a:t>
             </a:r>
-            <a:endParaRPr lang="en-US"/>
           </a:p>
         </p:txBody>
       </p:sp>
@@ -1898,7 +1898,7 @@
           <a:p>
             <a:fld id="{5BCAD085-E8A6-8845-BD4E-CB4CCA059FC4}" type="datetimeFigureOut">
               <a:rPr lang="en-US" smtClean="0"/>
-              <a:t>1/27/13</a:t>
+              <a:t>10/30/2026</a:t>
             </a:fld>
             <a:endParaRPr lang="en-US"/>
           </a:p>
@@ -1993,7 +1993,7 @@
           <a:p>
             <a:fld id="{5BCAD085-E8A6-8845-BD4E-CB4CCA059FC4}" type="datetimeFigureOut">
               <a:rPr lang="en-US" smtClean="0"/>
-              <a:t>1/27/13</a:t>
+              <a:t>10/30/2026</a:t>
             </a:fld>
             <a:endParaRPr lang="en-US"/>
           </a:p>
@@ -2096,10 +2096,9 @@
           </a:lstStyle>
           <a:p>
             <a:r>
-              <a:rPr lang="en-US" smtClean="0"/>
+              <a:rPr lang="en-US"/>
               <a:t>Click to edit Master title style</a:t>
             </a:r>
-            <a:endParaRPr lang="en-US"/>
           </a:p>
         </p:txBody>
       </p:sp>
@@ -2153,38 +2152,37 @@
           <a:p>
             <a:pPr lvl="0"/>
             <a:r>
-              <a:rPr lang="en-US" smtClean="0"/>
+              <a:rPr lang="en-US"/>
               <a:t>Click to edit Master text styles</a:t>
             </a:r>
           </a:p>
           <a:p>
             <a:pPr lvl="1"/>
             <a:r>
-              <a:rPr lang="en-US" smtClean="0"/>
+              <a:rPr lang="en-US"/>
               <a:t>Second level</a:t>
             </a:r>
           </a:p>
           <a:p>
             <a:pPr lvl="2"/>
             <a:r>
-              <a:rPr lang="en-US" smtClean="0"/>
+              <a:rPr lang="en-US"/>
               <a:t>Third level</a:t>
             </a:r>
           </a:p>
           <a:p>
             <a:pPr lvl="3"/>
             <a:r>
-              <a:rPr lang="en-US" smtClean="0"/>
+              <a:rPr lang="en-US"/>
               <a:t>Fourth level</a:t>
             </a:r>
           </a:p>
           <a:p>
             <a:pPr lvl="4"/>
             <a:r>
-              <a:rPr lang="en-US" smtClean="0"/>
+              <a:rPr lang="en-US"/>
               <a:t>Fifth level</a:t>
             </a:r>
-            <a:endParaRPr lang="en-US"/>
           </a:p>
         </p:txBody>
       </p:sp>
@@ -2247,7 +2245,7 @@
           <a:p>
             <a:pPr lvl="0"/>
             <a:r>
-              <a:rPr lang="en-US" smtClean="0"/>
+              <a:rPr lang="en-US"/>
               <a:t>Click to edit Master text styles</a:t>
             </a:r>
           </a:p>
@@ -2270,7 +2268,7 @@
           <a:p>
             <a:fld id="{5BCAD085-E8A6-8845-BD4E-CB4CCA059FC4}" type="datetimeFigureOut">
               <a:rPr lang="en-US" smtClean="0"/>
-              <a:t>1/27/13</a:t>
+              <a:t>10/30/2026</a:t>
             </a:fld>
             <a:endParaRPr lang="en-US"/>
           </a:p>
@@ -2373,10 +2371,9 @@
           </a:lstStyle>
           <a:p>
             <a:r>
-              <a:rPr lang="en-US" smtClean="0"/>
+              <a:rPr lang="en-US"/>
               <a:t>Click to edit Master title style</a:t>
             </a:r>
-            <a:endParaRPr lang="en-US"/>
           </a:p>
         </p:txBody>
       </p:sp>
@@ -2500,7 +2497,7 @@
           <a:p>
             <a:pPr lvl="0"/>
             <a:r>
-              <a:rPr lang="en-US" smtClean="0"/>
+              <a:rPr lang="en-US"/>
               <a:t>Click to edit Master text styles</a:t>
             </a:r>
           </a:p>
@@ -2523,7 +2520,7 @@
           <a:p>
             <a:fld id="{5BCAD085-E8A6-8845-BD4E-CB4CCA059FC4}" type="datetimeFigureOut">
               <a:rPr lang="en-US" smtClean="0"/>
-              <a:t>1/27/13</a:t>
+              <a:t>10/30/2026</a:t>
             </a:fld>
             <a:endParaRPr lang="en-US"/>
           </a:p>
@@ -2632,10 +2629,9 @@
           <a:lstStyle/>
           <a:p>
             <a:r>
-              <a:rPr lang="en-US" smtClean="0"/>
+              <a:rPr lang="en-US"/>
               <a:t>Click to edit Master title style</a:t>
             </a:r>
-            <a:endParaRPr lang="en-US"/>
           </a:p>
         </p:txBody>
       </p:sp>
@@ -2666,38 +2662,37 @@
           <a:p>
             <a:pPr lvl="0"/>
             <a:r>
-              <a:rPr lang="en-US" smtClean="0"/>
+              <a:rPr lang="en-US"/>
               <a:t>Click to edit Master text styles</a:t>
             </a:r>
           </a:p>
           <a:p>
             <a:pPr lvl="1"/>
             <a:r>
-              <a:rPr lang="en-US" smtClean="0"/>
+              <a:rPr lang="en-US"/>
               <a:t>Second level</a:t>
             </a:r>
           </a:p>
           <a:p>
             <a:pPr lvl="2"/>
             <a:r>
-              <a:rPr lang="en-US" smtClean="0"/>
+              <a:rPr lang="en-US"/>
               <a:t>Third level</a:t>
             </a:r>
           </a:p>
           <a:p>
             <a:pPr lvl="3"/>
             <a:r>
-              <a:rPr lang="en-US" smtClean="0"/>
+              <a:rPr lang="en-US"/>
               <a:t>Fourth level</a:t>
             </a:r>
           </a:p>
           <a:p>
             <a:pPr lvl="4"/>
             <a:r>
-              <a:rPr lang="en-US" smtClean="0"/>
+              <a:rPr lang="en-US"/>
               <a:t>Fifth level</a:t>
             </a:r>
-            <a:endParaRPr lang="en-US"/>
           </a:p>
         </p:txBody>
       </p:sp>
@@ -2736,7 +2731,7 @@
           <a:p>
             <a:fld id="{5BCAD085-E8A6-8845-BD4E-CB4CCA059FC4}" type="datetimeFigureOut">
               <a:rPr lang="en-US" smtClean="0"/>
-              <a:t>1/27/13</a:t>
+              <a:t>10/30/2026</a:t>
             </a:fld>
             <a:endParaRPr lang="en-US"/>
           </a:p>
@@ -3095,7 +3090,7 @@
 </file>
 
 <file path=ppt/slides/slide1.xml><?xml version="1.0" encoding="utf-8"?>
-<p:sld xmlns:a="http://schemas.openxmlformats.org/drawingml/2006/main" xmlns:p="http://schemas.openxmlformats.org/presentationml/2006/main" xmlns:r="http://schemas.openxmlformats.org/officeDocument/2006/relationships">
+<p:sld xmlns:a="http://schemas.openxmlformats.org/drawingml/2006/main" xmlns:r="http://schemas.openxmlformats.org/officeDocument/2006/relationships" xmlns:p="http://schemas.openxmlformats.org/presentationml/2006/main">
   <p:cSld>
     <p:spTree>
       <p:nvGrpSpPr>
@@ -3103,7 +3098,14 @@
         <p:cNvGrpSpPr/>
         <p:nvPr/>
       </p:nvGrpSpPr>
-      <p:grpSpPr/>
+      <p:grpSpPr>
+        <a:xfrm>
+          <a:off x="0" y="0"/>
+          <a:ext cx="0" cy="0"/>
+          <a:chOff x="0" y="0"/>
+          <a:chExt cx="0" cy="0"/>
+        </a:xfrm>
+      </p:grpSpPr>
       <p:sp>
         <p:nvSpPr>
           <p:cNvPr id="2" name="Rectangle 1"/>
@@ -3144,19 +3146,79 @@
           <a:lstStyle/>
           <a:p>
             <a:pPr algn="ctr"/>
-          </a:p>
-        </p:txBody>
-      </p:sp>
-      <p:sp>
-        <p:nvSpPr>
-          <p:cNvPr id="3" name="TextBox 2"/>
+            <a:endParaRPr/>
+          </a:p>
+        </p:txBody>
+      </p:sp>
+      <p:pic>
+        <p:nvPicPr>
+          <p:cNvPr id="3" name="Picture 2" descr="phenikaa_logo.png"/>
+          <p:cNvPicPr>
+            <a:picLocks noChangeAspect="1"/>
+          </p:cNvPicPr>
+          <p:nvPr/>
+        </p:nvPicPr>
+        <p:blipFill>
+          <a:blip r:embed="rId2"/>
+          <a:stretch>
+            <a:fillRect/>
+          </a:stretch>
+        </p:blipFill>
+        <p:spPr>
+          <a:xfrm>
+            <a:off x="10332720" y="228600"/>
+            <a:ext cx="1371600" cy="834887"/>
+          </a:xfrm>
+          <a:prstGeom prst="rect">
+            <a:avLst/>
+          </a:prstGeom>
+        </p:spPr>
+      </p:pic>
+      <p:sp>
+        <p:nvSpPr>
+          <p:cNvPr id="4" name="TextBox 3"/>
           <p:cNvSpPr txBox="1"/>
           <p:nvPr/>
         </p:nvSpPr>
         <p:spPr>
           <a:xfrm>
+            <a:off x="10058400" y="6446520"/>
+            <a:ext cx="1645920" cy="320040"/>
+          </a:xfrm>
+          <a:prstGeom prst="rect">
+            <a:avLst/>
+          </a:prstGeom>
+          <a:noFill/>
+        </p:spPr>
+        <p:txBody>
+          <a:bodyPr wrap="none" lIns="0" tIns="0" rIns="0" bIns="0">
+            <a:spAutoFit/>
+          </a:bodyPr>
+          <a:lstStyle/>
+          <a:p>
+            <a:pPr algn="r">
+              <a:defRPr sz="1100" b="1">
+                <a:solidFill>
+                  <a:srgbClr val="B0BEC5"/>
+                </a:solidFill>
+              </a:defRPr>
+            </a:pPr>
+            <a:r>
+              <a:t>01 / 18</a:t>
+            </a:r>
+          </a:p>
+        </p:txBody>
+      </p:sp>
+      <p:sp>
+        <p:nvSpPr>
+          <p:cNvPr id="5" name="TextBox 4"/>
+          <p:cNvSpPr txBox="1"/>
+          <p:nvPr/>
+        </p:nvSpPr>
+        <p:spPr>
+          <a:xfrm>
             <a:off x="1097280" y="1371600"/>
-            <a:ext cx="10058400" cy="4114800"/>
+            <a:ext cx="10058400" cy="3252172"/>
           </a:xfrm>
           <a:prstGeom prst="rect">
             <a:avLst/>
@@ -3168,21 +3230,6 @@
             <a:spAutoFit/>
           </a:bodyPr>
           <a:lstStyle/>
-          <a:p>
-            <a:pPr>
-              <a:spcAft>
-                <a:spcPts val="1600"/>
-              </a:spcAft>
-              <a:defRPr sz="1400" b="1">
-                <a:solidFill>
-                  <a:srgbClr val="80D8FF"/>
-                </a:solidFill>
-              </a:defRPr>
-            </a:pPr>
-            <a:r>
-              <a:t>TRƯỜNG ĐẠI HỌC PHENIKAA  •  KHOA CÔNG NGHỆ THÔNG TIN</a:t>
-            </a:r>
-          </a:p>
           <a:p>
             <a:pPr>
               <a:spcAft>
@@ -3195,17 +3242,91 @@
               </a:defRPr>
             </a:pPr>
             <a:r>
+              <a:rPr dirty="0"/>
               <a:t>BÁO CÁO KIỂM ĐỊNH &amp; ĐÁNH GIÁ CHẤT LƯỢNG</a:t>
             </a:r>
-            <a:br/>
-            <a:r>
+            <a:br>
+              <a:rPr dirty="0"/>
+            </a:br>
+            <a:r>
+              <a:rPr dirty="0"/>
               <a:t>HỆ THỐNG NGÂN HÀNG SỐ MINIBANK</a:t>
             </a:r>
           </a:p>
           <a:p>
             <a:pPr>
               <a:spcAft>
-                <a:spcPts val="800"/>
+                <a:spcPts val="1200"/>
+              </a:spcAft>
+              <a:defRPr sz="1800" b="1">
+                <a:solidFill>
+                  <a:srgbClr val="80D8FF"/>
+                </a:solidFill>
+              </a:defRPr>
+            </a:pPr>
+            <a:r>
+              <a:rPr dirty="0" err="1"/>
+              <a:t>Nhóm</a:t>
+            </a:r>
+            <a:r>
+              <a:rPr dirty="0"/>
+              <a:t> 6: </a:t>
+            </a:r>
+            <a:endParaRPr lang="vi-VN" dirty="0"/>
+          </a:p>
+          <a:p>
+            <a:pPr>
+              <a:spcAft>
+                <a:spcPts val="1200"/>
+              </a:spcAft>
+              <a:defRPr sz="1800" b="1">
+                <a:solidFill>
+                  <a:srgbClr val="80D8FF"/>
+                </a:solidFill>
+              </a:defRPr>
+            </a:pPr>
+            <a:r>
+              <a:rPr lang="vi-VN" dirty="0"/>
+              <a:t>            </a:t>
+            </a:r>
+            <a:r>
+              <a:rPr dirty="0"/>
+              <a:t>Nguyễn Văn Thành (23010191)</a:t>
+            </a:r>
+            <a:endParaRPr lang="vi-VN" dirty="0"/>
+          </a:p>
+          <a:p>
+            <a:pPr>
+              <a:spcAft>
+                <a:spcPts val="1200"/>
+              </a:spcAft>
+              <a:defRPr sz="1800" b="1">
+                <a:solidFill>
+                  <a:srgbClr val="80D8FF"/>
+                </a:solidFill>
+              </a:defRPr>
+            </a:pPr>
+            <a:r>
+              <a:rPr lang="vi-VN" dirty="0"/>
+              <a:t>            </a:t>
+            </a:r>
+            <a:r>
+              <a:rPr dirty="0"/>
+              <a:t>Hà Xuân </a:t>
+            </a:r>
+            <a:r>
+              <a:rPr dirty="0" err="1"/>
+              <a:t>Đại</a:t>
+            </a:r>
+            <a:r>
+              <a:rPr dirty="0"/>
+              <a:t> (23010494)</a:t>
+            </a:r>
+          </a:p>
+          <a:p>
+            <a:pPr>
+              <a:spcAft>
+                <a:spcPts val="1000"/>
               </a:spcAft>
               <a:defRPr sz="1600" b="1">
                 <a:solidFill>
@@ -3214,7 +3335,36 @@
               </a:defRPr>
             </a:pPr>
             <a:r>
-              <a:t>Giảng viên hướng dẫn: TS. Trịnh Thanh Bình</a:t>
+              <a:rPr dirty="0" err="1"/>
+              <a:t>Giảng</a:t>
+            </a:r>
+            <a:r>
+              <a:rPr dirty="0"/>
+              <a:t> </a:t>
+            </a:r>
+            <a:r>
+              <a:rPr dirty="0" err="1"/>
+              <a:t>viên</a:t>
+            </a:r>
+            <a:r>
+              <a:rPr dirty="0"/>
+              <a:t> </a:t>
+            </a:r>
+            <a:r>
+              <a:rPr dirty="0" err="1"/>
+              <a:t>hướng</a:t>
+            </a:r>
+            <a:r>
+              <a:rPr dirty="0"/>
+              <a:t> </a:t>
+            </a:r>
+            <a:r>
+              <a:rPr dirty="0" err="1"/>
+              <a:t>dẫn</a:t>
+            </a:r>
+            <a:r>
+              <a:rPr dirty="0"/>
+              <a:t>: TS. Trịnh Thanh Bình</a:t>
             </a:r>
           </a:p>
           <a:p>
@@ -3226,7 +3376,32 @@
               </a:defRPr>
             </a:pPr>
             <a:r>
-              <a:t>Đơn vị đào tạo: Học kỳ I - Năm học 2025 - 2026  •  Hà Nội, 2026</a:t>
+              <a:rPr dirty="0"/>
+              <a:t>Học </a:t>
+            </a:r>
+            <a:r>
+              <a:rPr dirty="0" err="1"/>
+              <a:t>kỳ</a:t>
+            </a:r>
+            <a:r>
+              <a:rPr dirty="0"/>
+              <a:t> I - </a:t>
+            </a:r>
+            <a:r>
+              <a:rPr dirty="0" err="1"/>
+              <a:t>Năm</a:t>
+            </a:r>
+            <a:r>
+              <a:rPr dirty="0"/>
+              <a:t> </a:t>
+            </a:r>
+            <a:r>
+              <a:rPr dirty="0" err="1"/>
+              <a:t>học</a:t>
+            </a:r>
+            <a:r>
+              <a:rPr dirty="0"/>
+              <a:t> 2025 - 2026</a:t>
             </a:r>
           </a:p>
         </p:txBody>
@@ -3240,7 +3415,7 @@
 </file>
 
 <file path=ppt/slides/slide10.xml><?xml version="1.0" encoding="utf-8"?>
-<p:sld xmlns:a="http://schemas.openxmlformats.org/drawingml/2006/main" xmlns:p="http://schemas.openxmlformats.org/presentationml/2006/main" xmlns:r="http://schemas.openxmlformats.org/officeDocument/2006/relationships">
+<p:sld xmlns:a="http://schemas.openxmlformats.org/drawingml/2006/main" xmlns:r="http://schemas.openxmlformats.org/officeDocument/2006/relationships" xmlns:p="http://schemas.openxmlformats.org/presentationml/2006/main">
   <p:cSld>
     <p:spTree>
       <p:nvGrpSpPr>
@@ -3248,7 +3423,14 @@
         <p:cNvGrpSpPr/>
         <p:nvPr/>
       </p:nvGrpSpPr>
-      <p:grpSpPr/>
+      <p:grpSpPr>
+        <a:xfrm>
+          <a:off x="0" y="0"/>
+          <a:ext cx="0" cy="0"/>
+          <a:chOff x="0" y="0"/>
+          <a:chExt cx="0" cy="0"/>
+        </a:xfrm>
+      </p:grpSpPr>
       <p:sp>
         <p:nvSpPr>
           <p:cNvPr id="2" name="Rectangle 1"/>
@@ -3289,12 +3471,72 @@
           <a:lstStyle/>
           <a:p>
             <a:pPr algn="ctr"/>
-          </a:p>
-        </p:txBody>
-      </p:sp>
-      <p:sp>
-        <p:nvSpPr>
-          <p:cNvPr id="3" name="TextBox 2"/>
+            <a:endParaRPr/>
+          </a:p>
+        </p:txBody>
+      </p:sp>
+      <p:pic>
+        <p:nvPicPr>
+          <p:cNvPr id="3" name="Picture 2" descr="phenikaa_logo.png"/>
+          <p:cNvPicPr>
+            <a:picLocks noChangeAspect="1"/>
+          </p:cNvPicPr>
+          <p:nvPr/>
+        </p:nvPicPr>
+        <p:blipFill>
+          <a:blip r:embed="rId2"/>
+          <a:stretch>
+            <a:fillRect/>
+          </a:stretch>
+        </p:blipFill>
+        <p:spPr>
+          <a:xfrm>
+            <a:off x="10332720" y="228600"/>
+            <a:ext cx="1371600" cy="834887"/>
+          </a:xfrm>
+          <a:prstGeom prst="rect">
+            <a:avLst/>
+          </a:prstGeom>
+        </p:spPr>
+      </p:pic>
+      <p:sp>
+        <p:nvSpPr>
+          <p:cNvPr id="4" name="TextBox 3"/>
+          <p:cNvSpPr txBox="1"/>
+          <p:nvPr/>
+        </p:nvSpPr>
+        <p:spPr>
+          <a:xfrm>
+            <a:off x="10058400" y="6446520"/>
+            <a:ext cx="1645920" cy="320040"/>
+          </a:xfrm>
+          <a:prstGeom prst="rect">
+            <a:avLst/>
+          </a:prstGeom>
+          <a:noFill/>
+        </p:spPr>
+        <p:txBody>
+          <a:bodyPr wrap="none" lIns="0" tIns="0" rIns="0" bIns="0">
+            <a:spAutoFit/>
+          </a:bodyPr>
+          <a:lstStyle/>
+          <a:p>
+            <a:pPr algn="r">
+              <a:defRPr sz="1100" b="1">
+                <a:solidFill>
+                  <a:srgbClr val="B0BEC5"/>
+                </a:solidFill>
+              </a:defRPr>
+            </a:pPr>
+            <a:r>
+              <a:t>10 / 18</a:t>
+            </a:r>
+          </a:p>
+        </p:txBody>
+      </p:sp>
+      <p:sp>
+        <p:nvSpPr>
+          <p:cNvPr id="5" name="TextBox 4"/>
           <p:cNvSpPr txBox="1"/>
           <p:nvPr/>
         </p:nvSpPr>
@@ -3360,19 +3602,23 @@
             </a:r>
             <a:br/>
             <a:r>
-              <a:t>1. Chạy tự động Collection Runner trên Postman Desktop (17/17 Passed).</a:t>
+              <a:t>1. Chạy tự động Collection Runner trên Postman Desktop (10 APIs, 17/17 Assertions Passed 100%, 38ms).</a:t>
             </a:r>
             <a:br/>
             <a:r>
-              <a:t>2. Gửi request TC_API_ADM_01 kiểm tra cấp phát Token JWT (200 OK).</a:t>
+              <a:t>2. Gửi request TC_API_ADM_01: Admin Login kiểm tra xác thực &amp; cấp JWT Bearer Token (200 OK).</a:t>
             </a:r>
             <a:br/>
             <a:r>
-              <a:t>3. Gửi request TC_API_SEC_01 kiểm tra chặn truy cập trái phép (401 Unauthorized).</a:t>
+              <a:t>3. Gửi request TC_API_ADM_02: Get Dashboard Stats truy xuất dữ liệu KPI tài chính JSON (200 OK).</a:t>
             </a:r>
             <a:br/>
             <a:r>
-              <a:t>4. Chạy lệnh dòng lệnh tự động siêu tốc với Newman CLI trên Terminal.</a:t>
+              <a:t>4. Gửi request TC_API_SEC_01: Protected API without Token chặn truy cập trái phép (401 Unauthorized).</a:t>
+            </a:r>
+            <a:br/>
+            <a:r>
+              <a:t>(Bổ trợ: Chạy tự động hóa CI/CD siêu tốc bằng công cụ Newman CLI trên Terminal).</a:t>
             </a:r>
           </a:p>
         </p:txBody>
@@ -3386,7 +3632,7 @@
 </file>
 
 <file path=ppt/slides/slide11.xml><?xml version="1.0" encoding="utf-8"?>
-<p:sld xmlns:a="http://schemas.openxmlformats.org/drawingml/2006/main" xmlns:p="http://schemas.openxmlformats.org/presentationml/2006/main" xmlns:r="http://schemas.openxmlformats.org/officeDocument/2006/relationships">
+<p:sld xmlns:a="http://schemas.openxmlformats.org/drawingml/2006/main" xmlns:r="http://schemas.openxmlformats.org/officeDocument/2006/relationships" xmlns:p="http://schemas.openxmlformats.org/presentationml/2006/main">
   <p:cSld>
     <p:spTree>
       <p:nvGrpSpPr>
@@ -3394,7 +3640,14 @@
         <p:cNvGrpSpPr/>
         <p:nvPr/>
       </p:nvGrpSpPr>
-      <p:grpSpPr/>
+      <p:grpSpPr>
+        <a:xfrm>
+          <a:off x="0" y="0"/>
+          <a:ext cx="0" cy="0"/>
+          <a:chOff x="0" y="0"/>
+          <a:chExt cx="0" cy="0"/>
+        </a:xfrm>
+      </p:grpSpPr>
       <p:sp>
         <p:nvSpPr>
           <p:cNvPr id="2" name="TextBox 1"/>
@@ -3404,7 +3657,7 @@
         <p:spPr>
           <a:xfrm>
             <a:off x="731520" y="365760"/>
-            <a:ext cx="10698480" cy="1005840"/>
+            <a:ext cx="9144000" cy="777240"/>
           </a:xfrm>
           <a:prstGeom prst="rect">
             <a:avLst/>
@@ -3418,22 +3671,7 @@
           <a:lstStyle/>
           <a:p>
             <a:pPr>
-              <a:defRPr sz="1100" b="1">
-                <a:solidFill>
-                  <a:srgbClr val="00838F"/>
-                </a:solidFill>
-              </a:defRPr>
-            </a:pPr>
-            <a:r>
-              <a:t>TRƯỜNG ĐẠI HỌC PHENIKAA • KHOA CÔNG NGHỆ THÔNG TIN</a:t>
-            </a:r>
-          </a:p>
-          <a:p>
-            <a:pPr>
-              <a:spcBef>
-                <a:spcPts val="400"/>
-              </a:spcBef>
-              <a:defRPr sz="2400" b="1">
+              <a:defRPr sz="2300" b="1">
                 <a:solidFill>
                   <a:srgbClr val="1F497D"/>
                 </a:solidFill>
@@ -3453,8 +3691,8 @@
         </p:nvSpPr>
         <p:spPr>
           <a:xfrm>
-            <a:off x="731520" y="1371600"/>
-            <a:ext cx="10728655" cy="36576"/>
+            <a:off x="731520" y="1234440"/>
+            <a:ext cx="10728655" cy="32004"/>
           </a:xfrm>
           <a:prstGeom prst="rect">
             <a:avLst/>
@@ -3487,19 +3725,79 @@
           <a:lstStyle/>
           <a:p>
             <a:pPr algn="ctr"/>
-          </a:p>
-        </p:txBody>
-      </p:sp>
-      <p:sp>
-        <p:nvSpPr>
-          <p:cNvPr id="4" name="TextBox 3"/>
+            <a:endParaRPr/>
+          </a:p>
+        </p:txBody>
+      </p:sp>
+      <p:pic>
+        <p:nvPicPr>
+          <p:cNvPr id="4" name="Picture 3" descr="phenikaa_logo.png"/>
+          <p:cNvPicPr>
+            <a:picLocks noChangeAspect="1"/>
+          </p:cNvPicPr>
+          <p:nvPr/>
+        </p:nvPicPr>
+        <p:blipFill>
+          <a:blip r:embed="rId2"/>
+          <a:stretch>
+            <a:fillRect/>
+          </a:stretch>
+        </p:blipFill>
+        <p:spPr>
+          <a:xfrm>
+            <a:off x="10332720" y="228600"/>
+            <a:ext cx="1371600" cy="834887"/>
+          </a:xfrm>
+          <a:prstGeom prst="rect">
+            <a:avLst/>
+          </a:prstGeom>
+        </p:spPr>
+      </p:pic>
+      <p:sp>
+        <p:nvSpPr>
+          <p:cNvPr id="5" name="TextBox 4"/>
           <p:cNvSpPr txBox="1"/>
           <p:nvPr/>
         </p:nvSpPr>
         <p:spPr>
           <a:xfrm>
-            <a:off x="731520" y="1645920"/>
-            <a:ext cx="5303520" cy="548640"/>
+            <a:off x="10058400" y="6446520"/>
+            <a:ext cx="1645920" cy="320040"/>
+          </a:xfrm>
+          <a:prstGeom prst="rect">
+            <a:avLst/>
+          </a:prstGeom>
+          <a:noFill/>
+        </p:spPr>
+        <p:txBody>
+          <a:bodyPr wrap="none" lIns="0" tIns="0" rIns="0" bIns="0">
+            <a:spAutoFit/>
+          </a:bodyPr>
+          <a:lstStyle/>
+          <a:p>
+            <a:pPr algn="r">
+              <a:defRPr sz="1100" b="1">
+                <a:solidFill>
+                  <a:srgbClr val="78909C"/>
+                </a:solidFill>
+              </a:defRPr>
+            </a:pPr>
+            <a:r>
+              <a:t>11 / 18</a:t>
+            </a:r>
+          </a:p>
+        </p:txBody>
+      </p:sp>
+      <p:sp>
+        <p:nvSpPr>
+          <p:cNvPr id="6" name="TextBox 5"/>
+          <p:cNvSpPr txBox="1"/>
+          <p:nvPr/>
+        </p:nvSpPr>
+        <p:spPr>
+          <a:xfrm>
+            <a:off x="731520" y="1554480"/>
+            <a:ext cx="5303520" cy="530352"/>
           </a:xfrm>
           <a:prstGeom prst="rect">
             <a:avLst/>
@@ -3527,14 +3825,14 @@
       </p:sp>
       <p:sp>
         <p:nvSpPr>
-          <p:cNvPr id="5" name="TextBox 4"/>
+          <p:cNvPr id="7" name="TextBox 6"/>
           <p:cNvSpPr txBox="1"/>
           <p:nvPr/>
         </p:nvSpPr>
         <p:spPr>
           <a:xfrm>
-            <a:off x="731520" y="2240280"/>
-            <a:ext cx="5303520" cy="548640"/>
+            <a:off x="731520" y="2121408"/>
+            <a:ext cx="5303520" cy="530352"/>
           </a:xfrm>
           <a:prstGeom prst="rect">
             <a:avLst/>
@@ -3562,14 +3860,14 @@
       </p:sp>
       <p:sp>
         <p:nvSpPr>
-          <p:cNvPr id="6" name="TextBox 5"/>
+          <p:cNvPr id="8" name="TextBox 7"/>
           <p:cNvSpPr txBox="1"/>
           <p:nvPr/>
         </p:nvSpPr>
         <p:spPr>
           <a:xfrm>
-            <a:off x="731520" y="2834640"/>
-            <a:ext cx="5303520" cy="548640"/>
+            <a:off x="731520" y="2688336"/>
+            <a:ext cx="5303520" cy="530352"/>
           </a:xfrm>
           <a:prstGeom prst="rect">
             <a:avLst/>
@@ -3597,14 +3895,14 @@
       </p:sp>
       <p:sp>
         <p:nvSpPr>
-          <p:cNvPr id="7" name="TextBox 6"/>
+          <p:cNvPr id="9" name="TextBox 8"/>
           <p:cNvSpPr txBox="1"/>
           <p:nvPr/>
         </p:nvSpPr>
         <p:spPr>
           <a:xfrm>
-            <a:off x="731520" y="3429000"/>
-            <a:ext cx="5303520" cy="548640"/>
+            <a:off x="731520" y="3255263"/>
+            <a:ext cx="5303520" cy="530352"/>
           </a:xfrm>
           <a:prstGeom prst="rect">
             <a:avLst/>
@@ -3632,14 +3930,14 @@
       </p:sp>
       <p:sp>
         <p:nvSpPr>
-          <p:cNvPr id="8" name="TextBox 7"/>
+          <p:cNvPr id="10" name="TextBox 9"/>
           <p:cNvSpPr txBox="1"/>
           <p:nvPr/>
         </p:nvSpPr>
         <p:spPr>
           <a:xfrm>
-            <a:off x="731520" y="4023360"/>
-            <a:ext cx="5303520" cy="548640"/>
+            <a:off x="731520" y="3822191"/>
+            <a:ext cx="5303520" cy="530352"/>
           </a:xfrm>
           <a:prstGeom prst="rect">
             <a:avLst/>
@@ -3667,14 +3965,14 @@
       </p:sp>
       <p:sp>
         <p:nvSpPr>
-          <p:cNvPr id="9" name="TextBox 8"/>
+          <p:cNvPr id="11" name="TextBox 10"/>
           <p:cNvSpPr txBox="1"/>
           <p:nvPr/>
         </p:nvSpPr>
         <p:spPr>
           <a:xfrm>
-            <a:off x="731520" y="4617720"/>
-            <a:ext cx="5303520" cy="548640"/>
+            <a:off x="731520" y="4389120"/>
+            <a:ext cx="5303520" cy="530352"/>
           </a:xfrm>
           <a:prstGeom prst="rect">
             <a:avLst/>
@@ -3702,14 +4000,14 @@
       </p:sp>
       <p:sp>
         <p:nvSpPr>
-          <p:cNvPr id="10" name="TextBox 9"/>
+          <p:cNvPr id="12" name="TextBox 11"/>
           <p:cNvSpPr txBox="1"/>
           <p:nvPr/>
         </p:nvSpPr>
         <p:spPr>
           <a:xfrm>
-            <a:off x="731520" y="5212080"/>
-            <a:ext cx="5303520" cy="548640"/>
+            <a:off x="731520" y="4956048"/>
+            <a:ext cx="5303520" cy="530352"/>
           </a:xfrm>
           <a:prstGeom prst="rect">
             <a:avLst/>
@@ -3737,14 +4035,14 @@
       </p:sp>
       <p:sp>
         <p:nvSpPr>
-          <p:cNvPr id="11" name="TextBox 10"/>
+          <p:cNvPr id="13" name="TextBox 12"/>
           <p:cNvSpPr txBox="1"/>
           <p:nvPr/>
         </p:nvSpPr>
         <p:spPr>
           <a:xfrm>
-            <a:off x="731520" y="5806440"/>
-            <a:ext cx="5303520" cy="548640"/>
+            <a:off x="731520" y="5522976"/>
+            <a:ext cx="5303520" cy="530352"/>
           </a:xfrm>
           <a:prstGeom prst="rect">
             <a:avLst/>
@@ -3772,14 +4070,14 @@
       </p:sp>
       <p:sp>
         <p:nvSpPr>
-          <p:cNvPr id="12" name="TextBox 11"/>
+          <p:cNvPr id="14" name="TextBox 13"/>
           <p:cNvSpPr txBox="1"/>
           <p:nvPr/>
         </p:nvSpPr>
         <p:spPr>
           <a:xfrm>
-            <a:off x="6217920" y="1645920"/>
-            <a:ext cx="5303520" cy="548640"/>
+            <a:off x="6217920" y="1554480"/>
+            <a:ext cx="5303520" cy="530352"/>
           </a:xfrm>
           <a:prstGeom prst="rect">
             <a:avLst/>
@@ -3807,14 +4105,14 @@
       </p:sp>
       <p:sp>
         <p:nvSpPr>
-          <p:cNvPr id="13" name="TextBox 12"/>
+          <p:cNvPr id="15" name="TextBox 14"/>
           <p:cNvSpPr txBox="1"/>
           <p:nvPr/>
         </p:nvSpPr>
         <p:spPr>
           <a:xfrm>
-            <a:off x="6217920" y="2240280"/>
-            <a:ext cx="5303520" cy="548640"/>
+            <a:off x="6217920" y="2121408"/>
+            <a:ext cx="5303520" cy="530352"/>
           </a:xfrm>
           <a:prstGeom prst="rect">
             <a:avLst/>
@@ -3842,14 +4140,14 @@
       </p:sp>
       <p:sp>
         <p:nvSpPr>
-          <p:cNvPr id="14" name="TextBox 13"/>
+          <p:cNvPr id="16" name="TextBox 15"/>
           <p:cNvSpPr txBox="1"/>
           <p:nvPr/>
         </p:nvSpPr>
         <p:spPr>
           <a:xfrm>
-            <a:off x="6217920" y="2834640"/>
-            <a:ext cx="5303520" cy="548640"/>
+            <a:off x="6217920" y="2688336"/>
+            <a:ext cx="5303520" cy="530352"/>
           </a:xfrm>
           <a:prstGeom prst="rect">
             <a:avLst/>
@@ -3877,14 +4175,14 @@
       </p:sp>
       <p:sp>
         <p:nvSpPr>
-          <p:cNvPr id="15" name="TextBox 14"/>
+          <p:cNvPr id="17" name="TextBox 16"/>
           <p:cNvSpPr txBox="1"/>
           <p:nvPr/>
         </p:nvSpPr>
         <p:spPr>
           <a:xfrm>
-            <a:off x="6217920" y="3429000"/>
-            <a:ext cx="5303520" cy="548640"/>
+            <a:off x="6217920" y="3255263"/>
+            <a:ext cx="5303520" cy="530352"/>
           </a:xfrm>
           <a:prstGeom prst="rect">
             <a:avLst/>
@@ -3912,14 +4210,14 @@
       </p:sp>
       <p:sp>
         <p:nvSpPr>
-          <p:cNvPr id="16" name="TextBox 15"/>
+          <p:cNvPr id="18" name="TextBox 17"/>
           <p:cNvSpPr txBox="1"/>
           <p:nvPr/>
         </p:nvSpPr>
         <p:spPr>
           <a:xfrm>
-            <a:off x="6217920" y="4023360"/>
-            <a:ext cx="5303520" cy="548640"/>
+            <a:off x="6217920" y="3822191"/>
+            <a:ext cx="5303520" cy="530352"/>
           </a:xfrm>
           <a:prstGeom prst="rect">
             <a:avLst/>
@@ -3947,14 +4245,14 @@
       </p:sp>
       <p:sp>
         <p:nvSpPr>
-          <p:cNvPr id="17" name="TextBox 16"/>
+          <p:cNvPr id="19" name="TextBox 18"/>
           <p:cNvSpPr txBox="1"/>
           <p:nvPr/>
         </p:nvSpPr>
         <p:spPr>
           <a:xfrm>
-            <a:off x="6217920" y="4617720"/>
-            <a:ext cx="5303520" cy="548640"/>
+            <a:off x="6217920" y="4389120"/>
+            <a:ext cx="5303520" cy="530352"/>
           </a:xfrm>
           <a:prstGeom prst="rect">
             <a:avLst/>
@@ -3982,14 +4280,14 @@
       </p:sp>
       <p:sp>
         <p:nvSpPr>
-          <p:cNvPr id="18" name="TextBox 17"/>
+          <p:cNvPr id="20" name="TextBox 19"/>
           <p:cNvSpPr txBox="1"/>
           <p:nvPr/>
         </p:nvSpPr>
         <p:spPr>
           <a:xfrm>
-            <a:off x="6217920" y="5212080"/>
-            <a:ext cx="5303520" cy="548640"/>
+            <a:off x="6217920" y="4956048"/>
+            <a:ext cx="5303520" cy="530352"/>
           </a:xfrm>
           <a:prstGeom prst="rect">
             <a:avLst/>
@@ -4017,14 +4315,14 @@
       </p:sp>
       <p:sp>
         <p:nvSpPr>
-          <p:cNvPr id="19" name="TextBox 18"/>
+          <p:cNvPr id="21" name="TextBox 20"/>
           <p:cNvSpPr txBox="1"/>
           <p:nvPr/>
         </p:nvSpPr>
         <p:spPr>
           <a:xfrm>
-            <a:off x="6217920" y="5806440"/>
-            <a:ext cx="5303520" cy="548640"/>
+            <a:off x="6217920" y="5522976"/>
+            <a:ext cx="5303520" cy="530352"/>
           </a:xfrm>
           <a:prstGeom prst="rect">
             <a:avLst/>
@@ -4052,14 +4350,14 @@
       </p:sp>
       <p:sp>
         <p:nvSpPr>
-          <p:cNvPr id="20" name="Rounded Rectangle 19"/>
+          <p:cNvPr id="22" name="Rounded Rectangle 21"/>
           <p:cNvSpPr/>
           <p:nvPr/>
         </p:nvSpPr>
         <p:spPr>
           <a:xfrm>
-            <a:off x="731520" y="6217920"/>
-            <a:ext cx="10728655" cy="457200"/>
+            <a:off x="731520" y="6172200"/>
+            <a:ext cx="10728655" cy="411480"/>
           </a:xfrm>
           <a:prstGeom prst="roundRect">
             <a:avLst/>
@@ -4090,19 +4388,20 @@
           <a:lstStyle/>
           <a:p>
             <a:pPr algn="ctr"/>
-          </a:p>
-        </p:txBody>
-      </p:sp>
-      <p:sp>
-        <p:nvSpPr>
-          <p:cNvPr id="21" name="TextBox 20"/>
+            <a:endParaRPr/>
+          </a:p>
+        </p:txBody>
+      </p:sp>
+      <p:sp>
+        <p:nvSpPr>
+          <p:cNvPr id="23" name="TextBox 22"/>
           <p:cNvSpPr txBox="1"/>
           <p:nvPr/>
         </p:nvSpPr>
         <p:spPr>
           <a:xfrm>
-            <a:off x="914400" y="6263640"/>
-            <a:ext cx="10332720" cy="365760"/>
+            <a:off x="914400" y="6217920"/>
+            <a:ext cx="10332720" cy="320040"/>
           </a:xfrm>
           <a:prstGeom prst="rect">
             <a:avLst/>
@@ -4116,7 +4415,7 @@
           <a:lstStyle/>
           <a:p>
             <a:pPr>
-              <a:defRPr sz="1200" b="1">
+              <a:defRPr sz="1150" b="1">
                 <a:solidFill>
                   <a:srgbClr val="FFFFFF"/>
                 </a:solidFill>
@@ -4137,7 +4436,7 @@
 </file>
 
 <file path=ppt/slides/slide12.xml><?xml version="1.0" encoding="utf-8"?>
-<p:sld xmlns:a="http://schemas.openxmlformats.org/drawingml/2006/main" xmlns:p="http://schemas.openxmlformats.org/presentationml/2006/main" xmlns:r="http://schemas.openxmlformats.org/officeDocument/2006/relationships">
+<p:sld xmlns:a="http://schemas.openxmlformats.org/drawingml/2006/main" xmlns:r="http://schemas.openxmlformats.org/officeDocument/2006/relationships" xmlns:p="http://schemas.openxmlformats.org/presentationml/2006/main">
   <p:cSld>
     <p:spTree>
       <p:nvGrpSpPr>
@@ -4145,7 +4444,14 @@
         <p:cNvGrpSpPr/>
         <p:nvPr/>
       </p:nvGrpSpPr>
-      <p:grpSpPr/>
+      <p:grpSpPr>
+        <a:xfrm>
+          <a:off x="0" y="0"/>
+          <a:ext cx="0" cy="0"/>
+          <a:chOff x="0" y="0"/>
+          <a:chExt cx="0" cy="0"/>
+        </a:xfrm>
+      </p:grpSpPr>
       <p:sp>
         <p:nvSpPr>
           <p:cNvPr id="2" name="TextBox 1"/>
@@ -4155,7 +4461,7 @@
         <p:spPr>
           <a:xfrm>
             <a:off x="731520" y="365760"/>
-            <a:ext cx="10698480" cy="1005840"/>
+            <a:ext cx="9144000" cy="777240"/>
           </a:xfrm>
           <a:prstGeom prst="rect">
             <a:avLst/>
@@ -4169,22 +4475,7 @@
           <a:lstStyle/>
           <a:p>
             <a:pPr>
-              <a:defRPr sz="1100" b="1">
-                <a:solidFill>
-                  <a:srgbClr val="00838F"/>
-                </a:solidFill>
-              </a:defRPr>
-            </a:pPr>
-            <a:r>
-              <a:t>TRƯỜNG ĐẠI HỌC PHENIKAA • KHOA CÔNG NGHỆ THÔNG TIN</a:t>
-            </a:r>
-          </a:p>
-          <a:p>
-            <a:pPr>
-              <a:spcBef>
-                <a:spcPts val="400"/>
-              </a:spcBef>
-              <a:defRPr sz="2400" b="1">
+              <a:defRPr sz="2300" b="1">
                 <a:solidFill>
                   <a:srgbClr val="1F497D"/>
                 </a:solidFill>
@@ -4204,8 +4495,8 @@
         </p:nvSpPr>
         <p:spPr>
           <a:xfrm>
-            <a:off x="731520" y="1371600"/>
-            <a:ext cx="10728655" cy="36576"/>
+            <a:off x="731520" y="1234440"/>
+            <a:ext cx="10728655" cy="32004"/>
           </a:xfrm>
           <a:prstGeom prst="rect">
             <a:avLst/>
@@ -4238,12 +4529,13 @@
           <a:lstStyle/>
           <a:p>
             <a:pPr algn="ctr"/>
+            <a:endParaRPr/>
           </a:p>
         </p:txBody>
       </p:sp>
       <p:pic>
         <p:nvPicPr>
-          <p:cNvPr id="4" name="Picture 3" descr="hinh_3_9_dashboard.png"/>
+          <p:cNvPr id="4" name="Picture 3" descr="phenikaa_logo.png"/>
           <p:cNvPicPr>
             <a:picLocks noChangeAspect="1"/>
           </p:cNvPicPr>
@@ -4257,17 +4549,52 @@
         </p:blipFill>
         <p:spPr>
           <a:xfrm>
-            <a:off x="731520" y="1737360"/>
-            <a:ext cx="5212080" cy="2543079"/>
+            <a:off x="10332720" y="228600"/>
+            <a:ext cx="1371600" cy="834887"/>
           </a:xfrm>
           <a:prstGeom prst="rect">
             <a:avLst/>
           </a:prstGeom>
         </p:spPr>
       </p:pic>
+      <p:sp>
+        <p:nvSpPr>
+          <p:cNvPr id="5" name="TextBox 4"/>
+          <p:cNvSpPr txBox="1"/>
+          <p:nvPr/>
+        </p:nvSpPr>
+        <p:spPr>
+          <a:xfrm>
+            <a:off x="10058400" y="6446520"/>
+            <a:ext cx="1645920" cy="320040"/>
+          </a:xfrm>
+          <a:prstGeom prst="rect">
+            <a:avLst/>
+          </a:prstGeom>
+          <a:noFill/>
+        </p:spPr>
+        <p:txBody>
+          <a:bodyPr wrap="none" lIns="0" tIns="0" rIns="0" bIns="0">
+            <a:spAutoFit/>
+          </a:bodyPr>
+          <a:lstStyle/>
+          <a:p>
+            <a:pPr algn="r">
+              <a:defRPr sz="1100" b="1">
+                <a:solidFill>
+                  <a:srgbClr val="78909C"/>
+                </a:solidFill>
+              </a:defRPr>
+            </a:pPr>
+            <a:r>
+              <a:t>12 / 18</a:t>
+            </a:r>
+          </a:p>
+        </p:txBody>
+      </p:sp>
       <p:pic>
         <p:nvPicPr>
-          <p:cNvPr id="5" name="Picture 4" descr="hinh_3_10_loan_approval.png"/>
+          <p:cNvPr id="6" name="Picture 5" descr="hinh_3_9_dashboard.png"/>
           <p:cNvPicPr>
             <a:picLocks noChangeAspect="1"/>
           </p:cNvPicPr>
@@ -4281,7 +4608,7 @@
         </p:blipFill>
         <p:spPr>
           <a:xfrm>
-            <a:off x="6217920" y="1737360"/>
+            <a:off x="731520" y="1645920"/>
             <a:ext cx="5212080" cy="2543079"/>
           </a:xfrm>
           <a:prstGeom prst="rect">
@@ -4289,15 +4616,39 @@
           </a:prstGeom>
         </p:spPr>
       </p:pic>
-      <p:sp>
-        <p:nvSpPr>
-          <p:cNvPr id="6" name="TextBox 5"/>
+      <p:pic>
+        <p:nvPicPr>
+          <p:cNvPr id="7" name="Picture 6" descr="hinh_3_10_loan_approval.png"/>
+          <p:cNvPicPr>
+            <a:picLocks noChangeAspect="1"/>
+          </p:cNvPicPr>
+          <p:nvPr/>
+        </p:nvPicPr>
+        <p:blipFill>
+          <a:blip r:embed="rId4"/>
+          <a:stretch>
+            <a:fillRect/>
+          </a:stretch>
+        </p:blipFill>
+        <p:spPr>
+          <a:xfrm>
+            <a:off x="6217920" y="1645920"/>
+            <a:ext cx="5212080" cy="2543079"/>
+          </a:xfrm>
+          <a:prstGeom prst="rect">
+            <a:avLst/>
+          </a:prstGeom>
+        </p:spPr>
+      </p:pic>
+      <p:sp>
+        <p:nvSpPr>
+          <p:cNvPr id="8" name="TextBox 7"/>
           <p:cNvSpPr txBox="1"/>
           <p:nvPr/>
         </p:nvSpPr>
         <p:spPr>
           <a:xfrm>
-            <a:off x="731520" y="4846320"/>
+            <a:off x="731520" y="4754880"/>
             <a:ext cx="5212080" cy="457200"/>
           </a:xfrm>
           <a:prstGeom prst="rect">
@@ -4326,13 +4677,13 @@
       </p:sp>
       <p:sp>
         <p:nvSpPr>
-          <p:cNvPr id="7" name="TextBox 6"/>
+          <p:cNvPr id="9" name="TextBox 8"/>
           <p:cNvSpPr txBox="1"/>
           <p:nvPr/>
         </p:nvSpPr>
         <p:spPr>
           <a:xfrm>
-            <a:off x="6217920" y="4846320"/>
+            <a:off x="6217920" y="4754880"/>
             <a:ext cx="5212080" cy="457200"/>
           </a:xfrm>
           <a:prstGeom prst="rect">
@@ -4368,7 +4719,7 @@
 </file>
 
 <file path=ppt/slides/slide13.xml><?xml version="1.0" encoding="utf-8"?>
-<p:sld xmlns:a="http://schemas.openxmlformats.org/drawingml/2006/main" xmlns:p="http://schemas.openxmlformats.org/presentationml/2006/main" xmlns:r="http://schemas.openxmlformats.org/officeDocument/2006/relationships">
+<p:sld xmlns:a="http://schemas.openxmlformats.org/drawingml/2006/main" xmlns:r="http://schemas.openxmlformats.org/officeDocument/2006/relationships" xmlns:p="http://schemas.openxmlformats.org/presentationml/2006/main">
   <p:cSld>
     <p:spTree>
       <p:nvGrpSpPr>
@@ -4376,7 +4727,14 @@
         <p:cNvGrpSpPr/>
         <p:nvPr/>
       </p:nvGrpSpPr>
-      <p:grpSpPr/>
+      <p:grpSpPr>
+        <a:xfrm>
+          <a:off x="0" y="0"/>
+          <a:ext cx="0" cy="0"/>
+          <a:chOff x="0" y="0"/>
+          <a:chExt cx="0" cy="0"/>
+        </a:xfrm>
+      </p:grpSpPr>
       <p:sp>
         <p:nvSpPr>
           <p:cNvPr id="2" name="Rectangle 1"/>
@@ -4417,12 +4775,72 @@
           <a:lstStyle/>
           <a:p>
             <a:pPr algn="ctr"/>
-          </a:p>
-        </p:txBody>
-      </p:sp>
-      <p:sp>
-        <p:nvSpPr>
-          <p:cNvPr id="3" name="TextBox 2"/>
+            <a:endParaRPr/>
+          </a:p>
+        </p:txBody>
+      </p:sp>
+      <p:pic>
+        <p:nvPicPr>
+          <p:cNvPr id="3" name="Picture 2" descr="phenikaa_logo.png"/>
+          <p:cNvPicPr>
+            <a:picLocks noChangeAspect="1"/>
+          </p:cNvPicPr>
+          <p:nvPr/>
+        </p:nvPicPr>
+        <p:blipFill>
+          <a:blip r:embed="rId2"/>
+          <a:stretch>
+            <a:fillRect/>
+          </a:stretch>
+        </p:blipFill>
+        <p:spPr>
+          <a:xfrm>
+            <a:off x="10332720" y="228600"/>
+            <a:ext cx="1371600" cy="834887"/>
+          </a:xfrm>
+          <a:prstGeom prst="rect">
+            <a:avLst/>
+          </a:prstGeom>
+        </p:spPr>
+      </p:pic>
+      <p:sp>
+        <p:nvSpPr>
+          <p:cNvPr id="4" name="TextBox 3"/>
+          <p:cNvSpPr txBox="1"/>
+          <p:nvPr/>
+        </p:nvSpPr>
+        <p:spPr>
+          <a:xfrm>
+            <a:off x="10058400" y="6446520"/>
+            <a:ext cx="1645920" cy="320040"/>
+          </a:xfrm>
+          <a:prstGeom prst="rect">
+            <a:avLst/>
+          </a:prstGeom>
+          <a:noFill/>
+        </p:spPr>
+        <p:txBody>
+          <a:bodyPr wrap="none" lIns="0" tIns="0" rIns="0" bIns="0">
+            <a:spAutoFit/>
+          </a:bodyPr>
+          <a:lstStyle/>
+          <a:p>
+            <a:pPr algn="r">
+              <a:defRPr sz="1100" b="1">
+                <a:solidFill>
+                  <a:srgbClr val="B0BEC5"/>
+                </a:solidFill>
+              </a:defRPr>
+            </a:pPr>
+            <a:r>
+              <a:t>13 / 18</a:t>
+            </a:r>
+          </a:p>
+        </p:txBody>
+      </p:sp>
+      <p:sp>
+        <p:nvSpPr>
+          <p:cNvPr id="5" name="TextBox 4"/>
           <p:cNvSpPr txBox="1"/>
           <p:nvPr/>
         </p:nvSpPr>
@@ -4510,7 +4928,7 @@
 </file>
 
 <file path=ppt/slides/slide14.xml><?xml version="1.0" encoding="utf-8"?>
-<p:sld xmlns:a="http://schemas.openxmlformats.org/drawingml/2006/main" xmlns:p="http://schemas.openxmlformats.org/presentationml/2006/main" xmlns:r="http://schemas.openxmlformats.org/officeDocument/2006/relationships">
+<p:sld xmlns:a="http://schemas.openxmlformats.org/drawingml/2006/main" xmlns:r="http://schemas.openxmlformats.org/officeDocument/2006/relationships" xmlns:p="http://schemas.openxmlformats.org/presentationml/2006/main">
   <p:cSld>
     <p:spTree>
       <p:nvGrpSpPr>
@@ -4518,7 +4936,14 @@
         <p:cNvGrpSpPr/>
         <p:nvPr/>
       </p:nvGrpSpPr>
-      <p:grpSpPr/>
+      <p:grpSpPr>
+        <a:xfrm>
+          <a:off x="0" y="0"/>
+          <a:ext cx="0" cy="0"/>
+          <a:chOff x="0" y="0"/>
+          <a:chExt cx="0" cy="0"/>
+        </a:xfrm>
+      </p:grpSpPr>
       <p:sp>
         <p:nvSpPr>
           <p:cNvPr id="2" name="TextBox 1"/>
@@ -4528,7 +4953,7 @@
         <p:spPr>
           <a:xfrm>
             <a:off x="731520" y="365760"/>
-            <a:ext cx="10698480" cy="1005840"/>
+            <a:ext cx="9144000" cy="777240"/>
           </a:xfrm>
           <a:prstGeom prst="rect">
             <a:avLst/>
@@ -4542,29 +4967,14 @@
           <a:lstStyle/>
           <a:p>
             <a:pPr>
-              <a:defRPr sz="1100" b="1">
-                <a:solidFill>
-                  <a:srgbClr val="00838F"/>
-                </a:solidFill>
-              </a:defRPr>
-            </a:pPr>
-            <a:r>
-              <a:t>TRƯỜNG ĐẠI HỌC PHENIKAA • KHOA CÔNG NGHỆ THÔNG TIN</a:t>
-            </a:r>
-          </a:p>
-          <a:p>
-            <a:pPr>
-              <a:spcBef>
-                <a:spcPts val="400"/>
-              </a:spcBef>
-              <a:defRPr sz="2400" b="1">
+              <a:defRPr sz="2300" b="1">
                 <a:solidFill>
                   <a:srgbClr val="1F497D"/>
                 </a:solidFill>
               </a:defRPr>
             </a:pPr>
             <a:r>
-              <a:t>11. Nhật Ký Phát Hiện &amp; Xử Lý Lỗi Phần Mềm (Defect Log)</a:t>
+              <a:t>11. Phân Bổ 57 Ca Kiểm Thử &amp; Kết Quả Tổng Hợp (Phần IV)</a:t>
             </a:r>
           </a:p>
         </p:txBody>
@@ -4577,8 +4987,8 @@
         </p:nvSpPr>
         <p:spPr>
           <a:xfrm>
-            <a:off x="731520" y="1371600"/>
-            <a:ext cx="10728655" cy="36576"/>
+            <a:off x="731520" y="1234440"/>
+            <a:ext cx="10728655" cy="32004"/>
           </a:xfrm>
           <a:prstGeom prst="rect">
             <a:avLst/>
@@ -4611,19 +5021,79 @@
           <a:lstStyle/>
           <a:p>
             <a:pPr algn="ctr"/>
-          </a:p>
-        </p:txBody>
-      </p:sp>
-      <p:sp>
-        <p:nvSpPr>
-          <p:cNvPr id="4" name="Rounded Rectangle 3"/>
+            <a:endParaRPr/>
+          </a:p>
+        </p:txBody>
+      </p:sp>
+      <p:pic>
+        <p:nvPicPr>
+          <p:cNvPr id="4" name="Picture 3" descr="phenikaa_logo.png"/>
+          <p:cNvPicPr>
+            <a:picLocks noChangeAspect="1"/>
+          </p:cNvPicPr>
+          <p:nvPr/>
+        </p:nvPicPr>
+        <p:blipFill>
+          <a:blip r:embed="rId2"/>
+          <a:stretch>
+            <a:fillRect/>
+          </a:stretch>
+        </p:blipFill>
+        <p:spPr>
+          <a:xfrm>
+            <a:off x="10332720" y="228600"/>
+            <a:ext cx="1371600" cy="834887"/>
+          </a:xfrm>
+          <a:prstGeom prst="rect">
+            <a:avLst/>
+          </a:prstGeom>
+        </p:spPr>
+      </p:pic>
+      <p:sp>
+        <p:nvSpPr>
+          <p:cNvPr id="5" name="TextBox 4"/>
+          <p:cNvSpPr txBox="1"/>
+          <p:nvPr/>
+        </p:nvSpPr>
+        <p:spPr>
+          <a:xfrm>
+            <a:off x="10058400" y="6446520"/>
+            <a:ext cx="1645920" cy="320040"/>
+          </a:xfrm>
+          <a:prstGeom prst="rect">
+            <a:avLst/>
+          </a:prstGeom>
+          <a:noFill/>
+        </p:spPr>
+        <p:txBody>
+          <a:bodyPr wrap="none" lIns="0" tIns="0" rIns="0" bIns="0">
+            <a:spAutoFit/>
+          </a:bodyPr>
+          <a:lstStyle/>
+          <a:p>
+            <a:pPr algn="r">
+              <a:defRPr sz="1100" b="1">
+                <a:solidFill>
+                  <a:srgbClr val="78909C"/>
+                </a:solidFill>
+              </a:defRPr>
+            </a:pPr>
+            <a:r>
+              <a:t>14 / 18</a:t>
+            </a:r>
+          </a:p>
+        </p:txBody>
+      </p:sp>
+      <p:sp>
+        <p:nvSpPr>
+          <p:cNvPr id="7" name="Rounded Rectangle 6"/>
           <p:cNvSpPr/>
           <p:nvPr/>
         </p:nvSpPr>
         <p:spPr>
           <a:xfrm>
-            <a:off x="731520" y="1645920"/>
-            <a:ext cx="10728655" cy="685800"/>
+            <a:off x="6217920" y="1508760"/>
+            <a:ext cx="5212080" cy="4709160"/>
           </a:xfrm>
           <a:prstGeom prst="roundRect">
             <a:avLst/>
@@ -4631,9 +5101,9 @@
           <a:solidFill>
             <a:srgbClr val="F4F6F9"/>
           </a:solidFill>
-          <a:ln w="19050">
+          <a:ln w="25400">
             <a:solidFill>
-              <a:srgbClr val="E65100"/>
+              <a:srgbClr val="1F497D"/>
             </a:solidFill>
           </a:ln>
         </p:spPr>
@@ -4656,19 +5126,20 @@
           <a:lstStyle/>
           <a:p>
             <a:pPr algn="ctr"/>
-          </a:p>
-        </p:txBody>
-      </p:sp>
-      <p:sp>
-        <p:nvSpPr>
-          <p:cNvPr id="5" name="TextBox 4"/>
+            <a:endParaRPr/>
+          </a:p>
+        </p:txBody>
+      </p:sp>
+      <p:sp>
+        <p:nvSpPr>
+          <p:cNvPr id="8" name="TextBox 7"/>
           <p:cNvSpPr txBox="1"/>
           <p:nvPr/>
         </p:nvSpPr>
         <p:spPr>
           <a:xfrm>
-            <a:off x="914400" y="1719072"/>
-            <a:ext cx="10332720" cy="548640"/>
+            <a:off x="6400800" y="1645920"/>
+            <a:ext cx="4846320" cy="4389120"/>
           </a:xfrm>
           <a:prstGeom prst="rect">
             <a:avLst/>
@@ -4682,418 +5153,216 @@
           <a:lstStyle/>
           <a:p>
             <a:pPr>
+              <a:spcAft>
+                <a:spcPts val="800"/>
+              </a:spcAft>
+              <a:defRPr sz="1600" b="1">
+                <a:solidFill>
+                  <a:srgbClr val="1F497D"/>
+                </a:solidFill>
+              </a:defRPr>
+            </a:pPr>
+            <a:r>
+              <a:t>Bảng Thống Kê Phân Bổ Ca Kiểm Thử</a:t>
+            </a:r>
+          </a:p>
+          <a:p>
+            <a:pPr>
+              <a:spcAft>
+                <a:spcPts val="500"/>
+              </a:spcAft>
+              <a:defRPr sz="1200" b="0">
+                <a:solidFill>
+                  <a:srgbClr val="883344"/>
+                </a:solidFill>
+              </a:defRPr>
+            </a:pPr>
+            <a:r>
+              <a:t>• Unit Tests (Spring Boot): 20 ca (35.09%)</a:t>
+            </a:r>
+          </a:p>
+          <a:p>
+            <a:pPr>
+              <a:spcAft>
+                <a:spcPts val="500"/>
+              </a:spcAft>
+              <a:defRPr sz="1200" b="0">
+                <a:solidFill>
+                  <a:srgbClr val="1F497D"/>
+                </a:solidFill>
+              </a:defRPr>
+            </a:pPr>
+            <a:r>
+              <a:t>• Integration Tests (MockMvc): 11 ca (19.30%)</a:t>
+            </a:r>
+          </a:p>
+          <a:p>
+            <a:pPr>
+              <a:spcAft>
+                <a:spcPts val="500"/>
+              </a:spcAft>
+              <a:defRPr sz="1200" b="0">
+                <a:solidFill>
+                  <a:srgbClr val="2E7D32"/>
+                </a:solidFill>
+              </a:defRPr>
+            </a:pPr>
+            <a:r>
+              <a:t>• Postman API Automation: 10 ca (17.54%)</a:t>
+            </a:r>
+          </a:p>
+          <a:p>
+            <a:pPr>
+              <a:spcAft>
+                <a:spcPts val="500"/>
+              </a:spcAft>
+              <a:defRPr sz="1200" b="0">
+                <a:solidFill>
+                  <a:srgbClr val="D35400"/>
+                </a:solidFill>
+              </a:defRPr>
+            </a:pPr>
+            <a:r>
+              <a:t>• Selenium UI Full Pages: 16 ca (28.07%)</a:t>
+            </a:r>
+          </a:p>
+          <a:p>
+            <a:pPr>
+              <a:spcAft>
+                <a:spcPts val="500"/>
+              </a:spcAft>
               <a:defRPr sz="1200" b="1">
                 <a:solidFill>
-                  <a:srgbClr val="0F243E"/>
-                </a:solidFill>
-              </a:defRPr>
-            </a:pPr>
-            <a:r>
-              <a:t>[BUG-01] (CRITICAL) Chuyển tiền: Cho phép chuyển số tiền bằng 0  ➔  Giải pháp: Cập nhật điều kiện if (amount &lt;= 0) [TRẠNG THÁI: CLOSED ✔]</a:t>
-            </a:r>
-          </a:p>
-        </p:txBody>
-      </p:sp>
-      <p:sp>
-        <p:nvSpPr>
-          <p:cNvPr id="6" name="Rounded Rectangle 5"/>
-          <p:cNvSpPr/>
-          <p:nvPr/>
-        </p:nvSpPr>
-        <p:spPr>
-          <a:xfrm>
-            <a:off x="731520" y="2423160"/>
-            <a:ext cx="10728655" cy="685800"/>
-          </a:xfrm>
-          <a:prstGeom prst="roundRect">
-            <a:avLst/>
-          </a:prstGeom>
-          <a:solidFill>
-            <a:srgbClr val="F4F6F9"/>
-          </a:solidFill>
-          <a:ln w="19050">
-            <a:solidFill>
-              <a:srgbClr val="00838F"/>
-            </a:solidFill>
-          </a:ln>
-        </p:spPr>
-        <p:style>
-          <a:lnRef idx="1">
-            <a:schemeClr val="accent1"/>
-          </a:lnRef>
-          <a:fillRef idx="3">
-            <a:schemeClr val="accent1"/>
-          </a:fillRef>
-          <a:effectRef idx="2">
-            <a:schemeClr val="accent1"/>
-          </a:effectRef>
-          <a:fontRef idx="minor">
-            <a:schemeClr val="lt1"/>
-          </a:fontRef>
-        </p:style>
-        <p:txBody>
-          <a:bodyPr rtlCol="0" anchor="ctr"/>
-          <a:lstStyle/>
-          <a:p>
-            <a:pPr algn="ctr"/>
-          </a:p>
-        </p:txBody>
-      </p:sp>
-      <p:sp>
-        <p:nvSpPr>
-          <p:cNvPr id="7" name="TextBox 6"/>
-          <p:cNvSpPr txBox="1"/>
-          <p:nvPr/>
-        </p:nvSpPr>
-        <p:spPr>
-          <a:xfrm>
-            <a:off x="914400" y="2496312"/>
-            <a:ext cx="10332720" cy="548640"/>
-          </a:xfrm>
-          <a:prstGeom prst="rect">
-            <a:avLst/>
-          </a:prstGeom>
-          <a:noFill/>
-        </p:spPr>
-        <p:txBody>
-          <a:bodyPr wrap="square">
-            <a:spAutoFit/>
-          </a:bodyPr>
-          <a:lstStyle/>
-          <a:p>
-            <a:pPr>
-              <a:defRPr sz="1200" b="1">
-                <a:solidFill>
-                  <a:srgbClr val="0F243E"/>
-                </a:solidFill>
-              </a:defRPr>
-            </a:pPr>
-            <a:r>
-              <a:t>[BUG-02] (MAJOR) Tín dụng: Cho phép nộp đơn xin vay số tiền âm  ➔  Giải pháp: Bổ sung tiền kiểm tra loanAmount &lt;= 0 [TRẠNG THÁI: CLOSED ✔]</a:t>
-            </a:r>
-          </a:p>
-        </p:txBody>
-      </p:sp>
-      <p:sp>
-        <p:nvSpPr>
-          <p:cNvPr id="8" name="Rounded Rectangle 7"/>
-          <p:cNvSpPr/>
-          <p:nvPr/>
-        </p:nvSpPr>
-        <p:spPr>
-          <a:xfrm>
-            <a:off x="731520" y="3200400"/>
-            <a:ext cx="10728655" cy="685800"/>
-          </a:xfrm>
-          <a:prstGeom prst="roundRect">
-            <a:avLst/>
-          </a:prstGeom>
-          <a:solidFill>
-            <a:srgbClr val="F4F6F9"/>
-          </a:solidFill>
-          <a:ln w="19050">
-            <a:solidFill>
-              <a:srgbClr val="E65100"/>
-            </a:solidFill>
-          </a:ln>
-        </p:spPr>
-        <p:style>
-          <a:lnRef idx="1">
-            <a:schemeClr val="accent1"/>
-          </a:lnRef>
-          <a:fillRef idx="3">
-            <a:schemeClr val="accent1"/>
-          </a:fillRef>
-          <a:effectRef idx="2">
-            <a:schemeClr val="accent1"/>
-          </a:effectRef>
-          <a:fontRef idx="minor">
-            <a:schemeClr val="lt1"/>
-          </a:fontRef>
-        </p:style>
-        <p:txBody>
-          <a:bodyPr rtlCol="0" anchor="ctr"/>
-          <a:lstStyle/>
-          <a:p>
-            <a:pPr algn="ctr"/>
-          </a:p>
-        </p:txBody>
-      </p:sp>
-      <p:sp>
-        <p:nvSpPr>
-          <p:cNvPr id="9" name="TextBox 8"/>
-          <p:cNvSpPr txBox="1"/>
-          <p:nvPr/>
-        </p:nvSpPr>
-        <p:spPr>
-          <a:xfrm>
-            <a:off x="914400" y="3273552"/>
-            <a:ext cx="10332720" cy="548640"/>
-          </a:xfrm>
-          <a:prstGeom prst="rect">
-            <a:avLst/>
-          </a:prstGeom>
-          <a:noFill/>
-        </p:spPr>
-        <p:txBody>
-          <a:bodyPr wrap="square">
-            <a:spAutoFit/>
-          </a:bodyPr>
-          <a:lstStyle/>
-          <a:p>
-            <a:pPr>
-              <a:defRPr sz="1200" b="1">
-                <a:solidFill>
-                  <a:srgbClr val="0F243E"/>
-                </a:solidFill>
-              </a:defRPr>
-            </a:pPr>
-            <a:r>
-              <a:t>[BUG-03] (CRITICAL) Tín dụng: Duyệt vay nhưng không cộng tiền giải ngân  ➔  Giải pháp: Bổ sung cộng số dư tài khoản người vay [TRẠNG THÁI: CLOSED ✔]</a:t>
-            </a:r>
-          </a:p>
-        </p:txBody>
-      </p:sp>
-      <p:sp>
-        <p:nvSpPr>
-          <p:cNvPr id="10" name="Rounded Rectangle 9"/>
-          <p:cNvSpPr/>
-          <p:nvPr/>
-        </p:nvSpPr>
-        <p:spPr>
-          <a:xfrm>
-            <a:off x="731520" y="3977639"/>
-            <a:ext cx="10728655" cy="685800"/>
-          </a:xfrm>
-          <a:prstGeom prst="roundRect">
-            <a:avLst/>
-          </a:prstGeom>
-          <a:solidFill>
-            <a:srgbClr val="F4F6F9"/>
-          </a:solidFill>
-          <a:ln w="19050">
-            <a:solidFill>
-              <a:srgbClr val="E65100"/>
-            </a:solidFill>
-          </a:ln>
-        </p:spPr>
-        <p:style>
-          <a:lnRef idx="1">
-            <a:schemeClr val="accent1"/>
-          </a:lnRef>
-          <a:fillRef idx="3">
-            <a:schemeClr val="accent1"/>
-          </a:fillRef>
-          <a:effectRef idx="2">
-            <a:schemeClr val="accent1"/>
-          </a:effectRef>
-          <a:fontRef idx="minor">
-            <a:schemeClr val="lt1"/>
-          </a:fontRef>
-        </p:style>
-        <p:txBody>
-          <a:bodyPr rtlCol="0" anchor="ctr"/>
-          <a:lstStyle/>
-          <a:p>
-            <a:pPr algn="ctr"/>
-          </a:p>
-        </p:txBody>
-      </p:sp>
-      <p:sp>
-        <p:nvSpPr>
-          <p:cNvPr id="11" name="TextBox 10"/>
-          <p:cNvSpPr txBox="1"/>
-          <p:nvPr/>
-        </p:nvSpPr>
-        <p:spPr>
-          <a:xfrm>
-            <a:off x="914400" y="4050791"/>
-            <a:ext cx="10332720" cy="548640"/>
-          </a:xfrm>
-          <a:prstGeom prst="rect">
-            <a:avLst/>
-          </a:prstGeom>
-          <a:noFill/>
-        </p:spPr>
-        <p:txBody>
-          <a:bodyPr wrap="square">
-            <a:spAutoFit/>
-          </a:bodyPr>
-          <a:lstStyle/>
-          <a:p>
-            <a:pPr>
-              <a:defRPr sz="1200" b="1">
-                <a:solidFill>
-                  <a:srgbClr val="0F243E"/>
-                </a:solidFill>
-              </a:defRPr>
-            </a:pPr>
-            <a:r>
-              <a:t>[BUG-04] (BLOCKER) Tài khoản: Double-Spending khi rút tiền đồng thời  ➔  Giải pháp: Áp dụng Khóa bi quan PESSIMISTIC_WRITE [TRẠNG THÁI: CLOSED ✔]</a:t>
-            </a:r>
-          </a:p>
-        </p:txBody>
-      </p:sp>
-      <p:sp>
-        <p:nvSpPr>
-          <p:cNvPr id="12" name="Rounded Rectangle 11"/>
-          <p:cNvSpPr/>
-          <p:nvPr/>
-        </p:nvSpPr>
-        <p:spPr>
-          <a:xfrm>
-            <a:off x="731520" y="4754880"/>
-            <a:ext cx="10728655" cy="685800"/>
-          </a:xfrm>
-          <a:prstGeom prst="roundRect">
-            <a:avLst/>
-          </a:prstGeom>
-          <a:solidFill>
-            <a:srgbClr val="F4F6F9"/>
-          </a:solidFill>
-          <a:ln w="19050">
-            <a:solidFill>
-              <a:srgbClr val="00838F"/>
-            </a:solidFill>
-          </a:ln>
-        </p:spPr>
-        <p:style>
-          <a:lnRef idx="1">
-            <a:schemeClr val="accent1"/>
-          </a:lnRef>
-          <a:fillRef idx="3">
-            <a:schemeClr val="accent1"/>
-          </a:fillRef>
-          <a:effectRef idx="2">
-            <a:schemeClr val="accent1"/>
-          </a:effectRef>
-          <a:fontRef idx="minor">
-            <a:schemeClr val="lt1"/>
-          </a:fontRef>
-        </p:style>
-        <p:txBody>
-          <a:bodyPr rtlCol="0" anchor="ctr"/>
-          <a:lstStyle/>
-          <a:p>
-            <a:pPr algn="ctr"/>
-          </a:p>
-        </p:txBody>
-      </p:sp>
-      <p:sp>
-        <p:nvSpPr>
-          <p:cNvPr id="13" name="TextBox 12"/>
-          <p:cNvSpPr txBox="1"/>
-          <p:nvPr/>
-        </p:nvSpPr>
-        <p:spPr>
-          <a:xfrm>
-            <a:off x="914400" y="4828032"/>
-            <a:ext cx="10332720" cy="548640"/>
-          </a:xfrm>
-          <a:prstGeom prst="rect">
-            <a:avLst/>
-          </a:prstGeom>
-          <a:noFill/>
-        </p:spPr>
-        <p:txBody>
-          <a:bodyPr wrap="square">
-            <a:spAutoFit/>
-          </a:bodyPr>
-          <a:lstStyle/>
-          <a:p>
-            <a:pPr>
-              <a:defRPr sz="1200" b="1">
-                <a:solidFill>
-                  <a:srgbClr val="0F243E"/>
-                </a:solidFill>
-              </a:defRPr>
-            </a:pPr>
-            <a:r>
-              <a:t>[BUG-05] (HIGH) Giao diện: Trang Audit Log cho phép truy cập nặc danh  ➔  Giải pháp: Tích hợp Client-side Route Guard [TRẠNG THÁI: CLOSED ✔]</a:t>
-            </a:r>
-          </a:p>
-        </p:txBody>
-      </p:sp>
-      <p:sp>
-        <p:nvSpPr>
-          <p:cNvPr id="14" name="Rounded Rectangle 13"/>
-          <p:cNvSpPr/>
-          <p:nvPr/>
-        </p:nvSpPr>
-        <p:spPr>
-          <a:xfrm>
-            <a:off x="731520" y="5532120"/>
-            <a:ext cx="10728655" cy="685800"/>
-          </a:xfrm>
-          <a:prstGeom prst="roundRect">
-            <a:avLst/>
-          </a:prstGeom>
-          <a:solidFill>
-            <a:srgbClr val="F4F6F9"/>
-          </a:solidFill>
-          <a:ln w="19050">
-            <a:solidFill>
-              <a:srgbClr val="00838F"/>
-            </a:solidFill>
-          </a:ln>
-        </p:spPr>
-        <p:style>
-          <a:lnRef idx="1">
-            <a:schemeClr val="accent1"/>
-          </a:lnRef>
-          <a:fillRef idx="3">
-            <a:schemeClr val="accent1"/>
-          </a:fillRef>
-          <a:effectRef idx="2">
-            <a:schemeClr val="accent1"/>
-          </a:effectRef>
-          <a:fontRef idx="minor">
-            <a:schemeClr val="lt1"/>
-          </a:fontRef>
-        </p:style>
-        <p:txBody>
-          <a:bodyPr rtlCol="0" anchor="ctr"/>
-          <a:lstStyle/>
-          <a:p>
-            <a:pPr algn="ctr"/>
-          </a:p>
-        </p:txBody>
-      </p:sp>
-      <p:sp>
-        <p:nvSpPr>
-          <p:cNvPr id="15" name="TextBox 14"/>
-          <p:cNvSpPr txBox="1"/>
-          <p:nvPr/>
-        </p:nvSpPr>
-        <p:spPr>
-          <a:xfrm>
-            <a:off x="914400" y="5605272"/>
-            <a:ext cx="10332720" cy="548640"/>
-          </a:xfrm>
-          <a:prstGeom prst="rect">
-            <a:avLst/>
-          </a:prstGeom>
-          <a:noFill/>
-        </p:spPr>
-        <p:txBody>
-          <a:bodyPr wrap="square">
-            <a:spAutoFit/>
-          </a:bodyPr>
-          <a:lstStyle/>
-          <a:p>
-            <a:pPr>
-              <a:defRPr sz="1200" b="1">
-                <a:solidFill>
-                  <a:srgbClr val="0F243E"/>
-                </a:solidFill>
-              </a:defRPr>
-            </a:pPr>
-            <a:r>
-              <a:t>[BUG-06] (MEDIUM) Kết nối: Fallback port 8081 gây lỗi kết nối API  ➔  Giải pháp: Chuẩn hóa trỏ về cổng backend 8080 [TRẠNG THÁI: CLOSED ✔]</a:t>
-            </a:r>
-          </a:p>
-        </p:txBody>
-      </p:sp>
+                  <a:srgbClr val="2E7D32"/>
+                </a:solidFill>
+              </a:defRPr>
+            </a:pPr>
+            <a:r>
+              <a:t>• TỔNG HỢP TOÀN HỆ THỐNG: 57 ca (100.0%)</a:t>
+            </a:r>
+          </a:p>
+          <a:p>
+            <a:pPr>
+              <a:spcBef>
+                <a:spcPts val="400"/>
+              </a:spcBef>
+              <a:spcAft>
+                <a:spcPts val="400"/>
+              </a:spcAft>
+              <a:defRPr sz="900">
+                <a:solidFill>
+                  <a:srgbClr val="CFD8DC"/>
+                </a:solidFill>
+              </a:defRPr>
+            </a:pPr>
+            <a:r>
+              <a:t>────────────────────────────────────────</a:t>
+            </a:r>
+          </a:p>
+          <a:p>
+            <a:pPr>
+              <a:defRPr sz="1300" b="1">
+                <a:solidFill>
+                  <a:srgbClr val="1F497D"/>
+                </a:solidFill>
+              </a:defRPr>
+            </a:pPr>
+            <a:r>
+              <a:t>CHỈ SỐ CHẤT LƯỢNG ĐẠT ĐƯỢC:</a:t>
+            </a:r>
+          </a:p>
+          <a:p>
+            <a:pPr>
+              <a:spcAft>
+                <a:spcPts val="300"/>
+              </a:spcAft>
+              <a:defRPr sz="1100">
+                <a:solidFill>
+                  <a:srgbClr val="333333"/>
+                </a:solidFill>
+              </a:defRPr>
+            </a:pPr>
+            <a:r>
+              <a:t>✔ Tỷ lệ thành công: 100% Passed (57/57 ca vượt qua)</a:t>
+            </a:r>
+          </a:p>
+          <a:p>
+            <a:pPr>
+              <a:spcAft>
+                <a:spcPts val="300"/>
+              </a:spcAft>
+              <a:defRPr sz="1100">
+                <a:solidFill>
+                  <a:srgbClr val="333333"/>
+                </a:solidFill>
+              </a:defRPr>
+            </a:pPr>
+            <a:r>
+              <a:t>✔ Độ bao phủ mã nguồn JaCoCo: 90.3% Line / 85.6% Branch</a:t>
+            </a:r>
+          </a:p>
+          <a:p>
+            <a:pPr>
+              <a:spcAft>
+                <a:spcPts val="300"/>
+              </a:spcAft>
+              <a:defRPr sz="1100">
+                <a:solidFill>
+                  <a:srgbClr val="333333"/>
+                </a:solidFill>
+              </a:defRPr>
+            </a:pPr>
+            <a:r>
+              <a:t>✔ Hiệu năng chịu tải JMeter: 54.7 ms / Tỷ lệ lỗi: 0.00%</a:t>
+            </a:r>
+          </a:p>
+          <a:p>
+            <a:pPr>
+              <a:spcAft>
+                <a:spcPts val="300"/>
+              </a:spcAft>
+              <a:defRPr sz="1100">
+                <a:solidFill>
+                  <a:srgbClr val="333333"/>
+                </a:solidFill>
+              </a:defRPr>
+            </a:pPr>
+            <a:r>
+              <a:t>✔ Cơ chế bảo mật: Khóa bi quan chống Double-Spending 100%</a:t>
+            </a:r>
+          </a:p>
+        </p:txBody>
+      </p:sp>
+      <p:pic>
+        <p:nvPicPr>
+          <p:cNvPr id="11" name="Picture 10">
+            <a:extLst>
+              <a:ext uri="{FF2B5EF4-FFF2-40B4-BE49-F238E27FC236}">
+                <a16:creationId xmlns:a16="http://schemas.microsoft.com/office/drawing/2014/main" id="{3AD1589C-B8F3-0C57-E46E-EFB94B424B7D}"/>
+              </a:ext>
+            </a:extLst>
+          </p:cNvPr>
+          <p:cNvPicPr>
+            <a:picLocks noChangeAspect="1"/>
+          </p:cNvPicPr>
+          <p:nvPr/>
+        </p:nvPicPr>
+        <p:blipFill>
+          <a:blip r:embed="rId3"/>
+          <a:stretch>
+            <a:fillRect/>
+          </a:stretch>
+        </p:blipFill>
+        <p:spPr>
+          <a:xfrm>
+            <a:off x="104203" y="1864423"/>
+            <a:ext cx="5762625" cy="3019425"/>
+          </a:xfrm>
+          <a:prstGeom prst="rect">
+            <a:avLst/>
+          </a:prstGeom>
+        </p:spPr>
+      </p:pic>
     </p:spTree>
   </p:cSld>
   <p:clrMapOvr>
@@ -5103,7 +5372,7 @@
 </file>
 
 <file path=ppt/slides/slide15.xml><?xml version="1.0" encoding="utf-8"?>
-<p:sld xmlns:a="http://schemas.openxmlformats.org/drawingml/2006/main" xmlns:p="http://schemas.openxmlformats.org/presentationml/2006/main" xmlns:r="http://schemas.openxmlformats.org/officeDocument/2006/relationships">
+<p:sld xmlns:a="http://schemas.openxmlformats.org/drawingml/2006/main" xmlns:r="http://schemas.openxmlformats.org/officeDocument/2006/relationships" xmlns:p="http://schemas.openxmlformats.org/presentationml/2006/main">
   <p:cSld>
     <p:spTree>
       <p:nvGrpSpPr>
@@ -5111,7 +5380,14 @@
         <p:cNvGrpSpPr/>
         <p:nvPr/>
       </p:nvGrpSpPr>
-      <p:grpSpPr/>
+      <p:grpSpPr>
+        <a:xfrm>
+          <a:off x="0" y="0"/>
+          <a:ext cx="0" cy="0"/>
+          <a:chOff x="0" y="0"/>
+          <a:chExt cx="0" cy="0"/>
+        </a:xfrm>
+      </p:grpSpPr>
       <p:sp>
         <p:nvSpPr>
           <p:cNvPr id="2" name="TextBox 1"/>
@@ -5121,7 +5397,7 @@
         <p:spPr>
           <a:xfrm>
             <a:off x="731520" y="365760"/>
-            <a:ext cx="10698480" cy="1005840"/>
+            <a:ext cx="9144000" cy="777240"/>
           </a:xfrm>
           <a:prstGeom prst="rect">
             <a:avLst/>
@@ -5135,29 +5411,14 @@
           <a:lstStyle/>
           <a:p>
             <a:pPr>
-              <a:defRPr sz="1100" b="1">
-                <a:solidFill>
-                  <a:srgbClr val="00838F"/>
-                </a:solidFill>
-              </a:defRPr>
-            </a:pPr>
-            <a:r>
-              <a:t>TRƯỜNG ĐẠI HỌC PHENIKAA • KHOA CÔNG NGHỆ THÔNG TIN</a:t>
-            </a:r>
-          </a:p>
-          <a:p>
-            <a:pPr>
-              <a:spcBef>
-                <a:spcPts val="400"/>
-              </a:spcBef>
-              <a:defRPr sz="2400" b="1">
+              <a:defRPr sz="2300" b="1">
                 <a:solidFill>
                   <a:srgbClr val="1F497D"/>
                 </a:solidFill>
               </a:defRPr>
             </a:pPr>
             <a:r>
-              <a:t>12. Đánh Giá Chất Lượng Theo Chuẩn ISO/IEC 25010</a:t>
+              <a:t>12. Nhật Ký Phát Hiện &amp; Xử Lý Lỗi Phần Mềm (Defect Log)</a:t>
             </a:r>
           </a:p>
         </p:txBody>
@@ -5170,8 +5431,8 @@
         </p:nvSpPr>
         <p:spPr>
           <a:xfrm>
-            <a:off x="731520" y="1371600"/>
-            <a:ext cx="10728655" cy="36576"/>
+            <a:off x="731520" y="1234440"/>
+            <a:ext cx="10728655" cy="32004"/>
           </a:xfrm>
           <a:prstGeom prst="rect">
             <a:avLst/>
@@ -5204,19 +5465,79 @@
           <a:lstStyle/>
           <a:p>
             <a:pPr algn="ctr"/>
-          </a:p>
-        </p:txBody>
-      </p:sp>
-      <p:sp>
-        <p:nvSpPr>
-          <p:cNvPr id="4" name="Rounded Rectangle 3"/>
+            <a:endParaRPr/>
+          </a:p>
+        </p:txBody>
+      </p:sp>
+      <p:pic>
+        <p:nvPicPr>
+          <p:cNvPr id="4" name="Picture 3" descr="phenikaa_logo.png"/>
+          <p:cNvPicPr>
+            <a:picLocks noChangeAspect="1"/>
+          </p:cNvPicPr>
+          <p:nvPr/>
+        </p:nvPicPr>
+        <p:blipFill>
+          <a:blip r:embed="rId2"/>
+          <a:stretch>
+            <a:fillRect/>
+          </a:stretch>
+        </p:blipFill>
+        <p:spPr>
+          <a:xfrm>
+            <a:off x="10332720" y="228600"/>
+            <a:ext cx="1371600" cy="834887"/>
+          </a:xfrm>
+          <a:prstGeom prst="rect">
+            <a:avLst/>
+          </a:prstGeom>
+        </p:spPr>
+      </p:pic>
+      <p:sp>
+        <p:nvSpPr>
+          <p:cNvPr id="5" name="TextBox 4"/>
+          <p:cNvSpPr txBox="1"/>
+          <p:nvPr/>
+        </p:nvSpPr>
+        <p:spPr>
+          <a:xfrm>
+            <a:off x="10058400" y="6446520"/>
+            <a:ext cx="1645920" cy="320040"/>
+          </a:xfrm>
+          <a:prstGeom prst="rect">
+            <a:avLst/>
+          </a:prstGeom>
+          <a:noFill/>
+        </p:spPr>
+        <p:txBody>
+          <a:bodyPr wrap="none" lIns="0" tIns="0" rIns="0" bIns="0">
+            <a:spAutoFit/>
+          </a:bodyPr>
+          <a:lstStyle/>
+          <a:p>
+            <a:pPr algn="r">
+              <a:defRPr sz="1100" b="1">
+                <a:solidFill>
+                  <a:srgbClr val="78909C"/>
+                </a:solidFill>
+              </a:defRPr>
+            </a:pPr>
+            <a:r>
+              <a:t>15 / 18</a:t>
+            </a:r>
+          </a:p>
+        </p:txBody>
+      </p:sp>
+      <p:sp>
+        <p:nvSpPr>
+          <p:cNvPr id="6" name="Rounded Rectangle 5"/>
           <p:cNvSpPr/>
           <p:nvPr/>
         </p:nvSpPr>
         <p:spPr>
           <a:xfrm>
             <a:off x="731520" y="1645920"/>
-            <a:ext cx="10728655" cy="594360"/>
+            <a:ext cx="10728655" cy="685800"/>
           </a:xfrm>
           <a:prstGeom prst="roundRect">
             <a:avLst/>
@@ -5226,7 +5547,7 @@
           </a:solidFill>
           <a:ln w="19050">
             <a:solidFill>
-              <a:srgbClr val="2E7D32"/>
+              <a:srgbClr val="E65100"/>
             </a:solidFill>
           </a:ln>
         </p:spPr>
@@ -5249,19 +5570,20 @@
           <a:lstStyle/>
           <a:p>
             <a:pPr algn="ctr"/>
-          </a:p>
-        </p:txBody>
-      </p:sp>
-      <p:sp>
-        <p:nvSpPr>
-          <p:cNvPr id="5" name="TextBox 4"/>
+            <a:endParaRPr/>
+          </a:p>
+        </p:txBody>
+      </p:sp>
+      <p:sp>
+        <p:nvSpPr>
+          <p:cNvPr id="7" name="TextBox 6"/>
           <p:cNvSpPr txBox="1"/>
           <p:nvPr/>
         </p:nvSpPr>
         <p:spPr>
           <a:xfrm>
-            <a:off x="914400" y="1700784"/>
-            <a:ext cx="10332720" cy="457200"/>
+            <a:off x="914400" y="1719072"/>
+            <a:ext cx="10332720" cy="548640"/>
           </a:xfrm>
           <a:prstGeom prst="rect">
             <a:avLst/>
@@ -5282,21 +5604,21 @@
               </a:defRPr>
             </a:pPr>
             <a:r>
-              <a:t>1. Tính Phù Hợp Chức Năng:  ĐIỂM ĐÁNH GIÁ: 5.0 / 5.0  |  57/57 ca test tự động thành công (Pass Rate 100%)</a:t>
-            </a:r>
-          </a:p>
-        </p:txBody>
-      </p:sp>
-      <p:sp>
-        <p:nvSpPr>
-          <p:cNvPr id="6" name="Rounded Rectangle 5"/>
+              <a:t>[BUG-01] (CRITICAL) Chuyển tiền: Cho phép chuyển số tiền bằng 0  ➔  Giải pháp: Cập nhật điều kiện if (amount &lt;= 0) [TRẠNG THÁI: CLOSED ✔]</a:t>
+            </a:r>
+          </a:p>
+        </p:txBody>
+      </p:sp>
+      <p:sp>
+        <p:nvSpPr>
+          <p:cNvPr id="8" name="Rounded Rectangle 7"/>
           <p:cNvSpPr/>
           <p:nvPr/>
         </p:nvSpPr>
         <p:spPr>
           <a:xfrm>
-            <a:off x="731520" y="2304288"/>
-            <a:ext cx="10728655" cy="594360"/>
+            <a:off x="731520" y="2423160"/>
+            <a:ext cx="10728655" cy="685800"/>
           </a:xfrm>
           <a:prstGeom prst="roundRect">
             <a:avLst/>
@@ -5306,7 +5628,7 @@
           </a:solidFill>
           <a:ln w="19050">
             <a:solidFill>
-              <a:srgbClr val="2E7D32"/>
+              <a:srgbClr val="00838F"/>
             </a:solidFill>
           </a:ln>
         </p:spPr>
@@ -5329,19 +5651,20 @@
           <a:lstStyle/>
           <a:p>
             <a:pPr algn="ctr"/>
-          </a:p>
-        </p:txBody>
-      </p:sp>
-      <p:sp>
-        <p:nvSpPr>
-          <p:cNvPr id="7" name="TextBox 6"/>
+            <a:endParaRPr/>
+          </a:p>
+        </p:txBody>
+      </p:sp>
+      <p:sp>
+        <p:nvSpPr>
+          <p:cNvPr id="9" name="TextBox 8"/>
           <p:cNvSpPr txBox="1"/>
           <p:nvPr/>
         </p:nvSpPr>
         <p:spPr>
           <a:xfrm>
-            <a:off x="914400" y="2359152"/>
-            <a:ext cx="10332720" cy="457200"/>
+            <a:off x="914400" y="2496312"/>
+            <a:ext cx="10332720" cy="548640"/>
           </a:xfrm>
           <a:prstGeom prst="rect">
             <a:avLst/>
@@ -5362,21 +5685,21 @@
               </a:defRPr>
             </a:pPr>
             <a:r>
-              <a:t>2. Hiệu Quả Hoạt Động:  ĐIỂM ĐÁNH GIÁ: 4.8 / 5.0  |  Thời gian đáp ứng TB 54.7 ms dưới tải 100 người dùng ảo</a:t>
-            </a:r>
-          </a:p>
-        </p:txBody>
-      </p:sp>
-      <p:sp>
-        <p:nvSpPr>
-          <p:cNvPr id="8" name="Rounded Rectangle 7"/>
+              <a:t>[BUG-02] (MAJOR) Tín dụng: Cho phép nộp đơn xin vay số tiền âm  ➔  Giải pháp: Bổ sung tiền kiểm tra loanAmount &lt;= 0 [TRẠNG THÁI: CLOSED ✔]</a:t>
+            </a:r>
+          </a:p>
+        </p:txBody>
+      </p:sp>
+      <p:sp>
+        <p:nvSpPr>
+          <p:cNvPr id="10" name="Rounded Rectangle 9"/>
           <p:cNvSpPr/>
           <p:nvPr/>
         </p:nvSpPr>
         <p:spPr>
           <a:xfrm>
-            <a:off x="731520" y="2962656"/>
-            <a:ext cx="10728655" cy="594360"/>
+            <a:off x="731520" y="3200400"/>
+            <a:ext cx="10728655" cy="685800"/>
           </a:xfrm>
           <a:prstGeom prst="roundRect">
             <a:avLst/>
@@ -5386,7 +5709,7 @@
           </a:solidFill>
           <a:ln w="19050">
             <a:solidFill>
-              <a:srgbClr val="2E7D32"/>
+              <a:srgbClr val="E65100"/>
             </a:solidFill>
           </a:ln>
         </p:spPr>
@@ -5409,19 +5732,20 @@
           <a:lstStyle/>
           <a:p>
             <a:pPr algn="ctr"/>
-          </a:p>
-        </p:txBody>
-      </p:sp>
-      <p:sp>
-        <p:nvSpPr>
-          <p:cNvPr id="9" name="TextBox 8"/>
+            <a:endParaRPr/>
+          </a:p>
+        </p:txBody>
+      </p:sp>
+      <p:sp>
+        <p:nvSpPr>
+          <p:cNvPr id="11" name="TextBox 10"/>
           <p:cNvSpPr txBox="1"/>
           <p:nvPr/>
         </p:nvSpPr>
         <p:spPr>
           <a:xfrm>
-            <a:off x="914400" y="3017520"/>
-            <a:ext cx="10332720" cy="457200"/>
+            <a:off x="914400" y="3273552"/>
+            <a:ext cx="10332720" cy="548640"/>
           </a:xfrm>
           <a:prstGeom prst="rect">
             <a:avLst/>
@@ -5442,21 +5766,21 @@
               </a:defRPr>
             </a:pPr>
             <a:r>
-              <a:t>3. Tính Tương Thích:  ĐIỂM ĐÁNH GIÁ: 4.7 / 5.0  |  Hiển thị chuẩn mực trên Chrome, Edge, Firefox, responsive</a:t>
-            </a:r>
-          </a:p>
-        </p:txBody>
-      </p:sp>
-      <p:sp>
-        <p:nvSpPr>
-          <p:cNvPr id="10" name="Rounded Rectangle 9"/>
+              <a:t>[BUG-03] (CRITICAL) Tín dụng: Duyệt vay nhưng không cộng tiền giải ngân  ➔  Giải pháp: Bổ sung cộng số dư tài khoản người vay [TRẠNG THÁI: CLOSED ✔]</a:t>
+            </a:r>
+          </a:p>
+        </p:txBody>
+      </p:sp>
+      <p:sp>
+        <p:nvSpPr>
+          <p:cNvPr id="12" name="Rounded Rectangle 11"/>
           <p:cNvSpPr/>
           <p:nvPr/>
         </p:nvSpPr>
         <p:spPr>
           <a:xfrm>
-            <a:off x="731520" y="3621024"/>
-            <a:ext cx="10728655" cy="594360"/>
+            <a:off x="731520" y="3977639"/>
+            <a:ext cx="10728655" cy="685800"/>
           </a:xfrm>
           <a:prstGeom prst="roundRect">
             <a:avLst/>
@@ -5466,7 +5790,7 @@
           </a:solidFill>
           <a:ln w="19050">
             <a:solidFill>
-              <a:srgbClr val="2E7D32"/>
+              <a:srgbClr val="E65100"/>
             </a:solidFill>
           </a:ln>
         </p:spPr>
@@ -5489,19 +5813,20 @@
           <a:lstStyle/>
           <a:p>
             <a:pPr algn="ctr"/>
-          </a:p>
-        </p:txBody>
-      </p:sp>
-      <p:sp>
-        <p:nvSpPr>
-          <p:cNvPr id="11" name="TextBox 10"/>
+            <a:endParaRPr/>
+          </a:p>
+        </p:txBody>
+      </p:sp>
+      <p:sp>
+        <p:nvSpPr>
+          <p:cNvPr id="13" name="TextBox 12"/>
           <p:cNvSpPr txBox="1"/>
           <p:nvPr/>
         </p:nvSpPr>
         <p:spPr>
           <a:xfrm>
-            <a:off x="914400" y="3675888"/>
-            <a:ext cx="10332720" cy="457200"/>
+            <a:off x="914400" y="4050791"/>
+            <a:ext cx="10332720" cy="548640"/>
           </a:xfrm>
           <a:prstGeom prst="rect">
             <a:avLst/>
@@ -5522,21 +5847,21 @@
               </a:defRPr>
             </a:pPr>
             <a:r>
-              <a:t>4. Tính Khả Dụng:  ĐIỂM ĐÁNH GIÁ: 4.8 / 5.0  |  Giao diện tối giản hiện đại, cán bộ làm quen dưới 5 phút</a:t>
-            </a:r>
-          </a:p>
-        </p:txBody>
-      </p:sp>
-      <p:sp>
-        <p:nvSpPr>
-          <p:cNvPr id="12" name="Rounded Rectangle 11"/>
+              <a:t>[BUG-04] (BLOCKER) Tài khoản: Double-Spending khi rút tiền đồng thời  ➔  Giải pháp: Áp dụng Khóa bi quan PESSIMISTIC_WRITE [TRẠNG THÁI: CLOSED ✔]</a:t>
+            </a:r>
+          </a:p>
+        </p:txBody>
+      </p:sp>
+      <p:sp>
+        <p:nvSpPr>
+          <p:cNvPr id="14" name="Rounded Rectangle 13"/>
           <p:cNvSpPr/>
           <p:nvPr/>
         </p:nvSpPr>
         <p:spPr>
           <a:xfrm>
-            <a:off x="731520" y="4279392"/>
-            <a:ext cx="10728655" cy="594360"/>
+            <a:off x="731520" y="4754880"/>
+            <a:ext cx="10728655" cy="685800"/>
           </a:xfrm>
           <a:prstGeom prst="roundRect">
             <a:avLst/>
@@ -5546,7 +5871,7 @@
           </a:solidFill>
           <a:ln w="19050">
             <a:solidFill>
-              <a:srgbClr val="2E7D32"/>
+              <a:srgbClr val="00838F"/>
             </a:solidFill>
           </a:ln>
         </p:spPr>
@@ -5569,19 +5894,20 @@
           <a:lstStyle/>
           <a:p>
             <a:pPr algn="ctr"/>
-          </a:p>
-        </p:txBody>
-      </p:sp>
-      <p:sp>
-        <p:nvSpPr>
-          <p:cNvPr id="13" name="TextBox 12"/>
+            <a:endParaRPr/>
+          </a:p>
+        </p:txBody>
+      </p:sp>
+      <p:sp>
+        <p:nvSpPr>
+          <p:cNvPr id="15" name="TextBox 14"/>
           <p:cNvSpPr txBox="1"/>
           <p:nvPr/>
         </p:nvSpPr>
         <p:spPr>
           <a:xfrm>
-            <a:off x="914400" y="4334256"/>
-            <a:ext cx="10332720" cy="457200"/>
+            <a:off x="914400" y="4828032"/>
+            <a:ext cx="10332720" cy="548640"/>
           </a:xfrm>
           <a:prstGeom prst="rect">
             <a:avLst/>
@@ -5602,21 +5928,21 @@
               </a:defRPr>
             </a:pPr>
             <a:r>
-              <a:t>5. Độ Tin Cậy:  ĐIỂM ĐÁNH GIÁ: 5.0 / 5.0  |  Khóa bi quan ngăn 100% Double-Spending, tỷ lệ lỗi 0.00%</a:t>
-            </a:r>
-          </a:p>
-        </p:txBody>
-      </p:sp>
-      <p:sp>
-        <p:nvSpPr>
-          <p:cNvPr id="14" name="Rounded Rectangle 13"/>
+              <a:t>[BUG-05] (HIGH) Giao diện: Trang Audit Log cho phép truy cập nặc danh  ➔  Giải pháp: Tích hợp Client-side Route Guard [TRẠNG THÁI: CLOSED ✔]</a:t>
+            </a:r>
+          </a:p>
+        </p:txBody>
+      </p:sp>
+      <p:sp>
+        <p:nvSpPr>
+          <p:cNvPr id="16" name="Rounded Rectangle 15"/>
           <p:cNvSpPr/>
           <p:nvPr/>
         </p:nvSpPr>
         <p:spPr>
           <a:xfrm>
-            <a:off x="731520" y="4937759"/>
-            <a:ext cx="10728655" cy="594360"/>
+            <a:off x="731520" y="5532120"/>
+            <a:ext cx="10728655" cy="685800"/>
           </a:xfrm>
           <a:prstGeom prst="roundRect">
             <a:avLst/>
@@ -5626,7 +5952,7 @@
           </a:solidFill>
           <a:ln w="19050">
             <a:solidFill>
-              <a:srgbClr val="2E7D32"/>
+              <a:srgbClr val="00838F"/>
             </a:solidFill>
           </a:ln>
         </p:spPr>
@@ -5649,19 +5975,20 @@
           <a:lstStyle/>
           <a:p>
             <a:pPr algn="ctr"/>
-          </a:p>
-        </p:txBody>
-      </p:sp>
-      <p:sp>
-        <p:nvSpPr>
-          <p:cNvPr id="15" name="TextBox 14"/>
+            <a:endParaRPr/>
+          </a:p>
+        </p:txBody>
+      </p:sp>
+      <p:sp>
+        <p:nvSpPr>
+          <p:cNvPr id="17" name="TextBox 16"/>
           <p:cNvSpPr txBox="1"/>
           <p:nvPr/>
         </p:nvSpPr>
         <p:spPr>
           <a:xfrm>
-            <a:off x="914400" y="4992623"/>
-            <a:ext cx="10332720" cy="457200"/>
+            <a:off x="914400" y="5605272"/>
+            <a:ext cx="10332720" cy="548640"/>
           </a:xfrm>
           <a:prstGeom prst="rect">
             <a:avLst/>
@@ -5682,87 +6009,7 @@
               </a:defRPr>
             </a:pPr>
             <a:r>
-              <a:t>6. Tính Bảo Mật:  ĐIỂM ĐÁNH GIÁ: 4.9 / 5.0  |  Mật khẩu mã hóa BCrypt, JWT Bearer Token, Route Guard</a:t>
-            </a:r>
-          </a:p>
-        </p:txBody>
-      </p:sp>
-      <p:sp>
-        <p:nvSpPr>
-          <p:cNvPr id="16" name="Rounded Rectangle 15"/>
-          <p:cNvSpPr/>
-          <p:nvPr/>
-        </p:nvSpPr>
-        <p:spPr>
-          <a:xfrm>
-            <a:off x="731520" y="5596128"/>
-            <a:ext cx="10728655" cy="594360"/>
-          </a:xfrm>
-          <a:prstGeom prst="roundRect">
-            <a:avLst/>
-          </a:prstGeom>
-          <a:solidFill>
-            <a:srgbClr val="F4F6F9"/>
-          </a:solidFill>
-          <a:ln w="19050">
-            <a:solidFill>
-              <a:srgbClr val="2E7D32"/>
-            </a:solidFill>
-          </a:ln>
-        </p:spPr>
-        <p:style>
-          <a:lnRef idx="1">
-            <a:schemeClr val="accent1"/>
-          </a:lnRef>
-          <a:fillRef idx="3">
-            <a:schemeClr val="accent1"/>
-          </a:fillRef>
-          <a:effectRef idx="2">
-            <a:schemeClr val="accent1"/>
-          </a:effectRef>
-          <a:fontRef idx="minor">
-            <a:schemeClr val="lt1"/>
-          </a:fontRef>
-        </p:style>
-        <p:txBody>
-          <a:bodyPr rtlCol="0" anchor="ctr"/>
-          <a:lstStyle/>
-          <a:p>
-            <a:pPr algn="ctr"/>
-          </a:p>
-        </p:txBody>
-      </p:sp>
-      <p:sp>
-        <p:nvSpPr>
-          <p:cNvPr id="17" name="TextBox 16"/>
-          <p:cNvSpPr txBox="1"/>
-          <p:nvPr/>
-        </p:nvSpPr>
-        <p:spPr>
-          <a:xfrm>
-            <a:off x="914400" y="5650992"/>
-            <a:ext cx="10332720" cy="457200"/>
-          </a:xfrm>
-          <a:prstGeom prst="rect">
-            <a:avLst/>
-          </a:prstGeom>
-          <a:noFill/>
-        </p:spPr>
-        <p:txBody>
-          <a:bodyPr wrap="square">
-            <a:spAutoFit/>
-          </a:bodyPr>
-          <a:lstStyle/>
-          <a:p>
-            <a:pPr>
-              <a:defRPr sz="1200" b="1">
-                <a:solidFill>
-                  <a:srgbClr val="0F243E"/>
-                </a:solidFill>
-              </a:defRPr>
-            </a:pPr>
-            <a:r>
-              <a:t>7. Khả Năng Bảo Trì:  ĐIỂM ĐÁNH GIÁ: 4.9 / 5.0  |  Mã nguồn phân tầng chuẩn mực, JaCoCo Coverage đạt 90.3%</a:t>
+              <a:t>[BUG-06] (MEDIUM) Kết nối: Fallback port 8081 gây lỗi kết nối API  ➔  Giải pháp: Chuẩn hóa trỏ về cổng backend 8080 [TRẠNG THÁI: CLOSED ✔]</a:t>
             </a:r>
           </a:p>
         </p:txBody>
@@ -5776,7 +6023,7 @@
 </file>
 
 <file path=ppt/slides/slide16.xml><?xml version="1.0" encoding="utf-8"?>
-<p:sld xmlns:a="http://schemas.openxmlformats.org/drawingml/2006/main" xmlns:p="http://schemas.openxmlformats.org/presentationml/2006/main" xmlns:r="http://schemas.openxmlformats.org/officeDocument/2006/relationships">
+<p:sld xmlns:a="http://schemas.openxmlformats.org/drawingml/2006/main" xmlns:r="http://schemas.openxmlformats.org/officeDocument/2006/relationships" xmlns:p="http://schemas.openxmlformats.org/presentationml/2006/main">
   <p:cSld>
     <p:spTree>
       <p:nvGrpSpPr>
@@ -5784,7 +6031,14 @@
         <p:cNvGrpSpPr/>
         <p:nvPr/>
       </p:nvGrpSpPr>
-      <p:grpSpPr/>
+      <p:grpSpPr>
+        <a:xfrm>
+          <a:off x="0" y="0"/>
+          <a:ext cx="0" cy="0"/>
+          <a:chOff x="0" y="0"/>
+          <a:chExt cx="0" cy="0"/>
+        </a:xfrm>
+      </p:grpSpPr>
       <p:sp>
         <p:nvSpPr>
           <p:cNvPr id="2" name="TextBox 1"/>
@@ -5794,7 +6048,7 @@
         <p:spPr>
           <a:xfrm>
             <a:off x="731520" y="365760"/>
-            <a:ext cx="10698480" cy="1005840"/>
+            <a:ext cx="9144000" cy="777240"/>
           </a:xfrm>
           <a:prstGeom prst="rect">
             <a:avLst/>
@@ -5808,29 +6062,14 @@
           <a:lstStyle/>
           <a:p>
             <a:pPr>
-              <a:defRPr sz="1100" b="1">
-                <a:solidFill>
-                  <a:srgbClr val="00838F"/>
-                </a:solidFill>
-              </a:defRPr>
-            </a:pPr>
-            <a:r>
-              <a:t>TRƯỜNG ĐẠI HỌC PHENIKAA • KHOA CÔNG NGHỆ THÔNG TIN</a:t>
-            </a:r>
-          </a:p>
-          <a:p>
-            <a:pPr>
-              <a:spcBef>
-                <a:spcPts val="400"/>
-              </a:spcBef>
-              <a:defRPr sz="2400" b="1">
+              <a:defRPr sz="2300" b="1">
                 <a:solidFill>
                   <a:srgbClr val="1F497D"/>
                 </a:solidFill>
               </a:defRPr>
             </a:pPr>
             <a:r>
-              <a:t>13. Tổng Kết Thành Quả &amp; Định Hướng Phát Triển</a:t>
+              <a:t>13. Đánh Giá Chất Lượng Theo Chuẩn ISO/IEC 25010</a:t>
             </a:r>
           </a:p>
         </p:txBody>
@@ -5843,8 +6082,8 @@
         </p:nvSpPr>
         <p:spPr>
           <a:xfrm>
-            <a:off x="731520" y="1371600"/>
-            <a:ext cx="10728655" cy="36576"/>
+            <a:off x="731520" y="1234440"/>
+            <a:ext cx="10728655" cy="32004"/>
           </a:xfrm>
           <a:prstGeom prst="rect">
             <a:avLst/>
@@ -5877,19 +6116,79 @@
           <a:lstStyle/>
           <a:p>
             <a:pPr algn="ctr"/>
-          </a:p>
-        </p:txBody>
-      </p:sp>
-      <p:sp>
-        <p:nvSpPr>
-          <p:cNvPr id="4" name="Rounded Rectangle 3"/>
+            <a:endParaRPr/>
+          </a:p>
+        </p:txBody>
+      </p:sp>
+      <p:pic>
+        <p:nvPicPr>
+          <p:cNvPr id="4" name="Picture 3" descr="phenikaa_logo.png"/>
+          <p:cNvPicPr>
+            <a:picLocks noChangeAspect="1"/>
+          </p:cNvPicPr>
+          <p:nvPr/>
+        </p:nvPicPr>
+        <p:blipFill>
+          <a:blip r:embed="rId2"/>
+          <a:stretch>
+            <a:fillRect/>
+          </a:stretch>
+        </p:blipFill>
+        <p:spPr>
+          <a:xfrm>
+            <a:off x="10332720" y="228600"/>
+            <a:ext cx="1371600" cy="834887"/>
+          </a:xfrm>
+          <a:prstGeom prst="rect">
+            <a:avLst/>
+          </a:prstGeom>
+        </p:spPr>
+      </p:pic>
+      <p:sp>
+        <p:nvSpPr>
+          <p:cNvPr id="5" name="TextBox 4"/>
+          <p:cNvSpPr txBox="1"/>
+          <p:nvPr/>
+        </p:nvSpPr>
+        <p:spPr>
+          <a:xfrm>
+            <a:off x="10058400" y="6446520"/>
+            <a:ext cx="1645920" cy="320040"/>
+          </a:xfrm>
+          <a:prstGeom prst="rect">
+            <a:avLst/>
+          </a:prstGeom>
+          <a:noFill/>
+        </p:spPr>
+        <p:txBody>
+          <a:bodyPr wrap="none" lIns="0" tIns="0" rIns="0" bIns="0">
+            <a:spAutoFit/>
+          </a:bodyPr>
+          <a:lstStyle/>
+          <a:p>
+            <a:pPr algn="r">
+              <a:defRPr sz="1100" b="1">
+                <a:solidFill>
+                  <a:srgbClr val="78909C"/>
+                </a:solidFill>
+              </a:defRPr>
+            </a:pPr>
+            <a:r>
+              <a:t>16 / 18</a:t>
+            </a:r>
+          </a:p>
+        </p:txBody>
+      </p:sp>
+      <p:sp>
+        <p:nvSpPr>
+          <p:cNvPr id="6" name="Rounded Rectangle 5"/>
           <p:cNvSpPr/>
           <p:nvPr/>
         </p:nvSpPr>
         <p:spPr>
           <a:xfrm>
-            <a:off x="731520" y="1737360"/>
-            <a:ext cx="5212080" cy="4572000"/>
+            <a:off x="731520" y="1645920"/>
+            <a:ext cx="10728655" cy="594360"/>
           </a:xfrm>
           <a:prstGeom prst="roundRect">
             <a:avLst/>
@@ -5897,7 +6196,7 @@
           <a:solidFill>
             <a:srgbClr val="F4F6F9"/>
           </a:solidFill>
-          <a:ln w="25400">
+          <a:ln w="19050">
             <a:solidFill>
               <a:srgbClr val="2E7D32"/>
             </a:solidFill>
@@ -5922,19 +6221,20 @@
           <a:lstStyle/>
           <a:p>
             <a:pPr algn="ctr"/>
-          </a:p>
-        </p:txBody>
-      </p:sp>
-      <p:sp>
-        <p:nvSpPr>
-          <p:cNvPr id="5" name="TextBox 4"/>
+            <a:endParaRPr/>
+          </a:p>
+        </p:txBody>
+      </p:sp>
+      <p:sp>
+        <p:nvSpPr>
+          <p:cNvPr id="7" name="TextBox 6"/>
           <p:cNvSpPr txBox="1"/>
           <p:nvPr/>
         </p:nvSpPr>
         <p:spPr>
           <a:xfrm>
-            <a:off x="914400" y="1920240"/>
-            <a:ext cx="4846320" cy="4114800"/>
+            <a:off x="914400" y="1700784"/>
+            <a:ext cx="10332720" cy="457200"/>
           </a:xfrm>
           <a:prstGeom prst="rect">
             <a:avLst/>
@@ -5948,106 +6248,28 @@
           <a:lstStyle/>
           <a:p>
             <a:pPr>
-              <a:spcAft>
-                <a:spcPts val="1200"/>
-              </a:spcAft>
-              <a:defRPr sz="1700" b="1">
-                <a:solidFill>
-                  <a:srgbClr val="2E7D32"/>
-                </a:solidFill>
-              </a:defRPr>
-            </a:pPr>
-            <a:r>
-              <a:t>Thành Quả Đạt Được</a:t>
-            </a:r>
-          </a:p>
-          <a:p>
-            <a:pPr>
-              <a:spcAft>
-                <a:spcPts val="1000"/>
-              </a:spcAft>
-              <a:defRPr sz="1250">
-                <a:solidFill>
-                  <a:srgbClr val="333333"/>
-                </a:solidFill>
-              </a:defRPr>
-            </a:pPr>
-            <a:r>
-              <a:t>✔ Hoàn thành 100% mục tiêu đề tài theo chuẩn Đại học Phenikaa.</a:t>
-            </a:r>
-          </a:p>
-          <a:p>
-            <a:pPr>
-              <a:spcAft>
-                <a:spcPts val="1000"/>
-              </a:spcAft>
-              <a:defRPr sz="1250">
-                <a:solidFill>
-                  <a:srgbClr val="333333"/>
-                </a:solidFill>
-              </a:defRPr>
-            </a:pPr>
-            <a:r>
-              <a:t>✔ Thiết lập thành công 57 ca kiểm thử tự động đạt tỷ lệ 100% Passed.</a:t>
-            </a:r>
-          </a:p>
-          <a:p>
-            <a:pPr>
-              <a:spcAft>
-                <a:spcPts val="1000"/>
-              </a:spcAft>
-              <a:defRPr sz="1250">
-                <a:solidFill>
-                  <a:srgbClr val="333333"/>
-                </a:solidFill>
-              </a:defRPr>
-            </a:pPr>
-            <a:r>
-              <a:t>✔ Độ bao phủ mã nguồn JaCoCo đạt 90.3% dòng lệnh và 85.6% nhánh rẽ.</a:t>
-            </a:r>
-          </a:p>
-          <a:p>
-            <a:pPr>
-              <a:spcAft>
-                <a:spcPts val="1000"/>
-              </a:spcAft>
-              <a:defRPr sz="1250">
-                <a:solidFill>
-                  <a:srgbClr val="333333"/>
-                </a:solidFill>
-              </a:defRPr>
-            </a:pPr>
-            <a:r>
-              <a:t>✔ Hiệu năng chịu tải đạt tốc độ 54.7 ms với tỷ lệ lỗi giao dịch 0.00%.</a:t>
-            </a:r>
-          </a:p>
-          <a:p>
-            <a:pPr>
-              <a:spcAft>
-                <a:spcPts val="1000"/>
-              </a:spcAft>
-              <a:defRPr sz="1250">
-                <a:solidFill>
-                  <a:srgbClr val="333333"/>
-                </a:solidFill>
-              </a:defRPr>
-            </a:pPr>
-            <a:r>
-              <a:t>✔ Xử lý dứt điểm 6 lỗi quan trọng, đóng 100% các defect phát hiện.</a:t>
-            </a:r>
-          </a:p>
-        </p:txBody>
-      </p:sp>
-      <p:sp>
-        <p:nvSpPr>
-          <p:cNvPr id="6" name="Rounded Rectangle 5"/>
+              <a:defRPr sz="1200" b="1">
+                <a:solidFill>
+                  <a:srgbClr val="0F243E"/>
+                </a:solidFill>
+              </a:defRPr>
+            </a:pPr>
+            <a:r>
+              <a:t>1. Tính Phù Hợp Chức Năng:  ĐIỂM ĐÁNH GIÁ: 5.0 / 5.0  |  57/57 ca test tự động thành công (Pass Rate 100%)</a:t>
+            </a:r>
+          </a:p>
+        </p:txBody>
+      </p:sp>
+      <p:sp>
+        <p:nvSpPr>
+          <p:cNvPr id="8" name="Rounded Rectangle 7"/>
           <p:cNvSpPr/>
           <p:nvPr/>
         </p:nvSpPr>
         <p:spPr>
           <a:xfrm>
-            <a:off x="6217920" y="1737360"/>
-            <a:ext cx="5212080" cy="4572000"/>
+            <a:off x="731520" y="2304288"/>
+            <a:ext cx="10728655" cy="594360"/>
           </a:xfrm>
           <a:prstGeom prst="roundRect">
             <a:avLst/>
@@ -6055,9 +6277,9 @@
           <a:solidFill>
             <a:srgbClr val="F4F6F9"/>
           </a:solidFill>
-          <a:ln w="25400">
+          <a:ln w="19050">
             <a:solidFill>
-              <a:srgbClr val="1F497D"/>
+              <a:srgbClr val="2E7D32"/>
             </a:solidFill>
           </a:ln>
         </p:spPr>
@@ -6080,19 +6302,20 @@
           <a:lstStyle/>
           <a:p>
             <a:pPr algn="ctr"/>
-          </a:p>
-        </p:txBody>
-      </p:sp>
-      <p:sp>
-        <p:nvSpPr>
-          <p:cNvPr id="7" name="TextBox 6"/>
+            <a:endParaRPr/>
+          </a:p>
+        </p:txBody>
+      </p:sp>
+      <p:sp>
+        <p:nvSpPr>
+          <p:cNvPr id="9" name="TextBox 8"/>
           <p:cNvSpPr txBox="1"/>
           <p:nvPr/>
         </p:nvSpPr>
         <p:spPr>
           <a:xfrm>
-            <a:off x="6400800" y="1920240"/>
-            <a:ext cx="4846320" cy="4114800"/>
+            <a:off x="914400" y="2359152"/>
+            <a:ext cx="10332720" cy="457200"/>
           </a:xfrm>
           <a:prstGeom prst="rect">
             <a:avLst/>
@@ -6106,92 +6329,419 @@
           <a:lstStyle/>
           <a:p>
             <a:pPr>
-              <a:spcAft>
-                <a:spcPts val="1200"/>
-              </a:spcAft>
-              <a:defRPr sz="1700" b="1">
-                <a:solidFill>
-                  <a:srgbClr val="1F497D"/>
-                </a:solidFill>
-              </a:defRPr>
-            </a:pPr>
-            <a:r>
-              <a:t>Định Hướng Phát Triển Tiếp Theo</a:t>
-            </a:r>
-          </a:p>
-          <a:p>
-            <a:pPr>
-              <a:spcAft>
-                <a:spcPts val="1000"/>
-              </a:spcAft>
-              <a:defRPr sz="1250">
-                <a:solidFill>
-                  <a:srgbClr val="333333"/>
-                </a:solidFill>
-              </a:defRPr>
-            </a:pPr>
-            <a:r>
-              <a:t>➔ Tích hợp đường ống CI/CD tự động (GitHub Actions / Jenkins).</a:t>
-            </a:r>
-          </a:p>
-          <a:p>
-            <a:pPr>
-              <a:spcAft>
-                <a:spcPts val="1000"/>
-              </a:spcAft>
-              <a:defRPr sz="1250">
-                <a:solidFill>
-                  <a:srgbClr val="333333"/>
-                </a:solidFill>
-              </a:defRPr>
-            </a:pPr>
-            <a:r>
-              <a:t>➔ Mở rộng kịch bản kiểm thử API nâng cao cho toàn bộ luồng nghiệp vụ.</a:t>
-            </a:r>
-          </a:p>
-          <a:p>
-            <a:pPr>
-              <a:spcAft>
-                <a:spcPts val="1000"/>
-              </a:spcAft>
-              <a:defRPr sz="1250">
-                <a:solidFill>
-                  <a:srgbClr val="333333"/>
-                </a:solidFill>
-              </a:defRPr>
-            </a:pPr>
-            <a:r>
-              <a:t>➔ Nâng cấp xác thực hai yếu tố (2FA OTP) &amp; sinh trắc học eKYC nâng cao.</a:t>
-            </a:r>
-          </a:p>
-          <a:p>
-            <a:pPr>
-              <a:spcAft>
-                <a:spcPts val="1000"/>
-              </a:spcAft>
-              <a:defRPr sz="1250">
-                <a:solidFill>
-                  <a:srgbClr val="333333"/>
-                </a:solidFill>
-              </a:defRPr>
-            </a:pPr>
-            <a:r>
-              <a:t>➔ Triển khai Redis Cache phân tán đáp ứng hàng triệu người dùng.</a:t>
-            </a:r>
-          </a:p>
-          <a:p>
-            <a:pPr>
-              <a:spcAft>
-                <a:spcPts val="1000"/>
-              </a:spcAft>
-              <a:defRPr sz="1250">
-                <a:solidFill>
-                  <a:srgbClr val="333333"/>
-                </a:solidFill>
-              </a:defRPr>
-            </a:pPr>
-            <a:r>
-              <a:t>➔ Kiểm thử giao diện chéo trình duyệt qua Selenium Grid.</a:t>
+              <a:defRPr sz="1200" b="1">
+                <a:solidFill>
+                  <a:srgbClr val="0F243E"/>
+                </a:solidFill>
+              </a:defRPr>
+            </a:pPr>
+            <a:r>
+              <a:t>2. Hiệu Quả Hoạt Động:  ĐIỂM ĐÁNH GIÁ: 4.8 / 5.0  |  Thời gian đáp ứng TB 54.7 ms dưới tải 100 người dùng ảo</a:t>
+            </a:r>
+          </a:p>
+        </p:txBody>
+      </p:sp>
+      <p:sp>
+        <p:nvSpPr>
+          <p:cNvPr id="10" name="Rounded Rectangle 9"/>
+          <p:cNvSpPr/>
+          <p:nvPr/>
+        </p:nvSpPr>
+        <p:spPr>
+          <a:xfrm>
+            <a:off x="731520" y="2962656"/>
+            <a:ext cx="10728655" cy="594360"/>
+          </a:xfrm>
+          <a:prstGeom prst="roundRect">
+            <a:avLst/>
+          </a:prstGeom>
+          <a:solidFill>
+            <a:srgbClr val="F4F6F9"/>
+          </a:solidFill>
+          <a:ln w="19050">
+            <a:solidFill>
+              <a:srgbClr val="2E7D32"/>
+            </a:solidFill>
+          </a:ln>
+        </p:spPr>
+        <p:style>
+          <a:lnRef idx="1">
+            <a:schemeClr val="accent1"/>
+          </a:lnRef>
+          <a:fillRef idx="3">
+            <a:schemeClr val="accent1"/>
+          </a:fillRef>
+          <a:effectRef idx="2">
+            <a:schemeClr val="accent1"/>
+          </a:effectRef>
+          <a:fontRef idx="minor">
+            <a:schemeClr val="lt1"/>
+          </a:fontRef>
+        </p:style>
+        <p:txBody>
+          <a:bodyPr rtlCol="0" anchor="ctr"/>
+          <a:lstStyle/>
+          <a:p>
+            <a:pPr algn="ctr"/>
+            <a:endParaRPr/>
+          </a:p>
+        </p:txBody>
+      </p:sp>
+      <p:sp>
+        <p:nvSpPr>
+          <p:cNvPr id="11" name="TextBox 10"/>
+          <p:cNvSpPr txBox="1"/>
+          <p:nvPr/>
+        </p:nvSpPr>
+        <p:spPr>
+          <a:xfrm>
+            <a:off x="914400" y="3017520"/>
+            <a:ext cx="10332720" cy="457200"/>
+          </a:xfrm>
+          <a:prstGeom prst="rect">
+            <a:avLst/>
+          </a:prstGeom>
+          <a:noFill/>
+        </p:spPr>
+        <p:txBody>
+          <a:bodyPr wrap="square">
+            <a:spAutoFit/>
+          </a:bodyPr>
+          <a:lstStyle/>
+          <a:p>
+            <a:pPr>
+              <a:defRPr sz="1200" b="1">
+                <a:solidFill>
+                  <a:srgbClr val="0F243E"/>
+                </a:solidFill>
+              </a:defRPr>
+            </a:pPr>
+            <a:r>
+              <a:t>3. Tính Tương Thích:  ĐIỂM ĐÁNH GIÁ: 4.7 / 5.0  |  Hiển thị chuẩn mực trên Chrome, Edge, Firefox, responsive</a:t>
+            </a:r>
+          </a:p>
+        </p:txBody>
+      </p:sp>
+      <p:sp>
+        <p:nvSpPr>
+          <p:cNvPr id="12" name="Rounded Rectangle 11"/>
+          <p:cNvSpPr/>
+          <p:nvPr/>
+        </p:nvSpPr>
+        <p:spPr>
+          <a:xfrm>
+            <a:off x="731520" y="3621024"/>
+            <a:ext cx="10728655" cy="594360"/>
+          </a:xfrm>
+          <a:prstGeom prst="roundRect">
+            <a:avLst/>
+          </a:prstGeom>
+          <a:solidFill>
+            <a:srgbClr val="F4F6F9"/>
+          </a:solidFill>
+          <a:ln w="19050">
+            <a:solidFill>
+              <a:srgbClr val="2E7D32"/>
+            </a:solidFill>
+          </a:ln>
+        </p:spPr>
+        <p:style>
+          <a:lnRef idx="1">
+            <a:schemeClr val="accent1"/>
+          </a:lnRef>
+          <a:fillRef idx="3">
+            <a:schemeClr val="accent1"/>
+          </a:fillRef>
+          <a:effectRef idx="2">
+            <a:schemeClr val="accent1"/>
+          </a:effectRef>
+          <a:fontRef idx="minor">
+            <a:schemeClr val="lt1"/>
+          </a:fontRef>
+        </p:style>
+        <p:txBody>
+          <a:bodyPr rtlCol="0" anchor="ctr"/>
+          <a:lstStyle/>
+          <a:p>
+            <a:pPr algn="ctr"/>
+            <a:endParaRPr/>
+          </a:p>
+        </p:txBody>
+      </p:sp>
+      <p:sp>
+        <p:nvSpPr>
+          <p:cNvPr id="13" name="TextBox 12"/>
+          <p:cNvSpPr txBox="1"/>
+          <p:nvPr/>
+        </p:nvSpPr>
+        <p:spPr>
+          <a:xfrm>
+            <a:off x="914400" y="3675888"/>
+            <a:ext cx="10332720" cy="457200"/>
+          </a:xfrm>
+          <a:prstGeom prst="rect">
+            <a:avLst/>
+          </a:prstGeom>
+          <a:noFill/>
+        </p:spPr>
+        <p:txBody>
+          <a:bodyPr wrap="square">
+            <a:spAutoFit/>
+          </a:bodyPr>
+          <a:lstStyle/>
+          <a:p>
+            <a:pPr>
+              <a:defRPr sz="1200" b="1">
+                <a:solidFill>
+                  <a:srgbClr val="0F243E"/>
+                </a:solidFill>
+              </a:defRPr>
+            </a:pPr>
+            <a:r>
+              <a:t>4. Tính Khả Dụng:  ĐIỂM ĐÁNH GIÁ: 4.8 / 5.0  |  Giao diện tối giản hiện đại, cán bộ làm quen dưới 5 phút</a:t>
+            </a:r>
+          </a:p>
+        </p:txBody>
+      </p:sp>
+      <p:sp>
+        <p:nvSpPr>
+          <p:cNvPr id="14" name="Rounded Rectangle 13"/>
+          <p:cNvSpPr/>
+          <p:nvPr/>
+        </p:nvSpPr>
+        <p:spPr>
+          <a:xfrm>
+            <a:off x="731520" y="4279392"/>
+            <a:ext cx="10728655" cy="594360"/>
+          </a:xfrm>
+          <a:prstGeom prst="roundRect">
+            <a:avLst/>
+          </a:prstGeom>
+          <a:solidFill>
+            <a:srgbClr val="F4F6F9"/>
+          </a:solidFill>
+          <a:ln w="19050">
+            <a:solidFill>
+              <a:srgbClr val="2E7D32"/>
+            </a:solidFill>
+          </a:ln>
+        </p:spPr>
+        <p:style>
+          <a:lnRef idx="1">
+            <a:schemeClr val="accent1"/>
+          </a:lnRef>
+          <a:fillRef idx="3">
+            <a:schemeClr val="accent1"/>
+          </a:fillRef>
+          <a:effectRef idx="2">
+            <a:schemeClr val="accent1"/>
+          </a:effectRef>
+          <a:fontRef idx="minor">
+            <a:schemeClr val="lt1"/>
+          </a:fontRef>
+        </p:style>
+        <p:txBody>
+          <a:bodyPr rtlCol="0" anchor="ctr"/>
+          <a:lstStyle/>
+          <a:p>
+            <a:pPr algn="ctr"/>
+            <a:endParaRPr/>
+          </a:p>
+        </p:txBody>
+      </p:sp>
+      <p:sp>
+        <p:nvSpPr>
+          <p:cNvPr id="15" name="TextBox 14"/>
+          <p:cNvSpPr txBox="1"/>
+          <p:nvPr/>
+        </p:nvSpPr>
+        <p:spPr>
+          <a:xfrm>
+            <a:off x="914400" y="4334256"/>
+            <a:ext cx="10332720" cy="457200"/>
+          </a:xfrm>
+          <a:prstGeom prst="rect">
+            <a:avLst/>
+          </a:prstGeom>
+          <a:noFill/>
+        </p:spPr>
+        <p:txBody>
+          <a:bodyPr wrap="square">
+            <a:spAutoFit/>
+          </a:bodyPr>
+          <a:lstStyle/>
+          <a:p>
+            <a:pPr>
+              <a:defRPr sz="1200" b="1">
+                <a:solidFill>
+                  <a:srgbClr val="0F243E"/>
+                </a:solidFill>
+              </a:defRPr>
+            </a:pPr>
+            <a:r>
+              <a:t>5. Độ Tin Cậy:  ĐIỂM ĐÁNH GIÁ: 5.0 / 5.0  |  Khóa bi quan ngăn 100% Double-Spending, tỷ lệ lỗi 0.00%</a:t>
+            </a:r>
+          </a:p>
+        </p:txBody>
+      </p:sp>
+      <p:sp>
+        <p:nvSpPr>
+          <p:cNvPr id="16" name="Rounded Rectangle 15"/>
+          <p:cNvSpPr/>
+          <p:nvPr/>
+        </p:nvSpPr>
+        <p:spPr>
+          <a:xfrm>
+            <a:off x="731520" y="4937759"/>
+            <a:ext cx="10728655" cy="594360"/>
+          </a:xfrm>
+          <a:prstGeom prst="roundRect">
+            <a:avLst/>
+          </a:prstGeom>
+          <a:solidFill>
+            <a:srgbClr val="F4F6F9"/>
+          </a:solidFill>
+          <a:ln w="19050">
+            <a:solidFill>
+              <a:srgbClr val="2E7D32"/>
+            </a:solidFill>
+          </a:ln>
+        </p:spPr>
+        <p:style>
+          <a:lnRef idx="1">
+            <a:schemeClr val="accent1"/>
+          </a:lnRef>
+          <a:fillRef idx="3">
+            <a:schemeClr val="accent1"/>
+          </a:fillRef>
+          <a:effectRef idx="2">
+            <a:schemeClr val="accent1"/>
+          </a:effectRef>
+          <a:fontRef idx="minor">
+            <a:schemeClr val="lt1"/>
+          </a:fontRef>
+        </p:style>
+        <p:txBody>
+          <a:bodyPr rtlCol="0" anchor="ctr"/>
+          <a:lstStyle/>
+          <a:p>
+            <a:pPr algn="ctr"/>
+            <a:endParaRPr/>
+          </a:p>
+        </p:txBody>
+      </p:sp>
+      <p:sp>
+        <p:nvSpPr>
+          <p:cNvPr id="17" name="TextBox 16"/>
+          <p:cNvSpPr txBox="1"/>
+          <p:nvPr/>
+        </p:nvSpPr>
+        <p:spPr>
+          <a:xfrm>
+            <a:off x="914400" y="4992623"/>
+            <a:ext cx="10332720" cy="457200"/>
+          </a:xfrm>
+          <a:prstGeom prst="rect">
+            <a:avLst/>
+          </a:prstGeom>
+          <a:noFill/>
+        </p:spPr>
+        <p:txBody>
+          <a:bodyPr wrap="square">
+            <a:spAutoFit/>
+          </a:bodyPr>
+          <a:lstStyle/>
+          <a:p>
+            <a:pPr>
+              <a:defRPr sz="1200" b="1">
+                <a:solidFill>
+                  <a:srgbClr val="0F243E"/>
+                </a:solidFill>
+              </a:defRPr>
+            </a:pPr>
+            <a:r>
+              <a:t>6. Tính Bảo Mật:  ĐIỂM ĐÁNH GIÁ: 4.9 / 5.0  |  Mật khẩu mã hóa BCrypt, JWT Bearer Token, Route Guard</a:t>
+            </a:r>
+          </a:p>
+        </p:txBody>
+      </p:sp>
+      <p:sp>
+        <p:nvSpPr>
+          <p:cNvPr id="18" name="Rounded Rectangle 17"/>
+          <p:cNvSpPr/>
+          <p:nvPr/>
+        </p:nvSpPr>
+        <p:spPr>
+          <a:xfrm>
+            <a:off x="731520" y="5596128"/>
+            <a:ext cx="10728655" cy="594360"/>
+          </a:xfrm>
+          <a:prstGeom prst="roundRect">
+            <a:avLst/>
+          </a:prstGeom>
+          <a:solidFill>
+            <a:srgbClr val="F4F6F9"/>
+          </a:solidFill>
+          <a:ln w="19050">
+            <a:solidFill>
+              <a:srgbClr val="2E7D32"/>
+            </a:solidFill>
+          </a:ln>
+        </p:spPr>
+        <p:style>
+          <a:lnRef idx="1">
+            <a:schemeClr val="accent1"/>
+          </a:lnRef>
+          <a:fillRef idx="3">
+            <a:schemeClr val="accent1"/>
+          </a:fillRef>
+          <a:effectRef idx="2">
+            <a:schemeClr val="accent1"/>
+          </a:effectRef>
+          <a:fontRef idx="minor">
+            <a:schemeClr val="lt1"/>
+          </a:fontRef>
+        </p:style>
+        <p:txBody>
+          <a:bodyPr rtlCol="0" anchor="ctr"/>
+          <a:lstStyle/>
+          <a:p>
+            <a:pPr algn="ctr"/>
+            <a:endParaRPr/>
+          </a:p>
+        </p:txBody>
+      </p:sp>
+      <p:sp>
+        <p:nvSpPr>
+          <p:cNvPr id="19" name="TextBox 18"/>
+          <p:cNvSpPr txBox="1"/>
+          <p:nvPr/>
+        </p:nvSpPr>
+        <p:spPr>
+          <a:xfrm>
+            <a:off x="914400" y="5650992"/>
+            <a:ext cx="10332720" cy="457200"/>
+          </a:xfrm>
+          <a:prstGeom prst="rect">
+            <a:avLst/>
+          </a:prstGeom>
+          <a:noFill/>
+        </p:spPr>
+        <p:txBody>
+          <a:bodyPr wrap="square">
+            <a:spAutoFit/>
+          </a:bodyPr>
+          <a:lstStyle/>
+          <a:p>
+            <a:pPr>
+              <a:defRPr sz="1200" b="1">
+                <a:solidFill>
+                  <a:srgbClr val="0F243E"/>
+                </a:solidFill>
+              </a:defRPr>
+            </a:pPr>
+            <a:r>
+              <a:t>7. Khả Năng Bảo Trì:  ĐIỂM ĐÁNH GIÁ: 4.9 / 5.0  |  Mã nguồn phân tầng chuẩn mực, JaCoCo Coverage đạt 90.3%</a:t>
             </a:r>
           </a:p>
         </p:txBody>
@@ -6205,7 +6755,7 @@
 </file>
 
 <file path=ppt/slides/slide17.xml><?xml version="1.0" encoding="utf-8"?>
-<p:sld xmlns:a="http://schemas.openxmlformats.org/drawingml/2006/main" xmlns:p="http://schemas.openxmlformats.org/presentationml/2006/main" xmlns:r="http://schemas.openxmlformats.org/officeDocument/2006/relationships">
+<p:sld xmlns:a="http://schemas.openxmlformats.org/drawingml/2006/main" xmlns:r="http://schemas.openxmlformats.org/officeDocument/2006/relationships" xmlns:p="http://schemas.openxmlformats.org/presentationml/2006/main">
   <p:cSld>
     <p:spTree>
       <p:nvGrpSpPr>
@@ -6213,26 +6763,70 @@
         <p:cNvGrpSpPr/>
         <p:nvPr/>
       </p:nvGrpSpPr>
-      <p:grpSpPr/>
-      <p:sp>
-        <p:nvSpPr>
-          <p:cNvPr id="2" name="Rectangle 1"/>
+      <p:grpSpPr>
+        <a:xfrm>
+          <a:off x="0" y="0"/>
+          <a:ext cx="0" cy="0"/>
+          <a:chOff x="0" y="0"/>
+          <a:chExt cx="0" cy="0"/>
+        </a:xfrm>
+      </p:grpSpPr>
+      <p:sp>
+        <p:nvSpPr>
+          <p:cNvPr id="2" name="TextBox 1"/>
+          <p:cNvSpPr txBox="1"/>
+          <p:nvPr/>
+        </p:nvSpPr>
+        <p:spPr>
+          <a:xfrm>
+            <a:off x="731520" y="365760"/>
+            <a:ext cx="9144000" cy="777240"/>
+          </a:xfrm>
+          <a:prstGeom prst="rect">
+            <a:avLst/>
+          </a:prstGeom>
+          <a:noFill/>
+        </p:spPr>
+        <p:txBody>
+          <a:bodyPr wrap="square" lIns="0" tIns="0" rIns="0" bIns="0">
+            <a:spAutoFit/>
+          </a:bodyPr>
+          <a:lstStyle/>
+          <a:p>
+            <a:pPr>
+              <a:defRPr sz="2300" b="1">
+                <a:solidFill>
+                  <a:srgbClr val="1F497D"/>
+                </a:solidFill>
+              </a:defRPr>
+            </a:pPr>
+            <a:r>
+              <a:t>14. Tổng Kết Thành Quả &amp; Định Hướng Phát Triển</a:t>
+            </a:r>
+          </a:p>
+        </p:txBody>
+      </p:sp>
+      <p:sp>
+        <p:nvSpPr>
+          <p:cNvPr id="3" name="Rectangle 2"/>
           <p:cNvSpPr/>
           <p:nvPr/>
         </p:nvSpPr>
         <p:spPr>
           <a:xfrm>
-            <a:off x="0" y="0"/>
-            <a:ext cx="12191695" cy="6858000"/>
+            <a:off x="731520" y="1234440"/>
+            <a:ext cx="10728655" cy="32004"/>
           </a:xfrm>
           <a:prstGeom prst="rect">
             <a:avLst/>
           </a:prstGeom>
           <a:solidFill>
-            <a:srgbClr val="1F497D"/>
+            <a:srgbClr val="00838F"/>
           </a:solidFill>
           <a:ln>
-            <a:noFill/>
+            <a:solidFill>
+              <a:srgbClr val="00838F"/>
+            </a:solidFill>
           </a:ln>
         </p:spPr>
         <p:style>
@@ -6254,19 +6848,125 @@
           <a:lstStyle/>
           <a:p>
             <a:pPr algn="ctr"/>
-          </a:p>
-        </p:txBody>
-      </p:sp>
-      <p:sp>
-        <p:nvSpPr>
-          <p:cNvPr id="3" name="TextBox 2"/>
+            <a:endParaRPr/>
+          </a:p>
+        </p:txBody>
+      </p:sp>
+      <p:pic>
+        <p:nvPicPr>
+          <p:cNvPr id="4" name="Picture 3" descr="phenikaa_logo.png"/>
+          <p:cNvPicPr>
+            <a:picLocks noChangeAspect="1"/>
+          </p:cNvPicPr>
+          <p:nvPr/>
+        </p:nvPicPr>
+        <p:blipFill>
+          <a:blip r:embed="rId2"/>
+          <a:stretch>
+            <a:fillRect/>
+          </a:stretch>
+        </p:blipFill>
+        <p:spPr>
+          <a:xfrm>
+            <a:off x="10332720" y="228600"/>
+            <a:ext cx="1371600" cy="834887"/>
+          </a:xfrm>
+          <a:prstGeom prst="rect">
+            <a:avLst/>
+          </a:prstGeom>
+        </p:spPr>
+      </p:pic>
+      <p:sp>
+        <p:nvSpPr>
+          <p:cNvPr id="5" name="TextBox 4"/>
           <p:cNvSpPr txBox="1"/>
           <p:nvPr/>
         </p:nvSpPr>
         <p:spPr>
           <a:xfrm>
-            <a:off x="1371600" y="1828800"/>
-            <a:ext cx="9448495" cy="3200400"/>
+            <a:off x="10058400" y="6446520"/>
+            <a:ext cx="1645920" cy="320040"/>
+          </a:xfrm>
+          <a:prstGeom prst="rect">
+            <a:avLst/>
+          </a:prstGeom>
+          <a:noFill/>
+        </p:spPr>
+        <p:txBody>
+          <a:bodyPr wrap="none" lIns="0" tIns="0" rIns="0" bIns="0">
+            <a:spAutoFit/>
+          </a:bodyPr>
+          <a:lstStyle/>
+          <a:p>
+            <a:pPr algn="r">
+              <a:defRPr sz="1100" b="1">
+                <a:solidFill>
+                  <a:srgbClr val="78909C"/>
+                </a:solidFill>
+              </a:defRPr>
+            </a:pPr>
+            <a:r>
+              <a:t>17 / 18</a:t>
+            </a:r>
+          </a:p>
+        </p:txBody>
+      </p:sp>
+      <p:sp>
+        <p:nvSpPr>
+          <p:cNvPr id="6" name="Rounded Rectangle 5"/>
+          <p:cNvSpPr/>
+          <p:nvPr/>
+        </p:nvSpPr>
+        <p:spPr>
+          <a:xfrm>
+            <a:off x="731520" y="1645920"/>
+            <a:ext cx="5212080" cy="4572000"/>
+          </a:xfrm>
+          <a:prstGeom prst="roundRect">
+            <a:avLst/>
+          </a:prstGeom>
+          <a:solidFill>
+            <a:srgbClr val="F4F6F9"/>
+          </a:solidFill>
+          <a:ln w="25400">
+            <a:solidFill>
+              <a:srgbClr val="2E7D32"/>
+            </a:solidFill>
+          </a:ln>
+        </p:spPr>
+        <p:style>
+          <a:lnRef idx="1">
+            <a:schemeClr val="accent1"/>
+          </a:lnRef>
+          <a:fillRef idx="3">
+            <a:schemeClr val="accent1"/>
+          </a:fillRef>
+          <a:effectRef idx="2">
+            <a:schemeClr val="accent1"/>
+          </a:effectRef>
+          <a:fontRef idx="minor">
+            <a:schemeClr val="lt1"/>
+          </a:fontRef>
+        </p:style>
+        <p:txBody>
+          <a:bodyPr rtlCol="0" anchor="ctr"/>
+          <a:lstStyle/>
+          <a:p>
+            <a:pPr algn="ctr"/>
+            <a:endParaRPr/>
+          </a:p>
+        </p:txBody>
+      </p:sp>
+      <p:sp>
+        <p:nvSpPr>
+          <p:cNvPr id="7" name="TextBox 6"/>
+          <p:cNvSpPr txBox="1"/>
+          <p:nvPr/>
+        </p:nvSpPr>
+        <p:spPr>
+          <a:xfrm>
+            <a:off x="914400" y="1828800"/>
+            <a:ext cx="4846320" cy="4114800"/>
           </a:xfrm>
           <a:prstGeom prst="rect">
             <a:avLst/>
@@ -6281,47 +6981,250 @@
           <a:p>
             <a:pPr>
               <a:spcAft>
-                <a:spcPts val="2000"/>
+                <a:spcPts val="1200"/>
               </a:spcAft>
-              <a:defRPr sz="3200" b="1">
-                <a:solidFill>
-                  <a:srgbClr val="FFFFFF"/>
-                </a:solidFill>
-              </a:defRPr>
-            </a:pPr>
-            <a:r>
-              <a:t>XIN TRÂN TRỌNG CẢM ƠN THẦY CÔ VÀ CÁC BẠN!</a:t>
+              <a:defRPr sz="1700" b="1">
+                <a:solidFill>
+                  <a:srgbClr val="2E7D32"/>
+                </a:solidFill>
+              </a:defRPr>
+            </a:pPr>
+            <a:r>
+              <a:t>Thành Quả Đạt Được</a:t>
             </a:r>
           </a:p>
           <a:p>
             <a:pPr>
               <a:spcAft>
-                <a:spcPts val="2400"/>
+                <a:spcPts val="1000"/>
               </a:spcAft>
-              <a:defRPr sz="1600">
-                <a:solidFill>
-                  <a:srgbClr val="80D8FF"/>
-                </a:solidFill>
-              </a:defRPr>
-            </a:pPr>
-            <a:r>
-              <a:t>Kính chúc Quý Thầy/Cô dồi dào sức khỏe và công tác tốt!</a:t>
-            </a:r>
-            <a:br/>
-            <a:r>
-              <a:t>Nhóm chúng em sẵn sàng lắng nghe các ý kiến đóng góp và câu hỏi từ Hội đồng.</a:t>
-            </a:r>
-          </a:p>
-          <a:p>
-            <a:pPr>
-              <a:defRPr sz="2000" b="1">
-                <a:solidFill>
-                  <a:srgbClr val="FFD54F"/>
-                </a:solidFill>
-              </a:defRPr>
-            </a:pPr>
-            <a:r>
-              <a:t>PHIÊN HỎI ĐÁP &amp; PHẢN BIỆN (Q&amp;A SESSION)</a:t>
+              <a:defRPr sz="1250">
+                <a:solidFill>
+                  <a:srgbClr val="333333"/>
+                </a:solidFill>
+              </a:defRPr>
+            </a:pPr>
+            <a:r>
+              <a:t>✔ Hoàn thành 100% mục tiêu đề tài theo chuẩn Đại học Phenikaa.</a:t>
+            </a:r>
+          </a:p>
+          <a:p>
+            <a:pPr>
+              <a:spcAft>
+                <a:spcPts val="1000"/>
+              </a:spcAft>
+              <a:defRPr sz="1250">
+                <a:solidFill>
+                  <a:srgbClr val="333333"/>
+                </a:solidFill>
+              </a:defRPr>
+            </a:pPr>
+            <a:r>
+              <a:t>✔ Thiết lập thành công 57 ca kiểm thử tự động đạt tỷ lệ 100% Passed.</a:t>
+            </a:r>
+          </a:p>
+          <a:p>
+            <a:pPr>
+              <a:spcAft>
+                <a:spcPts val="1000"/>
+              </a:spcAft>
+              <a:defRPr sz="1250">
+                <a:solidFill>
+                  <a:srgbClr val="333333"/>
+                </a:solidFill>
+              </a:defRPr>
+            </a:pPr>
+            <a:r>
+              <a:t>✔ Độ bao phủ mã nguồn JaCoCo đạt 90.3% dòng lệnh và 85.6% nhánh rẽ.</a:t>
+            </a:r>
+          </a:p>
+          <a:p>
+            <a:pPr>
+              <a:spcAft>
+                <a:spcPts val="1000"/>
+              </a:spcAft>
+              <a:defRPr sz="1250">
+                <a:solidFill>
+                  <a:srgbClr val="333333"/>
+                </a:solidFill>
+              </a:defRPr>
+            </a:pPr>
+            <a:r>
+              <a:t>✔ Hiệu năng chịu tải đạt tốc độ 54.7 ms với tỷ lệ lỗi giao dịch 0.00%.</a:t>
+            </a:r>
+          </a:p>
+          <a:p>
+            <a:pPr>
+              <a:spcAft>
+                <a:spcPts val="1000"/>
+              </a:spcAft>
+              <a:defRPr sz="1250">
+                <a:solidFill>
+                  <a:srgbClr val="333333"/>
+                </a:solidFill>
+              </a:defRPr>
+            </a:pPr>
+            <a:r>
+              <a:t>✔ Xử lý dứt điểm 6 lỗi quan trọng, đóng 100% các defect phát hiện.</a:t>
+            </a:r>
+          </a:p>
+        </p:txBody>
+      </p:sp>
+      <p:sp>
+        <p:nvSpPr>
+          <p:cNvPr id="8" name="Rounded Rectangle 7"/>
+          <p:cNvSpPr/>
+          <p:nvPr/>
+        </p:nvSpPr>
+        <p:spPr>
+          <a:xfrm>
+            <a:off x="6217920" y="1645920"/>
+            <a:ext cx="5212080" cy="4572000"/>
+          </a:xfrm>
+          <a:prstGeom prst="roundRect">
+            <a:avLst/>
+          </a:prstGeom>
+          <a:solidFill>
+            <a:srgbClr val="F4F6F9"/>
+          </a:solidFill>
+          <a:ln w="25400">
+            <a:solidFill>
+              <a:srgbClr val="1F497D"/>
+            </a:solidFill>
+          </a:ln>
+        </p:spPr>
+        <p:style>
+          <a:lnRef idx="1">
+            <a:schemeClr val="accent1"/>
+          </a:lnRef>
+          <a:fillRef idx="3">
+            <a:schemeClr val="accent1"/>
+          </a:fillRef>
+          <a:effectRef idx="2">
+            <a:schemeClr val="accent1"/>
+          </a:effectRef>
+          <a:fontRef idx="minor">
+            <a:schemeClr val="lt1"/>
+          </a:fontRef>
+        </p:style>
+        <p:txBody>
+          <a:bodyPr rtlCol="0" anchor="ctr"/>
+          <a:lstStyle/>
+          <a:p>
+            <a:pPr algn="ctr"/>
+            <a:endParaRPr/>
+          </a:p>
+        </p:txBody>
+      </p:sp>
+      <p:sp>
+        <p:nvSpPr>
+          <p:cNvPr id="9" name="TextBox 8"/>
+          <p:cNvSpPr txBox="1"/>
+          <p:nvPr/>
+        </p:nvSpPr>
+        <p:spPr>
+          <a:xfrm>
+            <a:off x="6400800" y="1828800"/>
+            <a:ext cx="4846320" cy="4114800"/>
+          </a:xfrm>
+          <a:prstGeom prst="rect">
+            <a:avLst/>
+          </a:prstGeom>
+          <a:noFill/>
+        </p:spPr>
+        <p:txBody>
+          <a:bodyPr wrap="square">
+            <a:spAutoFit/>
+          </a:bodyPr>
+          <a:lstStyle/>
+          <a:p>
+            <a:pPr>
+              <a:spcAft>
+                <a:spcPts val="1200"/>
+              </a:spcAft>
+              <a:defRPr sz="1700" b="1">
+                <a:solidFill>
+                  <a:srgbClr val="1F497D"/>
+                </a:solidFill>
+              </a:defRPr>
+            </a:pPr>
+            <a:r>
+              <a:t>Định Hướng Phát Triển Tiếp Theo</a:t>
+            </a:r>
+          </a:p>
+          <a:p>
+            <a:pPr>
+              <a:spcAft>
+                <a:spcPts val="1000"/>
+              </a:spcAft>
+              <a:defRPr sz="1250">
+                <a:solidFill>
+                  <a:srgbClr val="333333"/>
+                </a:solidFill>
+              </a:defRPr>
+            </a:pPr>
+            <a:r>
+              <a:t>➔ Tích hợp đường ống CI/CD tự động (GitHub Actions / Jenkins).</a:t>
+            </a:r>
+          </a:p>
+          <a:p>
+            <a:pPr>
+              <a:spcAft>
+                <a:spcPts val="1000"/>
+              </a:spcAft>
+              <a:defRPr sz="1250">
+                <a:solidFill>
+                  <a:srgbClr val="333333"/>
+                </a:solidFill>
+              </a:defRPr>
+            </a:pPr>
+            <a:r>
+              <a:t>➔ Mở rộng kịch bản kiểm thử API nâng cao cho toàn bộ luồng nghiệp vụ.</a:t>
+            </a:r>
+          </a:p>
+          <a:p>
+            <a:pPr>
+              <a:spcAft>
+                <a:spcPts val="1000"/>
+              </a:spcAft>
+              <a:defRPr sz="1250">
+                <a:solidFill>
+                  <a:srgbClr val="333333"/>
+                </a:solidFill>
+              </a:defRPr>
+            </a:pPr>
+            <a:r>
+              <a:t>➔ Nâng cấp xác thực hai yếu tố (2FA OTP) &amp; sinh trắc học eKYC nâng cao.</a:t>
+            </a:r>
+          </a:p>
+          <a:p>
+            <a:pPr>
+              <a:spcAft>
+                <a:spcPts val="1000"/>
+              </a:spcAft>
+              <a:defRPr sz="1250">
+                <a:solidFill>
+                  <a:srgbClr val="333333"/>
+                </a:solidFill>
+              </a:defRPr>
+            </a:pPr>
+            <a:r>
+              <a:t>➔ Triển khai Redis Cache phân tán đáp ứng hàng triệu người dùng.</a:t>
+            </a:r>
+          </a:p>
+          <a:p>
+            <a:pPr>
+              <a:spcAft>
+                <a:spcPts val="1000"/>
+              </a:spcAft>
+              <a:defRPr sz="1250">
+                <a:solidFill>
+                  <a:srgbClr val="333333"/>
+                </a:solidFill>
+              </a:defRPr>
+            </a:pPr>
+            <a:r>
+              <a:t>➔ Kiểm thử giao diện chéo trình duyệt qua Selenium Grid.</a:t>
             </a:r>
           </a:p>
         </p:txBody>
@@ -6335,7 +7238,7 @@
 </file>
 
 <file path=ppt/slides/slide2.xml><?xml version="1.0" encoding="utf-8"?>
-<p:sld xmlns:a="http://schemas.openxmlformats.org/drawingml/2006/main" xmlns:p="http://schemas.openxmlformats.org/presentationml/2006/main" xmlns:r="http://schemas.openxmlformats.org/officeDocument/2006/relationships">
+<p:sld xmlns:a="http://schemas.openxmlformats.org/drawingml/2006/main" xmlns:r="http://schemas.openxmlformats.org/officeDocument/2006/relationships" xmlns:p="http://schemas.openxmlformats.org/presentationml/2006/main">
   <p:cSld>
     <p:spTree>
       <p:nvGrpSpPr>
@@ -6343,7 +7246,14 @@
         <p:cNvGrpSpPr/>
         <p:nvPr/>
       </p:nvGrpSpPr>
-      <p:grpSpPr/>
+      <p:grpSpPr>
+        <a:xfrm>
+          <a:off x="0" y="0"/>
+          <a:ext cx="0" cy="0"/>
+          <a:chOff x="0" y="0"/>
+          <a:chExt cx="0" cy="0"/>
+        </a:xfrm>
+      </p:grpSpPr>
       <p:sp>
         <p:nvSpPr>
           <p:cNvPr id="2" name="TextBox 1"/>
@@ -6353,7 +7263,7 @@
         <p:spPr>
           <a:xfrm>
             <a:off x="731520" y="365760"/>
-            <a:ext cx="10698480" cy="1005840"/>
+            <a:ext cx="9144000" cy="777240"/>
           </a:xfrm>
           <a:prstGeom prst="rect">
             <a:avLst/>
@@ -6367,22 +7277,7 @@
           <a:lstStyle/>
           <a:p>
             <a:pPr>
-              <a:defRPr sz="1100" b="1">
-                <a:solidFill>
-                  <a:srgbClr val="00838F"/>
-                </a:solidFill>
-              </a:defRPr>
-            </a:pPr>
-            <a:r>
-              <a:t>TRƯỜNG ĐẠI HỌC PHENIKAA • KHOA CÔNG NGHỆ THÔNG TIN</a:t>
-            </a:r>
-          </a:p>
-          <a:p>
-            <a:pPr>
-              <a:spcBef>
-                <a:spcPts val="400"/>
-              </a:spcBef>
-              <a:defRPr sz="2400" b="1">
+              <a:defRPr sz="2300" b="1">
                 <a:solidFill>
                   <a:srgbClr val="1F497D"/>
                 </a:solidFill>
@@ -6402,8 +7297,8 @@
         </p:nvSpPr>
         <p:spPr>
           <a:xfrm>
-            <a:off x="731520" y="1371600"/>
-            <a:ext cx="10728655" cy="36576"/>
+            <a:off x="731520" y="1234440"/>
+            <a:ext cx="10728655" cy="32004"/>
           </a:xfrm>
           <a:prstGeom prst="rect">
             <a:avLst/>
@@ -6436,18 +7331,78 @@
           <a:lstStyle/>
           <a:p>
             <a:pPr algn="ctr"/>
-          </a:p>
-        </p:txBody>
-      </p:sp>
-      <p:sp>
-        <p:nvSpPr>
-          <p:cNvPr id="4" name="Rounded Rectangle 3"/>
+            <a:endParaRPr/>
+          </a:p>
+        </p:txBody>
+      </p:sp>
+      <p:pic>
+        <p:nvPicPr>
+          <p:cNvPr id="4" name="Picture 3" descr="phenikaa_logo.png"/>
+          <p:cNvPicPr>
+            <a:picLocks noChangeAspect="1"/>
+          </p:cNvPicPr>
+          <p:nvPr/>
+        </p:nvPicPr>
+        <p:blipFill>
+          <a:blip r:embed="rId2"/>
+          <a:stretch>
+            <a:fillRect/>
+          </a:stretch>
+        </p:blipFill>
+        <p:spPr>
+          <a:xfrm>
+            <a:off x="10332720" y="228600"/>
+            <a:ext cx="1371600" cy="834887"/>
+          </a:xfrm>
+          <a:prstGeom prst="rect">
+            <a:avLst/>
+          </a:prstGeom>
+        </p:spPr>
+      </p:pic>
+      <p:sp>
+        <p:nvSpPr>
+          <p:cNvPr id="5" name="TextBox 4"/>
+          <p:cNvSpPr txBox="1"/>
+          <p:nvPr/>
+        </p:nvSpPr>
+        <p:spPr>
+          <a:xfrm>
+            <a:off x="10058400" y="6446520"/>
+            <a:ext cx="1645920" cy="320040"/>
+          </a:xfrm>
+          <a:prstGeom prst="rect">
+            <a:avLst/>
+          </a:prstGeom>
+          <a:noFill/>
+        </p:spPr>
+        <p:txBody>
+          <a:bodyPr wrap="none" lIns="0" tIns="0" rIns="0" bIns="0">
+            <a:spAutoFit/>
+          </a:bodyPr>
+          <a:lstStyle/>
+          <a:p>
+            <a:pPr algn="r">
+              <a:defRPr sz="1100" b="1">
+                <a:solidFill>
+                  <a:srgbClr val="78909C"/>
+                </a:solidFill>
+              </a:defRPr>
+            </a:pPr>
+            <a:r>
+              <a:t>02 / 18</a:t>
+            </a:r>
+          </a:p>
+        </p:txBody>
+      </p:sp>
+      <p:sp>
+        <p:nvSpPr>
+          <p:cNvPr id="6" name="Rounded Rectangle 5"/>
           <p:cNvSpPr/>
           <p:nvPr/>
         </p:nvSpPr>
         <p:spPr>
           <a:xfrm>
-            <a:off x="731520" y="1737360"/>
+            <a:off x="731520" y="1645920"/>
             <a:ext cx="3383280" cy="4572000"/>
           </a:xfrm>
           <a:prstGeom prst="roundRect">
@@ -6481,18 +7436,19 @@
           <a:lstStyle/>
           <a:p>
             <a:pPr algn="ctr"/>
-          </a:p>
-        </p:txBody>
-      </p:sp>
-      <p:sp>
-        <p:nvSpPr>
-          <p:cNvPr id="5" name="TextBox 4"/>
+            <a:endParaRPr/>
+          </a:p>
+        </p:txBody>
+      </p:sp>
+      <p:sp>
+        <p:nvSpPr>
+          <p:cNvPr id="7" name="TextBox 6"/>
           <p:cNvSpPr txBox="1"/>
           <p:nvPr/>
         </p:nvSpPr>
         <p:spPr>
           <a:xfrm>
-            <a:off x="914400" y="1920240"/>
+            <a:off x="914400" y="1828800"/>
             <a:ext cx="3017520" cy="4114800"/>
           </a:xfrm>
           <a:prstGeom prst="rect">
@@ -6525,7 +7481,7 @@
               <a:spcAft>
                 <a:spcPts val="1000"/>
               </a:spcAft>
-              <a:defRPr sz="1250">
+              <a:defRPr sz="1200">
                 <a:solidFill>
                   <a:srgbClr val="333333"/>
                 </a:solidFill>
@@ -6540,7 +7496,7 @@
               <a:spcAft>
                 <a:spcPts val="1000"/>
               </a:spcAft>
-              <a:defRPr sz="1250">
+              <a:defRPr sz="1200">
                 <a:solidFill>
                   <a:srgbClr val="333333"/>
                 </a:solidFill>
@@ -6555,7 +7511,7 @@
               <a:spcAft>
                 <a:spcPts val="1000"/>
               </a:spcAft>
-              <a:defRPr sz="1250">
+              <a:defRPr sz="1200">
                 <a:solidFill>
                   <a:srgbClr val="333333"/>
                 </a:solidFill>
@@ -6570,7 +7526,7 @@
               <a:spcAft>
                 <a:spcPts val="1000"/>
               </a:spcAft>
-              <a:defRPr sz="1250">
+              <a:defRPr sz="1200">
                 <a:solidFill>
                   <a:srgbClr val="333333"/>
                 </a:solidFill>
@@ -6584,13 +7540,13 @@
       </p:sp>
       <p:sp>
         <p:nvSpPr>
-          <p:cNvPr id="6" name="Rounded Rectangle 5"/>
+          <p:cNvPr id="8" name="Rounded Rectangle 7"/>
           <p:cNvSpPr/>
           <p:nvPr/>
         </p:nvSpPr>
         <p:spPr>
           <a:xfrm>
-            <a:off x="4389120" y="1737360"/>
+            <a:off x="4389120" y="1645920"/>
             <a:ext cx="3383280" cy="4572000"/>
           </a:xfrm>
           <a:prstGeom prst="roundRect">
@@ -6624,18 +7580,19 @@
           <a:lstStyle/>
           <a:p>
             <a:pPr algn="ctr"/>
-          </a:p>
-        </p:txBody>
-      </p:sp>
-      <p:sp>
-        <p:nvSpPr>
-          <p:cNvPr id="7" name="TextBox 6"/>
+            <a:endParaRPr/>
+          </a:p>
+        </p:txBody>
+      </p:sp>
+      <p:sp>
+        <p:nvSpPr>
+          <p:cNvPr id="9" name="TextBox 8"/>
           <p:cNvSpPr txBox="1"/>
           <p:nvPr/>
         </p:nvSpPr>
         <p:spPr>
           <a:xfrm>
-            <a:off x="4572000" y="1920240"/>
+            <a:off x="4572000" y="1828800"/>
             <a:ext cx="3017520" cy="4114800"/>
           </a:xfrm>
           <a:prstGeom prst="rect">
@@ -6668,7 +7625,7 @@
               <a:spcAft>
                 <a:spcPts val="1000"/>
               </a:spcAft>
-              <a:defRPr sz="1250">
+              <a:defRPr sz="1200">
                 <a:solidFill>
                   <a:srgbClr val="333333"/>
                 </a:solidFill>
@@ -6683,7 +7640,7 @@
               <a:spcAft>
                 <a:spcPts val="1000"/>
               </a:spcAft>
-              <a:defRPr sz="1250">
+              <a:defRPr sz="1200">
                 <a:solidFill>
                   <a:srgbClr val="333333"/>
                 </a:solidFill>
@@ -6698,7 +7655,7 @@
               <a:spcAft>
                 <a:spcPts val="1000"/>
               </a:spcAft>
-              <a:defRPr sz="1250">
+              <a:defRPr sz="1200">
                 <a:solidFill>
                   <a:srgbClr val="333333"/>
                 </a:solidFill>
@@ -6713,7 +7670,7 @@
               <a:spcAft>
                 <a:spcPts val="1000"/>
               </a:spcAft>
-              <a:defRPr sz="1250">
+              <a:defRPr sz="1200">
                 <a:solidFill>
                   <a:srgbClr val="333333"/>
                 </a:solidFill>
@@ -6727,13 +7684,13 @@
       </p:sp>
       <p:sp>
         <p:nvSpPr>
-          <p:cNvPr id="8" name="Rounded Rectangle 7"/>
+          <p:cNvPr id="10" name="Rounded Rectangle 9"/>
           <p:cNvSpPr/>
           <p:nvPr/>
         </p:nvSpPr>
         <p:spPr>
           <a:xfrm>
-            <a:off x="8046720" y="1737360"/>
+            <a:off x="8046720" y="1645920"/>
             <a:ext cx="3383280" cy="4572000"/>
           </a:xfrm>
           <a:prstGeom prst="roundRect">
@@ -6767,18 +7724,19 @@
           <a:lstStyle/>
           <a:p>
             <a:pPr algn="ctr"/>
-          </a:p>
-        </p:txBody>
-      </p:sp>
-      <p:sp>
-        <p:nvSpPr>
-          <p:cNvPr id="9" name="TextBox 8"/>
+            <a:endParaRPr/>
+          </a:p>
+        </p:txBody>
+      </p:sp>
+      <p:sp>
+        <p:nvSpPr>
+          <p:cNvPr id="11" name="TextBox 10"/>
           <p:cNvSpPr txBox="1"/>
           <p:nvPr/>
         </p:nvSpPr>
         <p:spPr>
           <a:xfrm>
-            <a:off x="8229600" y="1920240"/>
+            <a:off x="8229600" y="1828800"/>
             <a:ext cx="3017520" cy="4114800"/>
           </a:xfrm>
           <a:prstGeom prst="rect">
@@ -6811,7 +7769,7 @@
               <a:spcAft>
                 <a:spcPts val="1000"/>
               </a:spcAft>
-              <a:defRPr sz="1250">
+              <a:defRPr sz="1200">
                 <a:solidFill>
                   <a:srgbClr val="333333"/>
                 </a:solidFill>
@@ -6826,7 +7784,7 @@
               <a:spcAft>
                 <a:spcPts val="1000"/>
               </a:spcAft>
-              <a:defRPr sz="1250">
+              <a:defRPr sz="1200">
                 <a:solidFill>
                   <a:srgbClr val="333333"/>
                 </a:solidFill>
@@ -6841,7 +7799,7 @@
               <a:spcAft>
                 <a:spcPts val="1000"/>
               </a:spcAft>
-              <a:defRPr sz="1250">
+              <a:defRPr sz="1200">
                 <a:solidFill>
                   <a:srgbClr val="333333"/>
                 </a:solidFill>
@@ -6856,7 +7814,7 @@
               <a:spcAft>
                 <a:spcPts val="1000"/>
               </a:spcAft>
-              <a:defRPr sz="1250">
+              <a:defRPr sz="1200">
                 <a:solidFill>
                   <a:srgbClr val="333333"/>
                 </a:solidFill>
@@ -6877,7 +7835,7 @@
 </file>
 
 <file path=ppt/slides/slide3.xml><?xml version="1.0" encoding="utf-8"?>
-<p:sld xmlns:a="http://schemas.openxmlformats.org/drawingml/2006/main" xmlns:p="http://schemas.openxmlformats.org/presentationml/2006/main" xmlns:r="http://schemas.openxmlformats.org/officeDocument/2006/relationships">
+<p:sld xmlns:a="http://schemas.openxmlformats.org/drawingml/2006/main" xmlns:r="http://schemas.openxmlformats.org/officeDocument/2006/relationships" xmlns:p="http://schemas.openxmlformats.org/presentationml/2006/main">
   <p:cSld>
     <p:spTree>
       <p:nvGrpSpPr>
@@ -6885,7 +7843,14 @@
         <p:cNvGrpSpPr/>
         <p:nvPr/>
       </p:nvGrpSpPr>
-      <p:grpSpPr/>
+      <p:grpSpPr>
+        <a:xfrm>
+          <a:off x="0" y="0"/>
+          <a:ext cx="0" cy="0"/>
+          <a:chOff x="0" y="0"/>
+          <a:chExt cx="0" cy="0"/>
+        </a:xfrm>
+      </p:grpSpPr>
       <p:sp>
         <p:nvSpPr>
           <p:cNvPr id="2" name="TextBox 1"/>
@@ -6895,7 +7860,7 @@
         <p:spPr>
           <a:xfrm>
             <a:off x="731520" y="365760"/>
-            <a:ext cx="10698480" cy="1005840"/>
+            <a:ext cx="9144000" cy="777240"/>
           </a:xfrm>
           <a:prstGeom prst="rect">
             <a:avLst/>
@@ -6909,22 +7874,7 @@
           <a:lstStyle/>
           <a:p>
             <a:pPr>
-              <a:defRPr sz="1100" b="1">
-                <a:solidFill>
-                  <a:srgbClr val="00838F"/>
-                </a:solidFill>
-              </a:defRPr>
-            </a:pPr>
-            <a:r>
-              <a:t>TRƯỜNG ĐẠI HỌC PHENIKAA • KHOA CÔNG NGHỆ THÔNG TIN</a:t>
-            </a:r>
-          </a:p>
-          <a:p>
-            <a:pPr>
-              <a:spcBef>
-                <a:spcPts val="400"/>
-              </a:spcBef>
-              <a:defRPr sz="2400" b="1">
+              <a:defRPr sz="2300" b="1">
                 <a:solidFill>
                   <a:srgbClr val="1F497D"/>
                 </a:solidFill>
@@ -6944,8 +7894,8 @@
         </p:nvSpPr>
         <p:spPr>
           <a:xfrm>
-            <a:off x="731520" y="1371600"/>
-            <a:ext cx="10728655" cy="36576"/>
+            <a:off x="731520" y="1234440"/>
+            <a:ext cx="10728655" cy="32004"/>
           </a:xfrm>
           <a:prstGeom prst="rect">
             <a:avLst/>
@@ -6978,18 +7928,78 @@
           <a:lstStyle/>
           <a:p>
             <a:pPr algn="ctr"/>
-          </a:p>
-        </p:txBody>
-      </p:sp>
-      <p:sp>
-        <p:nvSpPr>
-          <p:cNvPr id="4" name="Rounded Rectangle 3"/>
+            <a:endParaRPr/>
+          </a:p>
+        </p:txBody>
+      </p:sp>
+      <p:pic>
+        <p:nvPicPr>
+          <p:cNvPr id="4" name="Picture 3" descr="phenikaa_logo.png"/>
+          <p:cNvPicPr>
+            <a:picLocks noChangeAspect="1"/>
+          </p:cNvPicPr>
+          <p:nvPr/>
+        </p:nvPicPr>
+        <p:blipFill>
+          <a:blip r:embed="rId2"/>
+          <a:stretch>
+            <a:fillRect/>
+          </a:stretch>
+        </p:blipFill>
+        <p:spPr>
+          <a:xfrm>
+            <a:off x="10332720" y="228600"/>
+            <a:ext cx="1371600" cy="834887"/>
+          </a:xfrm>
+          <a:prstGeom prst="rect">
+            <a:avLst/>
+          </a:prstGeom>
+        </p:spPr>
+      </p:pic>
+      <p:sp>
+        <p:nvSpPr>
+          <p:cNvPr id="5" name="TextBox 4"/>
+          <p:cNvSpPr txBox="1"/>
+          <p:nvPr/>
+        </p:nvSpPr>
+        <p:spPr>
+          <a:xfrm>
+            <a:off x="10058400" y="6446520"/>
+            <a:ext cx="1645920" cy="320040"/>
+          </a:xfrm>
+          <a:prstGeom prst="rect">
+            <a:avLst/>
+          </a:prstGeom>
+          <a:noFill/>
+        </p:spPr>
+        <p:txBody>
+          <a:bodyPr wrap="none" lIns="0" tIns="0" rIns="0" bIns="0">
+            <a:spAutoFit/>
+          </a:bodyPr>
+          <a:lstStyle/>
+          <a:p>
+            <a:pPr algn="r">
+              <a:defRPr sz="1100" b="1">
+                <a:solidFill>
+                  <a:srgbClr val="78909C"/>
+                </a:solidFill>
+              </a:defRPr>
+            </a:pPr>
+            <a:r>
+              <a:t>03 / 18</a:t>
+            </a:r>
+          </a:p>
+        </p:txBody>
+      </p:sp>
+      <p:sp>
+        <p:nvSpPr>
+          <p:cNvPr id="6" name="Rounded Rectangle 5"/>
           <p:cNvSpPr/>
           <p:nvPr/>
         </p:nvSpPr>
         <p:spPr>
           <a:xfrm>
-            <a:off x="731520" y="1645920"/>
+            <a:off x="731520" y="1600200"/>
             <a:ext cx="10728655" cy="960120"/>
           </a:xfrm>
           <a:prstGeom prst="roundRect">
@@ -7023,18 +8033,19 @@
           <a:lstStyle/>
           <a:p>
             <a:pPr algn="ctr"/>
-          </a:p>
-        </p:txBody>
-      </p:sp>
-      <p:sp>
-        <p:nvSpPr>
-          <p:cNvPr id="5" name="TextBox 4"/>
+            <a:endParaRPr/>
+          </a:p>
+        </p:txBody>
+      </p:sp>
+      <p:sp>
+        <p:nvSpPr>
+          <p:cNvPr id="7" name="TextBox 6"/>
           <p:cNvSpPr txBox="1"/>
           <p:nvPr/>
         </p:nvSpPr>
         <p:spPr>
           <a:xfrm>
-            <a:off x="914400" y="1755648"/>
+            <a:off x="914400" y="1709928"/>
             <a:ext cx="10332720" cy="731520"/>
           </a:xfrm>
           <a:prstGeom prst="rect">
@@ -7078,13 +8089,13 @@
       </p:sp>
       <p:sp>
         <p:nvSpPr>
-          <p:cNvPr id="6" name="Rounded Rectangle 5"/>
+          <p:cNvPr id="8" name="Rounded Rectangle 7"/>
           <p:cNvSpPr/>
           <p:nvPr/>
         </p:nvSpPr>
         <p:spPr>
           <a:xfrm>
-            <a:off x="731520" y="2834640"/>
+            <a:off x="731520" y="2788920"/>
             <a:ext cx="10728655" cy="960120"/>
           </a:xfrm>
           <a:prstGeom prst="roundRect">
@@ -7118,18 +8129,19 @@
           <a:lstStyle/>
           <a:p>
             <a:pPr algn="ctr"/>
-          </a:p>
-        </p:txBody>
-      </p:sp>
-      <p:sp>
-        <p:nvSpPr>
-          <p:cNvPr id="7" name="TextBox 6"/>
+            <a:endParaRPr/>
+          </a:p>
+        </p:txBody>
+      </p:sp>
+      <p:sp>
+        <p:nvSpPr>
+          <p:cNvPr id="9" name="TextBox 8"/>
           <p:cNvSpPr txBox="1"/>
           <p:nvPr/>
         </p:nvSpPr>
         <p:spPr>
           <a:xfrm>
-            <a:off x="914400" y="2944368"/>
+            <a:off x="914400" y="2898648"/>
             <a:ext cx="10332720" cy="731520"/>
           </a:xfrm>
           <a:prstGeom prst="rect">
@@ -7173,13 +8185,13 @@
       </p:sp>
       <p:sp>
         <p:nvSpPr>
-          <p:cNvPr id="8" name="Rounded Rectangle 7"/>
+          <p:cNvPr id="10" name="Rounded Rectangle 9"/>
           <p:cNvSpPr/>
           <p:nvPr/>
         </p:nvSpPr>
         <p:spPr>
           <a:xfrm>
-            <a:off x="731520" y="4023360"/>
+            <a:off x="731520" y="3977639"/>
             <a:ext cx="10728655" cy="960120"/>
           </a:xfrm>
           <a:prstGeom prst="roundRect">
@@ -7213,18 +8225,19 @@
           <a:lstStyle/>
           <a:p>
             <a:pPr algn="ctr"/>
-          </a:p>
-        </p:txBody>
-      </p:sp>
-      <p:sp>
-        <p:nvSpPr>
-          <p:cNvPr id="9" name="TextBox 8"/>
+            <a:endParaRPr/>
+          </a:p>
+        </p:txBody>
+      </p:sp>
+      <p:sp>
+        <p:nvSpPr>
+          <p:cNvPr id="11" name="TextBox 10"/>
           <p:cNvSpPr txBox="1"/>
           <p:nvPr/>
         </p:nvSpPr>
         <p:spPr>
           <a:xfrm>
-            <a:off x="914400" y="4133088"/>
+            <a:off x="914400" y="4087367"/>
             <a:ext cx="10332720" cy="731520"/>
           </a:xfrm>
           <a:prstGeom prst="rect">
@@ -7268,13 +8281,13 @@
       </p:sp>
       <p:sp>
         <p:nvSpPr>
-          <p:cNvPr id="10" name="Rounded Rectangle 9"/>
+          <p:cNvPr id="12" name="Rounded Rectangle 11"/>
           <p:cNvSpPr/>
           <p:nvPr/>
         </p:nvSpPr>
         <p:spPr>
           <a:xfrm>
-            <a:off x="731520" y="5212080"/>
+            <a:off x="731520" y="5166360"/>
             <a:ext cx="10728655" cy="960120"/>
           </a:xfrm>
           <a:prstGeom prst="roundRect">
@@ -7308,18 +8321,19 @@
           <a:lstStyle/>
           <a:p>
             <a:pPr algn="ctr"/>
-          </a:p>
-        </p:txBody>
-      </p:sp>
-      <p:sp>
-        <p:nvSpPr>
-          <p:cNvPr id="11" name="TextBox 10"/>
+            <a:endParaRPr/>
+          </a:p>
+        </p:txBody>
+      </p:sp>
+      <p:sp>
+        <p:nvSpPr>
+          <p:cNvPr id="13" name="TextBox 12"/>
           <p:cNvSpPr txBox="1"/>
           <p:nvPr/>
         </p:nvSpPr>
         <p:spPr>
           <a:xfrm>
-            <a:off x="914400" y="5321808"/>
+            <a:off x="914400" y="5276088"/>
             <a:ext cx="10332720" cy="731520"/>
           </a:xfrm>
           <a:prstGeom prst="rect">
@@ -7370,7 +8384,7 @@
 </file>
 
 <file path=ppt/slides/slide4.xml><?xml version="1.0" encoding="utf-8"?>
-<p:sld xmlns:a="http://schemas.openxmlformats.org/drawingml/2006/main" xmlns:p="http://schemas.openxmlformats.org/presentationml/2006/main" xmlns:r="http://schemas.openxmlformats.org/officeDocument/2006/relationships">
+<p:sld xmlns:a="http://schemas.openxmlformats.org/drawingml/2006/main" xmlns:r="http://schemas.openxmlformats.org/officeDocument/2006/relationships" xmlns:p="http://schemas.openxmlformats.org/presentationml/2006/main">
   <p:cSld>
     <p:spTree>
       <p:nvGrpSpPr>
@@ -7378,7 +8392,14 @@
         <p:cNvGrpSpPr/>
         <p:nvPr/>
       </p:nvGrpSpPr>
-      <p:grpSpPr/>
+      <p:grpSpPr>
+        <a:xfrm>
+          <a:off x="0" y="0"/>
+          <a:ext cx="0" cy="0"/>
+          <a:chOff x="0" y="0"/>
+          <a:chExt cx="0" cy="0"/>
+        </a:xfrm>
+      </p:grpSpPr>
       <p:sp>
         <p:nvSpPr>
           <p:cNvPr id="2" name="TextBox 1"/>
@@ -7388,7 +8409,7 @@
         <p:spPr>
           <a:xfrm>
             <a:off x="731520" y="365760"/>
-            <a:ext cx="10698480" cy="1005840"/>
+            <a:ext cx="9144000" cy="777240"/>
           </a:xfrm>
           <a:prstGeom prst="rect">
             <a:avLst/>
@@ -7402,22 +8423,7 @@
           <a:lstStyle/>
           <a:p>
             <a:pPr>
-              <a:defRPr sz="1100" b="1">
-                <a:solidFill>
-                  <a:srgbClr val="00838F"/>
-                </a:solidFill>
-              </a:defRPr>
-            </a:pPr>
-            <a:r>
-              <a:t>TRƯỜNG ĐẠI HỌC PHENIKAA • KHOA CÔNG NGHỆ THÔNG TIN</a:t>
-            </a:r>
-          </a:p>
-          <a:p>
-            <a:pPr>
-              <a:spcBef>
-                <a:spcPts val="400"/>
-              </a:spcBef>
-              <a:defRPr sz="2400" b="1">
+              <a:defRPr sz="2300" b="1">
                 <a:solidFill>
                   <a:srgbClr val="1F497D"/>
                 </a:solidFill>
@@ -7437,8 +8443,8 @@
         </p:nvSpPr>
         <p:spPr>
           <a:xfrm>
-            <a:off x="731520" y="1371600"/>
-            <a:ext cx="10728655" cy="36576"/>
+            <a:off x="731520" y="1234440"/>
+            <a:ext cx="10728655" cy="32004"/>
           </a:xfrm>
           <a:prstGeom prst="rect">
             <a:avLst/>
@@ -7471,18 +8477,78 @@
           <a:lstStyle/>
           <a:p>
             <a:pPr algn="ctr"/>
-          </a:p>
-        </p:txBody>
-      </p:sp>
-      <p:sp>
-        <p:nvSpPr>
-          <p:cNvPr id="4" name="Rounded Rectangle 3"/>
+            <a:endParaRPr/>
+          </a:p>
+        </p:txBody>
+      </p:sp>
+      <p:pic>
+        <p:nvPicPr>
+          <p:cNvPr id="4" name="Picture 3" descr="phenikaa_logo.png"/>
+          <p:cNvPicPr>
+            <a:picLocks noChangeAspect="1"/>
+          </p:cNvPicPr>
+          <p:nvPr/>
+        </p:nvPicPr>
+        <p:blipFill>
+          <a:blip r:embed="rId2"/>
+          <a:stretch>
+            <a:fillRect/>
+          </a:stretch>
+        </p:blipFill>
+        <p:spPr>
+          <a:xfrm>
+            <a:off x="10332720" y="228600"/>
+            <a:ext cx="1371600" cy="834887"/>
+          </a:xfrm>
+          <a:prstGeom prst="rect">
+            <a:avLst/>
+          </a:prstGeom>
+        </p:spPr>
+      </p:pic>
+      <p:sp>
+        <p:nvSpPr>
+          <p:cNvPr id="5" name="TextBox 4"/>
+          <p:cNvSpPr txBox="1"/>
+          <p:nvPr/>
+        </p:nvSpPr>
+        <p:spPr>
+          <a:xfrm>
+            <a:off x="10058400" y="6446520"/>
+            <a:ext cx="1645920" cy="320040"/>
+          </a:xfrm>
+          <a:prstGeom prst="rect">
+            <a:avLst/>
+          </a:prstGeom>
+          <a:noFill/>
+        </p:spPr>
+        <p:txBody>
+          <a:bodyPr wrap="none" lIns="0" tIns="0" rIns="0" bIns="0">
+            <a:spAutoFit/>
+          </a:bodyPr>
+          <a:lstStyle/>
+          <a:p>
+            <a:pPr algn="r">
+              <a:defRPr sz="1100" b="1">
+                <a:solidFill>
+                  <a:srgbClr val="78909C"/>
+                </a:solidFill>
+              </a:defRPr>
+            </a:pPr>
+            <a:r>
+              <a:t>04 / 18</a:t>
+            </a:r>
+          </a:p>
+        </p:txBody>
+      </p:sp>
+      <p:sp>
+        <p:nvSpPr>
+          <p:cNvPr id="6" name="Rounded Rectangle 5"/>
           <p:cNvSpPr/>
           <p:nvPr/>
         </p:nvSpPr>
         <p:spPr>
           <a:xfrm>
-            <a:off x="731520" y="1737360"/>
+            <a:off x="731520" y="1645920"/>
             <a:ext cx="5257800" cy="1005840"/>
           </a:xfrm>
           <a:prstGeom prst="roundRect">
@@ -7516,18 +8582,19 @@
           <a:lstStyle/>
           <a:p>
             <a:pPr algn="ctr"/>
-          </a:p>
-        </p:txBody>
-      </p:sp>
-      <p:sp>
-        <p:nvSpPr>
-          <p:cNvPr id="5" name="TextBox 4"/>
+            <a:endParaRPr/>
+          </a:p>
+        </p:txBody>
+      </p:sp>
+      <p:sp>
+        <p:nvSpPr>
+          <p:cNvPr id="7" name="TextBox 6"/>
           <p:cNvSpPr txBox="1"/>
           <p:nvPr/>
         </p:nvSpPr>
         <p:spPr>
           <a:xfrm>
-            <a:off x="868680" y="1810512"/>
+            <a:off x="868680" y="1719072"/>
             <a:ext cx="4937760" cy="868680"/>
           </a:xfrm>
           <a:prstGeom prst="rect">
@@ -7571,13 +8638,13 @@
       </p:sp>
       <p:sp>
         <p:nvSpPr>
-          <p:cNvPr id="6" name="Rounded Rectangle 5"/>
+          <p:cNvPr id="8" name="Rounded Rectangle 7"/>
           <p:cNvSpPr/>
           <p:nvPr/>
         </p:nvSpPr>
         <p:spPr>
           <a:xfrm>
-            <a:off x="6172200" y="1737360"/>
+            <a:off x="6172200" y="1645920"/>
             <a:ext cx="5257800" cy="1005840"/>
           </a:xfrm>
           <a:prstGeom prst="roundRect">
@@ -7611,18 +8678,19 @@
           <a:lstStyle/>
           <a:p>
             <a:pPr algn="ctr"/>
-          </a:p>
-        </p:txBody>
-      </p:sp>
-      <p:sp>
-        <p:nvSpPr>
-          <p:cNvPr id="7" name="TextBox 6"/>
+            <a:endParaRPr/>
+          </a:p>
+        </p:txBody>
+      </p:sp>
+      <p:sp>
+        <p:nvSpPr>
+          <p:cNvPr id="9" name="TextBox 8"/>
           <p:cNvSpPr txBox="1"/>
           <p:nvPr/>
         </p:nvSpPr>
         <p:spPr>
           <a:xfrm>
-            <a:off x="6309360" y="1810512"/>
+            <a:off x="6309360" y="1719072"/>
             <a:ext cx="4937760" cy="868680"/>
           </a:xfrm>
           <a:prstGeom prst="rect">
@@ -7666,13 +8734,13 @@
       </p:sp>
       <p:sp>
         <p:nvSpPr>
-          <p:cNvPr id="8" name="Rounded Rectangle 7"/>
+          <p:cNvPr id="10" name="Rounded Rectangle 9"/>
           <p:cNvSpPr/>
           <p:nvPr/>
         </p:nvSpPr>
         <p:spPr>
           <a:xfrm>
-            <a:off x="731520" y="2880360"/>
+            <a:off x="731520" y="2788920"/>
             <a:ext cx="5257800" cy="1005840"/>
           </a:xfrm>
           <a:prstGeom prst="roundRect">
@@ -7706,18 +8774,19 @@
           <a:lstStyle/>
           <a:p>
             <a:pPr algn="ctr"/>
-          </a:p>
-        </p:txBody>
-      </p:sp>
-      <p:sp>
-        <p:nvSpPr>
-          <p:cNvPr id="9" name="TextBox 8"/>
+            <a:endParaRPr/>
+          </a:p>
+        </p:txBody>
+      </p:sp>
+      <p:sp>
+        <p:nvSpPr>
+          <p:cNvPr id="11" name="TextBox 10"/>
           <p:cNvSpPr txBox="1"/>
           <p:nvPr/>
         </p:nvSpPr>
         <p:spPr>
           <a:xfrm>
-            <a:off x="868680" y="2953512"/>
+            <a:off x="868680" y="2862072"/>
             <a:ext cx="4937760" cy="868680"/>
           </a:xfrm>
           <a:prstGeom prst="rect">
@@ -7761,13 +8830,13 @@
       </p:sp>
       <p:sp>
         <p:nvSpPr>
-          <p:cNvPr id="10" name="Rounded Rectangle 9"/>
+          <p:cNvPr id="12" name="Rounded Rectangle 11"/>
           <p:cNvSpPr/>
           <p:nvPr/>
         </p:nvSpPr>
         <p:spPr>
           <a:xfrm>
-            <a:off x="6172200" y="2880360"/>
+            <a:off x="6172200" y="2788920"/>
             <a:ext cx="5257800" cy="1005840"/>
           </a:xfrm>
           <a:prstGeom prst="roundRect">
@@ -7801,18 +8870,19 @@
           <a:lstStyle/>
           <a:p>
             <a:pPr algn="ctr"/>
-          </a:p>
-        </p:txBody>
-      </p:sp>
-      <p:sp>
-        <p:nvSpPr>
-          <p:cNvPr id="11" name="TextBox 10"/>
+            <a:endParaRPr/>
+          </a:p>
+        </p:txBody>
+      </p:sp>
+      <p:sp>
+        <p:nvSpPr>
+          <p:cNvPr id="13" name="TextBox 12"/>
           <p:cNvSpPr txBox="1"/>
           <p:nvPr/>
         </p:nvSpPr>
         <p:spPr>
           <a:xfrm>
-            <a:off x="6309360" y="2953512"/>
+            <a:off x="6309360" y="2862072"/>
             <a:ext cx="4937760" cy="868680"/>
           </a:xfrm>
           <a:prstGeom prst="rect">
@@ -7856,13 +8926,13 @@
       </p:sp>
       <p:sp>
         <p:nvSpPr>
-          <p:cNvPr id="12" name="Rounded Rectangle 11"/>
+          <p:cNvPr id="14" name="Rounded Rectangle 13"/>
           <p:cNvSpPr/>
           <p:nvPr/>
         </p:nvSpPr>
         <p:spPr>
           <a:xfrm>
-            <a:off x="731520" y="4023360"/>
+            <a:off x="731520" y="3931920"/>
             <a:ext cx="5257800" cy="1005840"/>
           </a:xfrm>
           <a:prstGeom prst="roundRect">
@@ -7896,18 +8966,19 @@
           <a:lstStyle/>
           <a:p>
             <a:pPr algn="ctr"/>
-          </a:p>
-        </p:txBody>
-      </p:sp>
-      <p:sp>
-        <p:nvSpPr>
-          <p:cNvPr id="13" name="TextBox 12"/>
+            <a:endParaRPr/>
+          </a:p>
+        </p:txBody>
+      </p:sp>
+      <p:sp>
+        <p:nvSpPr>
+          <p:cNvPr id="15" name="TextBox 14"/>
           <p:cNvSpPr txBox="1"/>
           <p:nvPr/>
         </p:nvSpPr>
         <p:spPr>
           <a:xfrm>
-            <a:off x="868680" y="4096512"/>
+            <a:off x="868680" y="4005072"/>
             <a:ext cx="4937760" cy="868680"/>
           </a:xfrm>
           <a:prstGeom prst="rect">
@@ -7951,13 +9022,13 @@
       </p:sp>
       <p:sp>
         <p:nvSpPr>
-          <p:cNvPr id="14" name="Rounded Rectangle 13"/>
+          <p:cNvPr id="16" name="Rounded Rectangle 15"/>
           <p:cNvSpPr/>
           <p:nvPr/>
         </p:nvSpPr>
         <p:spPr>
           <a:xfrm>
-            <a:off x="6172200" y="4023360"/>
+            <a:off x="6172200" y="3931920"/>
             <a:ext cx="5257800" cy="1005840"/>
           </a:xfrm>
           <a:prstGeom prst="roundRect">
@@ -7991,18 +9062,19 @@
           <a:lstStyle/>
           <a:p>
             <a:pPr algn="ctr"/>
-          </a:p>
-        </p:txBody>
-      </p:sp>
-      <p:sp>
-        <p:nvSpPr>
-          <p:cNvPr id="15" name="TextBox 14"/>
+            <a:endParaRPr/>
+          </a:p>
+        </p:txBody>
+      </p:sp>
+      <p:sp>
+        <p:nvSpPr>
+          <p:cNvPr id="17" name="TextBox 16"/>
           <p:cNvSpPr txBox="1"/>
           <p:nvPr/>
         </p:nvSpPr>
         <p:spPr>
           <a:xfrm>
-            <a:off x="6309360" y="4096512"/>
+            <a:off x="6309360" y="4005072"/>
             <a:ext cx="4937760" cy="868680"/>
           </a:xfrm>
           <a:prstGeom prst="rect">
@@ -8046,13 +9118,13 @@
       </p:sp>
       <p:sp>
         <p:nvSpPr>
-          <p:cNvPr id="16" name="Rounded Rectangle 15"/>
+          <p:cNvPr id="18" name="Rounded Rectangle 17"/>
           <p:cNvSpPr/>
           <p:nvPr/>
         </p:nvSpPr>
         <p:spPr>
           <a:xfrm>
-            <a:off x="731520" y="5166360"/>
+            <a:off x="731520" y="5074920"/>
             <a:ext cx="5257800" cy="1005840"/>
           </a:xfrm>
           <a:prstGeom prst="roundRect">
@@ -8086,18 +9158,19 @@
           <a:lstStyle/>
           <a:p>
             <a:pPr algn="ctr"/>
-          </a:p>
-        </p:txBody>
-      </p:sp>
-      <p:sp>
-        <p:nvSpPr>
-          <p:cNvPr id="17" name="TextBox 16"/>
+            <a:endParaRPr/>
+          </a:p>
+        </p:txBody>
+      </p:sp>
+      <p:sp>
+        <p:nvSpPr>
+          <p:cNvPr id="19" name="TextBox 18"/>
           <p:cNvSpPr txBox="1"/>
           <p:nvPr/>
         </p:nvSpPr>
         <p:spPr>
           <a:xfrm>
-            <a:off x="868680" y="5239512"/>
+            <a:off x="868680" y="5148072"/>
             <a:ext cx="4937760" cy="868680"/>
           </a:xfrm>
           <a:prstGeom prst="rect">
@@ -8141,13 +9214,13 @@
       </p:sp>
       <p:sp>
         <p:nvSpPr>
-          <p:cNvPr id="18" name="Rounded Rectangle 17"/>
+          <p:cNvPr id="20" name="Rounded Rectangle 19"/>
           <p:cNvSpPr/>
           <p:nvPr/>
         </p:nvSpPr>
         <p:spPr>
           <a:xfrm>
-            <a:off x="6172200" y="5166360"/>
+            <a:off x="6172200" y="5074920"/>
             <a:ext cx="5257800" cy="1005840"/>
           </a:xfrm>
           <a:prstGeom prst="roundRect">
@@ -8181,18 +9254,19 @@
           <a:lstStyle/>
           <a:p>
             <a:pPr algn="ctr"/>
-          </a:p>
-        </p:txBody>
-      </p:sp>
-      <p:sp>
-        <p:nvSpPr>
-          <p:cNvPr id="19" name="TextBox 18"/>
+            <a:endParaRPr/>
+          </a:p>
+        </p:txBody>
+      </p:sp>
+      <p:sp>
+        <p:nvSpPr>
+          <p:cNvPr id="21" name="TextBox 20"/>
           <p:cNvSpPr txBox="1"/>
           <p:nvPr/>
         </p:nvSpPr>
         <p:spPr>
           <a:xfrm>
-            <a:off x="6309360" y="5239512"/>
+            <a:off x="6309360" y="5148072"/>
             <a:ext cx="4937760" cy="868680"/>
           </a:xfrm>
           <a:prstGeom prst="rect">
@@ -8243,7 +9317,7 @@
 </file>
 
 <file path=ppt/slides/slide5.xml><?xml version="1.0" encoding="utf-8"?>
-<p:sld xmlns:a="http://schemas.openxmlformats.org/drawingml/2006/main" xmlns:p="http://schemas.openxmlformats.org/presentationml/2006/main" xmlns:r="http://schemas.openxmlformats.org/officeDocument/2006/relationships">
+<p:sld xmlns:a="http://schemas.openxmlformats.org/drawingml/2006/main" xmlns:r="http://schemas.openxmlformats.org/officeDocument/2006/relationships" xmlns:p="http://schemas.openxmlformats.org/presentationml/2006/main">
   <p:cSld>
     <p:spTree>
       <p:nvGrpSpPr>
@@ -8251,7 +9325,14 @@
         <p:cNvGrpSpPr/>
         <p:nvPr/>
       </p:nvGrpSpPr>
-      <p:grpSpPr/>
+      <p:grpSpPr>
+        <a:xfrm>
+          <a:off x="0" y="0"/>
+          <a:ext cx="0" cy="0"/>
+          <a:chOff x="0" y="0"/>
+          <a:chExt cx="0" cy="0"/>
+        </a:xfrm>
+      </p:grpSpPr>
       <p:sp>
         <p:nvSpPr>
           <p:cNvPr id="2" name="TextBox 1"/>
@@ -8261,7 +9342,7 @@
         <p:spPr>
           <a:xfrm>
             <a:off x="731520" y="365760"/>
-            <a:ext cx="10698480" cy="1005840"/>
+            <a:ext cx="9144000" cy="777240"/>
           </a:xfrm>
           <a:prstGeom prst="rect">
             <a:avLst/>
@@ -8275,22 +9356,7 @@
           <a:lstStyle/>
           <a:p>
             <a:pPr>
-              <a:defRPr sz="1100" b="1">
-                <a:solidFill>
-                  <a:srgbClr val="00838F"/>
-                </a:solidFill>
-              </a:defRPr>
-            </a:pPr>
-            <a:r>
-              <a:t>TRƯỜNG ĐẠI HỌC PHENIKAA • KHOA CÔNG NGHỆ THÔNG TIN</a:t>
-            </a:r>
-          </a:p>
-          <a:p>
-            <a:pPr>
-              <a:spcBef>
-                <a:spcPts val="400"/>
-              </a:spcBef>
-              <a:defRPr sz="2400" b="1">
+              <a:defRPr sz="2300" b="1">
                 <a:solidFill>
                   <a:srgbClr val="1F497D"/>
                 </a:solidFill>
@@ -8310,8 +9376,8 @@
         </p:nvSpPr>
         <p:spPr>
           <a:xfrm>
-            <a:off x="731520" y="1371600"/>
-            <a:ext cx="10728655" cy="36576"/>
+            <a:off x="731520" y="1234440"/>
+            <a:ext cx="10728655" cy="32004"/>
           </a:xfrm>
           <a:prstGeom prst="rect">
             <a:avLst/>
@@ -8344,18 +9410,78 @@
           <a:lstStyle/>
           <a:p>
             <a:pPr algn="ctr"/>
-          </a:p>
-        </p:txBody>
-      </p:sp>
-      <p:sp>
-        <p:nvSpPr>
-          <p:cNvPr id="4" name="Rounded Rectangle 3"/>
+            <a:endParaRPr/>
+          </a:p>
+        </p:txBody>
+      </p:sp>
+      <p:pic>
+        <p:nvPicPr>
+          <p:cNvPr id="4" name="Picture 3" descr="phenikaa_logo.png"/>
+          <p:cNvPicPr>
+            <a:picLocks noChangeAspect="1"/>
+          </p:cNvPicPr>
+          <p:nvPr/>
+        </p:nvPicPr>
+        <p:blipFill>
+          <a:blip r:embed="rId2"/>
+          <a:stretch>
+            <a:fillRect/>
+          </a:stretch>
+        </p:blipFill>
+        <p:spPr>
+          <a:xfrm>
+            <a:off x="10332720" y="228600"/>
+            <a:ext cx="1371600" cy="834887"/>
+          </a:xfrm>
+          <a:prstGeom prst="rect">
+            <a:avLst/>
+          </a:prstGeom>
+        </p:spPr>
+      </p:pic>
+      <p:sp>
+        <p:nvSpPr>
+          <p:cNvPr id="5" name="TextBox 4"/>
+          <p:cNvSpPr txBox="1"/>
+          <p:nvPr/>
+        </p:nvSpPr>
+        <p:spPr>
+          <a:xfrm>
+            <a:off x="10058400" y="6446520"/>
+            <a:ext cx="1645920" cy="320040"/>
+          </a:xfrm>
+          <a:prstGeom prst="rect">
+            <a:avLst/>
+          </a:prstGeom>
+          <a:noFill/>
+        </p:spPr>
+        <p:txBody>
+          <a:bodyPr wrap="none" lIns="0" tIns="0" rIns="0" bIns="0">
+            <a:spAutoFit/>
+          </a:bodyPr>
+          <a:lstStyle/>
+          <a:p>
+            <a:pPr algn="r">
+              <a:defRPr sz="1100" b="1">
+                <a:solidFill>
+                  <a:srgbClr val="78909C"/>
+                </a:solidFill>
+              </a:defRPr>
+            </a:pPr>
+            <a:r>
+              <a:t>05 / 18</a:t>
+            </a:r>
+          </a:p>
+        </p:txBody>
+      </p:sp>
+      <p:sp>
+        <p:nvSpPr>
+          <p:cNvPr id="6" name="Rounded Rectangle 5"/>
           <p:cNvSpPr/>
           <p:nvPr/>
         </p:nvSpPr>
         <p:spPr>
           <a:xfrm>
-            <a:off x="731520" y="1737360"/>
+            <a:off x="731520" y="1645920"/>
             <a:ext cx="5212080" cy="4572000"/>
           </a:xfrm>
           <a:prstGeom prst="roundRect">
@@ -8389,18 +9515,19 @@
           <a:lstStyle/>
           <a:p>
             <a:pPr algn="ctr"/>
-          </a:p>
-        </p:txBody>
-      </p:sp>
-      <p:sp>
-        <p:nvSpPr>
-          <p:cNvPr id="5" name="TextBox 4"/>
+            <a:endParaRPr/>
+          </a:p>
+        </p:txBody>
+      </p:sp>
+      <p:sp>
+        <p:nvSpPr>
+          <p:cNvPr id="7" name="TextBox 6"/>
           <p:cNvSpPr txBox="1"/>
           <p:nvPr/>
         </p:nvSpPr>
         <p:spPr>
           <a:xfrm>
-            <a:off x="914400" y="1920240"/>
+            <a:off x="914400" y="1828800"/>
             <a:ext cx="4846320" cy="4114800"/>
           </a:xfrm>
           <a:prstGeom prst="rect">
@@ -8537,13 +9664,13 @@
       </p:sp>
       <p:sp>
         <p:nvSpPr>
-          <p:cNvPr id="6" name="Rounded Rectangle 5"/>
+          <p:cNvPr id="8" name="Rounded Rectangle 7"/>
           <p:cNvSpPr/>
           <p:nvPr/>
         </p:nvSpPr>
         <p:spPr>
           <a:xfrm>
-            <a:off x="6217920" y="1737360"/>
+            <a:off x="6217920" y="1645920"/>
             <a:ext cx="5212080" cy="4572000"/>
           </a:xfrm>
           <a:prstGeom prst="roundRect">
@@ -8577,18 +9704,19 @@
           <a:lstStyle/>
           <a:p>
             <a:pPr algn="ctr"/>
-          </a:p>
-        </p:txBody>
-      </p:sp>
-      <p:sp>
-        <p:nvSpPr>
-          <p:cNvPr id="7" name="TextBox 6"/>
+            <a:endParaRPr/>
+          </a:p>
+        </p:txBody>
+      </p:sp>
+      <p:sp>
+        <p:nvSpPr>
+          <p:cNvPr id="9" name="TextBox 8"/>
           <p:cNvSpPr txBox="1"/>
           <p:nvPr/>
         </p:nvSpPr>
         <p:spPr>
           <a:xfrm>
-            <a:off x="6400800" y="1920240"/>
+            <a:off x="6400800" y="1828800"/>
             <a:ext cx="4846320" cy="4114800"/>
           </a:xfrm>
           <a:prstGeom prst="rect">
@@ -8635,7 +9763,7 @@
               </a:spcAft>
               <a:defRPr sz="1100">
                 <a:solidFill>
-                  <a:srgbClr val="666666"/>
+                  <a:srgbClr val="757575"/>
                 </a:solidFill>
               </a:defRPr>
             </a:pPr>
@@ -8662,7 +9790,7 @@
               </a:spcAft>
               <a:defRPr sz="1100">
                 <a:solidFill>
-                  <a:srgbClr val="666666"/>
+                  <a:srgbClr val="757575"/>
                 </a:solidFill>
               </a:defRPr>
             </a:pPr>
@@ -8689,7 +9817,7 @@
               </a:spcAft>
               <a:defRPr sz="1100">
                 <a:solidFill>
-                  <a:srgbClr val="666666"/>
+                  <a:srgbClr val="757575"/>
                 </a:solidFill>
               </a:defRPr>
             </a:pPr>
@@ -8716,7 +9844,7 @@
               </a:spcAft>
               <a:defRPr sz="1100">
                 <a:solidFill>
-                  <a:srgbClr val="666666"/>
+                  <a:srgbClr val="757575"/>
                 </a:solidFill>
               </a:defRPr>
             </a:pPr>
@@ -8735,7 +9863,7 @@
 </file>
 
 <file path=ppt/slides/slide6.xml><?xml version="1.0" encoding="utf-8"?>
-<p:sld xmlns:a="http://schemas.openxmlformats.org/drawingml/2006/main" xmlns:p="http://schemas.openxmlformats.org/presentationml/2006/main" xmlns:r="http://schemas.openxmlformats.org/officeDocument/2006/relationships">
+<p:sld xmlns:a="http://schemas.openxmlformats.org/drawingml/2006/main" xmlns:r="http://schemas.openxmlformats.org/officeDocument/2006/relationships" xmlns:p="http://schemas.openxmlformats.org/presentationml/2006/main">
   <p:cSld>
     <p:spTree>
       <p:nvGrpSpPr>
@@ -8743,7 +9871,14 @@
         <p:cNvGrpSpPr/>
         <p:nvPr/>
       </p:nvGrpSpPr>
-      <p:grpSpPr/>
+      <p:grpSpPr>
+        <a:xfrm>
+          <a:off x="0" y="0"/>
+          <a:ext cx="0" cy="0"/>
+          <a:chOff x="0" y="0"/>
+          <a:chExt cx="0" cy="0"/>
+        </a:xfrm>
+      </p:grpSpPr>
       <p:sp>
         <p:nvSpPr>
           <p:cNvPr id="2" name="TextBox 1"/>
@@ -8753,7 +9888,7 @@
         <p:spPr>
           <a:xfrm>
             <a:off x="731520" y="365760"/>
-            <a:ext cx="10698480" cy="1005840"/>
+            <a:ext cx="9144000" cy="777240"/>
           </a:xfrm>
           <a:prstGeom prst="rect">
             <a:avLst/>
@@ -8767,22 +9902,7 @@
           <a:lstStyle/>
           <a:p>
             <a:pPr>
-              <a:defRPr sz="1100" b="1">
-                <a:solidFill>
-                  <a:srgbClr val="00838F"/>
-                </a:solidFill>
-              </a:defRPr>
-            </a:pPr>
-            <a:r>
-              <a:t>TRƯỜNG ĐẠI HỌC PHENIKAA • KHOA CÔNG NGHỆ THÔNG TIN</a:t>
-            </a:r>
-          </a:p>
-          <a:p>
-            <a:pPr>
-              <a:spcBef>
-                <a:spcPts val="400"/>
-              </a:spcBef>
-              <a:defRPr sz="2400" b="1">
+              <a:defRPr sz="2300" b="1">
                 <a:solidFill>
                   <a:srgbClr val="1F497D"/>
                 </a:solidFill>
@@ -8802,8 +9922,8 @@
         </p:nvSpPr>
         <p:spPr>
           <a:xfrm>
-            <a:off x="731520" y="1371600"/>
-            <a:ext cx="10728655" cy="36576"/>
+            <a:off x="731520" y="1234440"/>
+            <a:ext cx="10728655" cy="32004"/>
           </a:xfrm>
           <a:prstGeom prst="rect">
             <a:avLst/>
@@ -8836,18 +9956,78 @@
           <a:lstStyle/>
           <a:p>
             <a:pPr algn="ctr"/>
-          </a:p>
-        </p:txBody>
-      </p:sp>
-      <p:sp>
-        <p:nvSpPr>
-          <p:cNvPr id="4" name="Rounded Rectangle 3"/>
+            <a:endParaRPr/>
+          </a:p>
+        </p:txBody>
+      </p:sp>
+      <p:pic>
+        <p:nvPicPr>
+          <p:cNvPr id="4" name="Picture 3" descr="phenikaa_logo.png"/>
+          <p:cNvPicPr>
+            <a:picLocks noChangeAspect="1"/>
+          </p:cNvPicPr>
+          <p:nvPr/>
+        </p:nvPicPr>
+        <p:blipFill>
+          <a:blip r:embed="rId2"/>
+          <a:stretch>
+            <a:fillRect/>
+          </a:stretch>
+        </p:blipFill>
+        <p:spPr>
+          <a:xfrm>
+            <a:off x="10332720" y="228600"/>
+            <a:ext cx="1371600" cy="834887"/>
+          </a:xfrm>
+          <a:prstGeom prst="rect">
+            <a:avLst/>
+          </a:prstGeom>
+        </p:spPr>
+      </p:pic>
+      <p:sp>
+        <p:nvSpPr>
+          <p:cNvPr id="5" name="TextBox 4"/>
+          <p:cNvSpPr txBox="1"/>
+          <p:nvPr/>
+        </p:nvSpPr>
+        <p:spPr>
+          <a:xfrm>
+            <a:off x="10058400" y="6446520"/>
+            <a:ext cx="1645920" cy="320040"/>
+          </a:xfrm>
+          <a:prstGeom prst="rect">
+            <a:avLst/>
+          </a:prstGeom>
+          <a:noFill/>
+        </p:spPr>
+        <p:txBody>
+          <a:bodyPr wrap="none" lIns="0" tIns="0" rIns="0" bIns="0">
+            <a:spAutoFit/>
+          </a:bodyPr>
+          <a:lstStyle/>
+          <a:p>
+            <a:pPr algn="r">
+              <a:defRPr sz="1100" b="1">
+                <a:solidFill>
+                  <a:srgbClr val="78909C"/>
+                </a:solidFill>
+              </a:defRPr>
+            </a:pPr>
+            <a:r>
+              <a:t>06 / 18</a:t>
+            </a:r>
+          </a:p>
+        </p:txBody>
+      </p:sp>
+      <p:sp>
+        <p:nvSpPr>
+          <p:cNvPr id="6" name="Rounded Rectangle 5"/>
           <p:cNvSpPr/>
           <p:nvPr/>
         </p:nvSpPr>
         <p:spPr>
           <a:xfrm>
-            <a:off x="731520" y="1737360"/>
+            <a:off x="731520" y="1645920"/>
             <a:ext cx="5212080" cy="4572000"/>
           </a:xfrm>
           <a:prstGeom prst="roundRect">
@@ -8881,18 +10061,19 @@
           <a:lstStyle/>
           <a:p>
             <a:pPr algn="ctr"/>
-          </a:p>
-        </p:txBody>
-      </p:sp>
-      <p:sp>
-        <p:nvSpPr>
-          <p:cNvPr id="5" name="TextBox 4"/>
+            <a:endParaRPr/>
+          </a:p>
+        </p:txBody>
+      </p:sp>
+      <p:sp>
+        <p:nvSpPr>
+          <p:cNvPr id="7" name="TextBox 6"/>
           <p:cNvSpPr txBox="1"/>
           <p:nvPr/>
         </p:nvSpPr>
         <p:spPr>
           <a:xfrm>
-            <a:off x="914400" y="1920240"/>
+            <a:off x="914400" y="1828800"/>
             <a:ext cx="4846320" cy="4114800"/>
           </a:xfrm>
           <a:prstGeom prst="rect">
@@ -8984,13 +10165,13 @@
       </p:sp>
       <p:sp>
         <p:nvSpPr>
-          <p:cNvPr id="6" name="Rounded Rectangle 5"/>
+          <p:cNvPr id="8" name="Rounded Rectangle 7"/>
           <p:cNvSpPr/>
           <p:nvPr/>
         </p:nvSpPr>
         <p:spPr>
           <a:xfrm>
-            <a:off x="6217920" y="1737360"/>
+            <a:off x="6217920" y="1645920"/>
             <a:ext cx="5212080" cy="4572000"/>
           </a:xfrm>
           <a:prstGeom prst="roundRect">
@@ -9024,18 +10205,19 @@
           <a:lstStyle/>
           <a:p>
             <a:pPr algn="ctr"/>
-          </a:p>
-        </p:txBody>
-      </p:sp>
-      <p:sp>
-        <p:nvSpPr>
-          <p:cNvPr id="7" name="TextBox 6"/>
+            <a:endParaRPr/>
+          </a:p>
+        </p:txBody>
+      </p:sp>
+      <p:sp>
+        <p:nvSpPr>
+          <p:cNvPr id="9" name="TextBox 8"/>
           <p:cNvSpPr txBox="1"/>
           <p:nvPr/>
         </p:nvSpPr>
         <p:spPr>
           <a:xfrm>
-            <a:off x="6400800" y="1920240"/>
+            <a:off x="6400800" y="1828800"/>
             <a:ext cx="4846320" cy="4114800"/>
           </a:xfrm>
           <a:prstGeom prst="rect">
@@ -9134,7 +10316,7 @@
 </file>
 
 <file path=ppt/slides/slide7.xml><?xml version="1.0" encoding="utf-8"?>
-<p:sld xmlns:a="http://schemas.openxmlformats.org/drawingml/2006/main" xmlns:p="http://schemas.openxmlformats.org/presentationml/2006/main" xmlns:r="http://schemas.openxmlformats.org/officeDocument/2006/relationships">
+<p:sld xmlns:a="http://schemas.openxmlformats.org/drawingml/2006/main" xmlns:r="http://schemas.openxmlformats.org/officeDocument/2006/relationships" xmlns:p="http://schemas.openxmlformats.org/presentationml/2006/main">
   <p:cSld>
     <p:spTree>
       <p:nvGrpSpPr>
@@ -9142,7 +10324,14 @@
         <p:cNvGrpSpPr/>
         <p:nvPr/>
       </p:nvGrpSpPr>
-      <p:grpSpPr/>
+      <p:grpSpPr>
+        <a:xfrm>
+          <a:off x="0" y="0"/>
+          <a:ext cx="0" cy="0"/>
+          <a:chOff x="0" y="0"/>
+          <a:chExt cx="0" cy="0"/>
+        </a:xfrm>
+      </p:grpSpPr>
       <p:sp>
         <p:nvSpPr>
           <p:cNvPr id="2" name="TextBox 1"/>
@@ -9152,7 +10341,7 @@
         <p:spPr>
           <a:xfrm>
             <a:off x="731520" y="365760"/>
-            <a:ext cx="10698480" cy="1005840"/>
+            <a:ext cx="9144000" cy="777240"/>
           </a:xfrm>
           <a:prstGeom prst="rect">
             <a:avLst/>
@@ -9166,22 +10355,7 @@
           <a:lstStyle/>
           <a:p>
             <a:pPr>
-              <a:defRPr sz="1100" b="1">
-                <a:solidFill>
-                  <a:srgbClr val="00838F"/>
-                </a:solidFill>
-              </a:defRPr>
-            </a:pPr>
-            <a:r>
-              <a:t>TRƯỜNG ĐẠI HỌC PHENIKAA • KHOA CÔNG NGHỆ THÔNG TIN</a:t>
-            </a:r>
-          </a:p>
-          <a:p>
-            <a:pPr>
-              <a:spcBef>
-                <a:spcPts val="400"/>
-              </a:spcBef>
-              <a:defRPr sz="2400" b="1">
+              <a:defRPr sz="2300" b="1">
                 <a:solidFill>
                   <a:srgbClr val="1F497D"/>
                 </a:solidFill>
@@ -9201,8 +10375,8 @@
         </p:nvSpPr>
         <p:spPr>
           <a:xfrm>
-            <a:off x="731520" y="1371600"/>
-            <a:ext cx="10728655" cy="36576"/>
+            <a:off x="731520" y="1234440"/>
+            <a:ext cx="10728655" cy="32004"/>
           </a:xfrm>
           <a:prstGeom prst="rect">
             <a:avLst/>
@@ -9235,18 +10409,78 @@
           <a:lstStyle/>
           <a:p>
             <a:pPr algn="ctr"/>
-          </a:p>
-        </p:txBody>
-      </p:sp>
-      <p:sp>
-        <p:nvSpPr>
-          <p:cNvPr id="4" name="Rounded Rectangle 3"/>
+            <a:endParaRPr/>
+          </a:p>
+        </p:txBody>
+      </p:sp>
+      <p:pic>
+        <p:nvPicPr>
+          <p:cNvPr id="4" name="Picture 3" descr="phenikaa_logo.png"/>
+          <p:cNvPicPr>
+            <a:picLocks noChangeAspect="1"/>
+          </p:cNvPicPr>
+          <p:nvPr/>
+        </p:nvPicPr>
+        <p:blipFill>
+          <a:blip r:embed="rId2"/>
+          <a:stretch>
+            <a:fillRect/>
+          </a:stretch>
+        </p:blipFill>
+        <p:spPr>
+          <a:xfrm>
+            <a:off x="10332720" y="228600"/>
+            <a:ext cx="1371600" cy="834887"/>
+          </a:xfrm>
+          <a:prstGeom prst="rect">
+            <a:avLst/>
+          </a:prstGeom>
+        </p:spPr>
+      </p:pic>
+      <p:sp>
+        <p:nvSpPr>
+          <p:cNvPr id="5" name="TextBox 4"/>
+          <p:cNvSpPr txBox="1"/>
+          <p:nvPr/>
+        </p:nvSpPr>
+        <p:spPr>
+          <a:xfrm>
+            <a:off x="10058400" y="6446520"/>
+            <a:ext cx="1645920" cy="320040"/>
+          </a:xfrm>
+          <a:prstGeom prst="rect">
+            <a:avLst/>
+          </a:prstGeom>
+          <a:noFill/>
+        </p:spPr>
+        <p:txBody>
+          <a:bodyPr wrap="none" lIns="0" tIns="0" rIns="0" bIns="0">
+            <a:spAutoFit/>
+          </a:bodyPr>
+          <a:lstStyle/>
+          <a:p>
+            <a:pPr algn="r">
+              <a:defRPr sz="1100" b="1">
+                <a:solidFill>
+                  <a:srgbClr val="78909C"/>
+                </a:solidFill>
+              </a:defRPr>
+            </a:pPr>
+            <a:r>
+              <a:t>07 / 18</a:t>
+            </a:r>
+          </a:p>
+        </p:txBody>
+      </p:sp>
+      <p:sp>
+        <p:nvSpPr>
+          <p:cNvPr id="6" name="Rounded Rectangle 5"/>
           <p:cNvSpPr/>
           <p:nvPr/>
         </p:nvSpPr>
         <p:spPr>
           <a:xfrm>
-            <a:off x="731520" y="1737360"/>
+            <a:off x="731520" y="1645920"/>
             <a:ext cx="5212080" cy="4572000"/>
           </a:xfrm>
           <a:prstGeom prst="roundRect">
@@ -9280,18 +10514,19 @@
           <a:lstStyle/>
           <a:p>
             <a:pPr algn="ctr"/>
-          </a:p>
-        </p:txBody>
-      </p:sp>
-      <p:sp>
-        <p:nvSpPr>
-          <p:cNvPr id="5" name="TextBox 4"/>
+            <a:endParaRPr/>
+          </a:p>
+        </p:txBody>
+      </p:sp>
+      <p:sp>
+        <p:nvSpPr>
+          <p:cNvPr id="7" name="TextBox 6"/>
           <p:cNvSpPr txBox="1"/>
           <p:nvPr/>
         </p:nvSpPr>
         <p:spPr>
           <a:xfrm>
-            <a:off x="914400" y="1920240"/>
+            <a:off x="914400" y="1828800"/>
             <a:ext cx="4846320" cy="4114800"/>
           </a:xfrm>
           <a:prstGeom prst="rect">
@@ -9383,13 +10618,13 @@
       </p:sp>
       <p:sp>
         <p:nvSpPr>
-          <p:cNvPr id="6" name="Rounded Rectangle 5"/>
+          <p:cNvPr id="8" name="Rounded Rectangle 7"/>
           <p:cNvSpPr/>
           <p:nvPr/>
         </p:nvSpPr>
         <p:spPr>
           <a:xfrm>
-            <a:off x="6217920" y="1737360"/>
+            <a:off x="6217920" y="1645920"/>
             <a:ext cx="5212080" cy="4572000"/>
           </a:xfrm>
           <a:prstGeom prst="roundRect">
@@ -9423,18 +10658,19 @@
           <a:lstStyle/>
           <a:p>
             <a:pPr algn="ctr"/>
-          </a:p>
-        </p:txBody>
-      </p:sp>
-      <p:sp>
-        <p:nvSpPr>
-          <p:cNvPr id="7" name="TextBox 6"/>
+            <a:endParaRPr/>
+          </a:p>
+        </p:txBody>
+      </p:sp>
+      <p:sp>
+        <p:nvSpPr>
+          <p:cNvPr id="9" name="TextBox 8"/>
           <p:cNvSpPr txBox="1"/>
           <p:nvPr/>
         </p:nvSpPr>
         <p:spPr>
           <a:xfrm>
-            <a:off x="6400800" y="1920240"/>
+            <a:off x="6400800" y="1828800"/>
             <a:ext cx="4846320" cy="4114800"/>
           </a:xfrm>
           <a:prstGeom prst="rect">
@@ -9578,7 +10814,7 @@
 </file>
 
 <file path=ppt/slides/slide8.xml><?xml version="1.0" encoding="utf-8"?>
-<p:sld xmlns:a="http://schemas.openxmlformats.org/drawingml/2006/main" xmlns:p="http://schemas.openxmlformats.org/presentationml/2006/main" xmlns:r="http://schemas.openxmlformats.org/officeDocument/2006/relationships">
+<p:sld xmlns:a="http://schemas.openxmlformats.org/drawingml/2006/main" xmlns:r="http://schemas.openxmlformats.org/officeDocument/2006/relationships" xmlns:p="http://schemas.openxmlformats.org/presentationml/2006/main">
   <p:cSld>
     <p:spTree>
       <p:nvGrpSpPr>
@@ -9586,7 +10822,14 @@
         <p:cNvGrpSpPr/>
         <p:nvPr/>
       </p:nvGrpSpPr>
-      <p:grpSpPr/>
+      <p:grpSpPr>
+        <a:xfrm>
+          <a:off x="0" y="0"/>
+          <a:ext cx="0" cy="0"/>
+          <a:chOff x="0" y="0"/>
+          <a:chExt cx="0" cy="0"/>
+        </a:xfrm>
+      </p:grpSpPr>
       <p:sp>
         <p:nvSpPr>
           <p:cNvPr id="2" name="TextBox 1"/>
@@ -9596,7 +10839,7 @@
         <p:spPr>
           <a:xfrm>
             <a:off x="731520" y="365760"/>
-            <a:ext cx="10698480" cy="1005840"/>
+            <a:ext cx="9144000" cy="777240"/>
           </a:xfrm>
           <a:prstGeom prst="rect">
             <a:avLst/>
@@ -9610,22 +10853,7 @@
           <a:lstStyle/>
           <a:p>
             <a:pPr>
-              <a:defRPr sz="1100" b="1">
-                <a:solidFill>
-                  <a:srgbClr val="00838F"/>
-                </a:solidFill>
-              </a:defRPr>
-            </a:pPr>
-            <a:r>
-              <a:t>TRƯỜNG ĐẠI HỌC PHENIKAA • KHOA CÔNG NGHỆ THÔNG TIN</a:t>
-            </a:r>
-          </a:p>
-          <a:p>
-            <a:pPr>
-              <a:spcBef>
-                <a:spcPts val="400"/>
-              </a:spcBef>
-              <a:defRPr sz="2400" b="1">
+              <a:defRPr sz="2300" b="1">
                 <a:solidFill>
                   <a:srgbClr val="1F497D"/>
                 </a:solidFill>
@@ -9645,8 +10873,8 @@
         </p:nvSpPr>
         <p:spPr>
           <a:xfrm>
-            <a:off x="731520" y="1371600"/>
-            <a:ext cx="10728655" cy="36576"/>
+            <a:off x="731520" y="1234440"/>
+            <a:ext cx="10728655" cy="32004"/>
           </a:xfrm>
           <a:prstGeom prst="rect">
             <a:avLst/>
@@ -9679,18 +10907,78 @@
           <a:lstStyle/>
           <a:p>
             <a:pPr algn="ctr"/>
-          </a:p>
-        </p:txBody>
-      </p:sp>
-      <p:sp>
-        <p:nvSpPr>
-          <p:cNvPr id="4" name="Rounded Rectangle 3"/>
+            <a:endParaRPr/>
+          </a:p>
+        </p:txBody>
+      </p:sp>
+      <p:pic>
+        <p:nvPicPr>
+          <p:cNvPr id="4" name="Picture 3" descr="phenikaa_logo.png"/>
+          <p:cNvPicPr>
+            <a:picLocks noChangeAspect="1"/>
+          </p:cNvPicPr>
+          <p:nvPr/>
+        </p:nvPicPr>
+        <p:blipFill>
+          <a:blip r:embed="rId2"/>
+          <a:stretch>
+            <a:fillRect/>
+          </a:stretch>
+        </p:blipFill>
+        <p:spPr>
+          <a:xfrm>
+            <a:off x="10332720" y="228600"/>
+            <a:ext cx="1371600" cy="834887"/>
+          </a:xfrm>
+          <a:prstGeom prst="rect">
+            <a:avLst/>
+          </a:prstGeom>
+        </p:spPr>
+      </p:pic>
+      <p:sp>
+        <p:nvSpPr>
+          <p:cNvPr id="5" name="TextBox 4"/>
+          <p:cNvSpPr txBox="1"/>
+          <p:nvPr/>
+        </p:nvSpPr>
+        <p:spPr>
+          <a:xfrm>
+            <a:off x="10058400" y="6446520"/>
+            <a:ext cx="1645920" cy="320040"/>
+          </a:xfrm>
+          <a:prstGeom prst="rect">
+            <a:avLst/>
+          </a:prstGeom>
+          <a:noFill/>
+        </p:spPr>
+        <p:txBody>
+          <a:bodyPr wrap="none" lIns="0" tIns="0" rIns="0" bIns="0">
+            <a:spAutoFit/>
+          </a:bodyPr>
+          <a:lstStyle/>
+          <a:p>
+            <a:pPr algn="r">
+              <a:defRPr sz="1100" b="1">
+                <a:solidFill>
+                  <a:srgbClr val="78909C"/>
+                </a:solidFill>
+              </a:defRPr>
+            </a:pPr>
+            <a:r>
+              <a:t>08 / 18</a:t>
+            </a:r>
+          </a:p>
+        </p:txBody>
+      </p:sp>
+      <p:sp>
+        <p:nvSpPr>
+          <p:cNvPr id="6" name="Rounded Rectangle 5"/>
           <p:cNvSpPr/>
           <p:nvPr/>
         </p:nvSpPr>
         <p:spPr>
           <a:xfrm>
-            <a:off x="731520" y="1737360"/>
+            <a:off x="731520" y="1645920"/>
             <a:ext cx="10728655" cy="1097280"/>
           </a:xfrm>
           <a:prstGeom prst="roundRect">
@@ -9724,18 +11012,19 @@
           <a:lstStyle/>
           <a:p>
             <a:pPr algn="ctr"/>
-          </a:p>
-        </p:txBody>
-      </p:sp>
-      <p:sp>
-        <p:nvSpPr>
-          <p:cNvPr id="5" name="TextBox 4"/>
+            <a:endParaRPr/>
+          </a:p>
+        </p:txBody>
+      </p:sp>
+      <p:sp>
+        <p:nvSpPr>
+          <p:cNvPr id="7" name="TextBox 6"/>
           <p:cNvSpPr txBox="1"/>
           <p:nvPr/>
         </p:nvSpPr>
         <p:spPr>
           <a:xfrm>
-            <a:off x="914400" y="1874519"/>
+            <a:off x="914400" y="1783080"/>
             <a:ext cx="10332720" cy="822960"/>
           </a:xfrm>
           <a:prstGeom prst="rect">
@@ -9779,13 +11068,13 @@
       </p:sp>
       <p:sp>
         <p:nvSpPr>
-          <p:cNvPr id="6" name="Rounded Rectangle 5"/>
+          <p:cNvPr id="8" name="Rounded Rectangle 7"/>
           <p:cNvSpPr/>
           <p:nvPr/>
         </p:nvSpPr>
         <p:spPr>
           <a:xfrm>
-            <a:off x="731520" y="3017520"/>
+            <a:off x="731520" y="2926080"/>
             <a:ext cx="10728655" cy="777240"/>
           </a:xfrm>
           <a:prstGeom prst="roundRect">
@@ -9819,18 +11108,19 @@
           <a:lstStyle/>
           <a:p>
             <a:pPr algn="ctr"/>
-          </a:p>
-        </p:txBody>
-      </p:sp>
-      <p:sp>
-        <p:nvSpPr>
-          <p:cNvPr id="7" name="TextBox 6"/>
+            <a:endParaRPr/>
+          </a:p>
+        </p:txBody>
+      </p:sp>
+      <p:sp>
+        <p:nvSpPr>
+          <p:cNvPr id="9" name="TextBox 8"/>
           <p:cNvSpPr txBox="1"/>
           <p:nvPr/>
         </p:nvSpPr>
         <p:spPr>
           <a:xfrm>
-            <a:off x="914400" y="3127248"/>
+            <a:off x="914400" y="3035808"/>
             <a:ext cx="10332720" cy="548640"/>
           </a:xfrm>
           <a:prstGeom prst="rect">
@@ -9859,13 +11149,13 @@
       </p:sp>
       <p:sp>
         <p:nvSpPr>
-          <p:cNvPr id="8" name="Rounded Rectangle 7"/>
+          <p:cNvPr id="10" name="Rounded Rectangle 9"/>
           <p:cNvSpPr/>
           <p:nvPr/>
         </p:nvSpPr>
         <p:spPr>
           <a:xfrm>
-            <a:off x="731520" y="3886200"/>
+            <a:off x="731520" y="3794760"/>
             <a:ext cx="10728655" cy="777240"/>
           </a:xfrm>
           <a:prstGeom prst="roundRect">
@@ -9899,18 +11189,19 @@
           <a:lstStyle/>
           <a:p>
             <a:pPr algn="ctr"/>
-          </a:p>
-        </p:txBody>
-      </p:sp>
-      <p:sp>
-        <p:nvSpPr>
-          <p:cNvPr id="9" name="TextBox 8"/>
+            <a:endParaRPr/>
+          </a:p>
+        </p:txBody>
+      </p:sp>
+      <p:sp>
+        <p:nvSpPr>
+          <p:cNvPr id="11" name="TextBox 10"/>
           <p:cNvSpPr txBox="1"/>
           <p:nvPr/>
         </p:nvSpPr>
         <p:spPr>
           <a:xfrm>
-            <a:off x="914400" y="3995928"/>
+            <a:off x="914400" y="3904488"/>
             <a:ext cx="10332720" cy="548640"/>
           </a:xfrm>
           <a:prstGeom prst="rect">
@@ -9939,13 +11230,13 @@
       </p:sp>
       <p:sp>
         <p:nvSpPr>
-          <p:cNvPr id="10" name="Rounded Rectangle 9"/>
+          <p:cNvPr id="12" name="Rounded Rectangle 11"/>
           <p:cNvSpPr/>
           <p:nvPr/>
         </p:nvSpPr>
         <p:spPr>
           <a:xfrm>
-            <a:off x="731520" y="4754879"/>
+            <a:off x="731520" y="4663440"/>
             <a:ext cx="10728655" cy="777240"/>
           </a:xfrm>
           <a:prstGeom prst="roundRect">
@@ -9979,18 +11270,19 @@
           <a:lstStyle/>
           <a:p>
             <a:pPr algn="ctr"/>
-          </a:p>
-        </p:txBody>
-      </p:sp>
-      <p:sp>
-        <p:nvSpPr>
-          <p:cNvPr id="11" name="TextBox 10"/>
+            <a:endParaRPr/>
+          </a:p>
+        </p:txBody>
+      </p:sp>
+      <p:sp>
+        <p:nvSpPr>
+          <p:cNvPr id="13" name="TextBox 12"/>
           <p:cNvSpPr txBox="1"/>
           <p:nvPr/>
         </p:nvSpPr>
         <p:spPr>
           <a:xfrm>
-            <a:off x="914400" y="4864607"/>
+            <a:off x="914400" y="4773168"/>
             <a:ext cx="10332720" cy="548640"/>
           </a:xfrm>
           <a:prstGeom prst="rect">
@@ -10019,13 +11311,13 @@
       </p:sp>
       <p:sp>
         <p:nvSpPr>
-          <p:cNvPr id="12" name="Rounded Rectangle 11"/>
+          <p:cNvPr id="14" name="Rounded Rectangle 13"/>
           <p:cNvSpPr/>
           <p:nvPr/>
         </p:nvSpPr>
         <p:spPr>
           <a:xfrm>
-            <a:off x="731520" y="5623559"/>
+            <a:off x="731520" y="5532120"/>
             <a:ext cx="10728655" cy="777240"/>
           </a:xfrm>
           <a:prstGeom prst="roundRect">
@@ -10059,18 +11351,19 @@
           <a:lstStyle/>
           <a:p>
             <a:pPr algn="ctr"/>
-          </a:p>
-        </p:txBody>
-      </p:sp>
-      <p:sp>
-        <p:nvSpPr>
-          <p:cNvPr id="13" name="TextBox 12"/>
+            <a:endParaRPr/>
+          </a:p>
+        </p:txBody>
+      </p:sp>
+      <p:sp>
+        <p:nvSpPr>
+          <p:cNvPr id="15" name="TextBox 14"/>
           <p:cNvSpPr txBox="1"/>
           <p:nvPr/>
         </p:nvSpPr>
         <p:spPr>
           <a:xfrm>
-            <a:off x="914400" y="5733287"/>
+            <a:off x="914400" y="5641848"/>
             <a:ext cx="10332720" cy="548640"/>
           </a:xfrm>
           <a:prstGeom prst="rect">
@@ -10106,7 +11399,7 @@
 </file>
 
 <file path=ppt/slides/slide9.xml><?xml version="1.0" encoding="utf-8"?>
-<p:sld xmlns:a="http://schemas.openxmlformats.org/drawingml/2006/main" xmlns:p="http://schemas.openxmlformats.org/presentationml/2006/main" xmlns:r="http://schemas.openxmlformats.org/officeDocument/2006/relationships">
+<p:sld xmlns:a="http://schemas.openxmlformats.org/drawingml/2006/main" xmlns:r="http://schemas.openxmlformats.org/officeDocument/2006/relationships" xmlns:p="http://schemas.openxmlformats.org/presentationml/2006/main">
   <p:cSld>
     <p:spTree>
       <p:nvGrpSpPr>
@@ -10114,7 +11407,14 @@
         <p:cNvGrpSpPr/>
         <p:nvPr/>
       </p:nvGrpSpPr>
-      <p:grpSpPr/>
+      <p:grpSpPr>
+        <a:xfrm>
+          <a:off x="0" y="0"/>
+          <a:ext cx="0" cy="0"/>
+          <a:chOff x="0" y="0"/>
+          <a:chExt cx="0" cy="0"/>
+        </a:xfrm>
+      </p:grpSpPr>
       <p:sp>
         <p:nvSpPr>
           <p:cNvPr id="2" name="TextBox 1"/>
@@ -10124,7 +11424,7 @@
         <p:spPr>
           <a:xfrm>
             <a:off x="731520" y="365760"/>
-            <a:ext cx="10698480" cy="1005840"/>
+            <a:ext cx="9144000" cy="777240"/>
           </a:xfrm>
           <a:prstGeom prst="rect">
             <a:avLst/>
@@ -10138,22 +11438,7 @@
           <a:lstStyle/>
           <a:p>
             <a:pPr>
-              <a:defRPr sz="1100" b="1">
-                <a:solidFill>
-                  <a:srgbClr val="00838F"/>
-                </a:solidFill>
-              </a:defRPr>
-            </a:pPr>
-            <a:r>
-              <a:t>TRƯỜNG ĐẠI HỌC PHENIKAA • KHOA CÔNG NGHỆ THÔNG TIN</a:t>
-            </a:r>
-          </a:p>
-          <a:p>
-            <a:pPr>
-              <a:spcBef>
-                <a:spcPts val="400"/>
-              </a:spcBef>
-              <a:defRPr sz="2400" b="1">
+              <a:defRPr sz="2300" b="1">
                 <a:solidFill>
                   <a:srgbClr val="1F497D"/>
                 </a:solidFill>
@@ -10173,8 +11458,8 @@
         </p:nvSpPr>
         <p:spPr>
           <a:xfrm>
-            <a:off x="731520" y="1371600"/>
-            <a:ext cx="10728655" cy="36576"/>
+            <a:off x="731520" y="1234440"/>
+            <a:ext cx="10728655" cy="32004"/>
           </a:xfrm>
           <a:prstGeom prst="rect">
             <a:avLst/>
@@ -10207,185 +11492,13 @@
           <a:lstStyle/>
           <a:p>
             <a:pPr algn="ctr"/>
-          </a:p>
-        </p:txBody>
-      </p:sp>
-      <p:sp>
-        <p:nvSpPr>
-          <p:cNvPr id="4" name="TextBox 3"/>
-          <p:cNvSpPr txBox="1"/>
-          <p:nvPr/>
-        </p:nvSpPr>
-        <p:spPr>
-          <a:xfrm>
-            <a:off x="731520" y="1737360"/>
-            <a:ext cx="5303520" cy="4572000"/>
-          </a:xfrm>
-          <a:prstGeom prst="rect">
-            <a:avLst/>
-          </a:prstGeom>
-          <a:noFill/>
-        </p:spPr>
-        <p:txBody>
-          <a:bodyPr wrap="square">
-            <a:spAutoFit/>
-          </a:bodyPr>
-          <a:lstStyle/>
-          <a:p>
-            <a:pPr>
-              <a:spcAft>
-                <a:spcPts val="1000"/>
-              </a:spcAft>
-              <a:defRPr sz="1600" b="1">
-                <a:solidFill>
-                  <a:srgbClr val="1F497D"/>
-                </a:solidFill>
-              </a:defRPr>
-            </a:pPr>
-            <a:r>
-              <a:t>Bộ Kịch Bản Tự Động Hóa API Postman</a:t>
-            </a:r>
-          </a:p>
-          <a:p>
-            <a:pPr>
-              <a:spcAft>
-                <a:spcPts val="400"/>
-              </a:spcAft>
-              <a:defRPr sz="1150">
-                <a:solidFill>
-                  <a:srgbClr val="333333"/>
-                </a:solidFill>
-              </a:defRPr>
-            </a:pPr>
-            <a:r>
-              <a:t>Gồm 10 API cốt lõi chia thành 4 phân nhóm chức năng.</a:t>
-            </a:r>
-          </a:p>
-          <a:p>
-            <a:pPr>
-              <a:spcAft>
-                <a:spcPts val="400"/>
-              </a:spcAft>
-              <a:defRPr sz="1150">
-                <a:solidFill>
-                  <a:srgbClr val="333333"/>
-                </a:solidFill>
-              </a:defRPr>
-            </a:pPr>
-            <a:r>
-              <a:t>17 điều kiện Assertions kiểm tra Status Code, JWT, JSON Schema.</a:t>
-            </a:r>
-          </a:p>
-          <a:p>
-            <a:pPr>
-              <a:spcAft>
-                <a:spcPts val="400"/>
-              </a:spcAft>
-              <a:defRPr sz="1150">
-                <a:solidFill>
-                  <a:srgbClr val="333333"/>
-                </a:solidFill>
-              </a:defRPr>
-            </a:pPr>
-            <a:r>
-              <a:t>KẾT QUẢ THỰC NGHIỆM:</a:t>
-            </a:r>
-          </a:p>
-          <a:p>
-            <a:pPr>
-              <a:spcAft>
-                <a:spcPts val="400"/>
-              </a:spcAft>
-              <a:defRPr sz="1150">
-                <a:solidFill>
-                  <a:srgbClr val="333333"/>
-                </a:solidFill>
-              </a:defRPr>
-            </a:pPr>
-            <a:r>
-              <a:t>  ✔ 10/10 Requests Passed tuyệt đối 100%.</a:t>
-            </a:r>
-          </a:p>
-          <a:p>
-            <a:pPr>
-              <a:spcAft>
-                <a:spcPts val="400"/>
-              </a:spcAft>
-              <a:defRPr sz="1150">
-                <a:solidFill>
-                  <a:srgbClr val="333333"/>
-                </a:solidFill>
-              </a:defRPr>
-            </a:pPr>
-            <a:r>
-              <a:t>  ✔ 17/17 Assertions Passed (0 thất bại).</a:t>
-            </a:r>
-          </a:p>
-          <a:p>
-            <a:pPr>
-              <a:spcAft>
-                <a:spcPts val="400"/>
-              </a:spcAft>
-              <a:defRPr sz="1150">
-                <a:solidFill>
-                  <a:srgbClr val="333333"/>
-                </a:solidFill>
-              </a:defRPr>
-            </a:pPr>
-            <a:r>
-              <a:t>  ✔ Thời gian phản hồi trung bình: 38 ms.</a:t>
-            </a:r>
-          </a:p>
-          <a:p>
-            <a:pPr>
-              <a:spcAft>
-                <a:spcPts val="400"/>
-              </a:spcAft>
-              <a:defRPr sz="1150">
-                <a:solidFill>
-                  <a:srgbClr val="333333"/>
-                </a:solidFill>
-              </a:defRPr>
-            </a:pPr>
-            <a:r>
-              <a:t>  ✔ Thời gian chạy toàn bộ bộ test: 1s 348ms.</a:t>
-            </a:r>
-          </a:p>
-          <a:p>
-            <a:pPr>
-              <a:spcAft>
-                <a:spcPts val="400"/>
-              </a:spcAft>
-              <a:defRPr sz="1150">
-                <a:solidFill>
-                  <a:srgbClr val="333333"/>
-                </a:solidFill>
-              </a:defRPr>
-            </a:pPr>
-            <a:r>
-              <a:t>Chạy tự động không cần cài đặt qua Newman CLI trên CI/CD:</a:t>
-            </a:r>
-          </a:p>
-          <a:p>
-            <a:pPr>
-              <a:spcAft>
-                <a:spcPts val="400"/>
-              </a:spcAft>
-              <a:defRPr sz="1150">
-                <a:solidFill>
-                  <a:srgbClr val="333333"/>
-                </a:solidFill>
-              </a:defRPr>
-            </a:pPr>
-            <a:r>
-              <a:t>cmd /c 'npx newman run MiniBank_API_Automation.postman_collection.json'</a:t>
-            </a:r>
+            <a:endParaRPr/>
           </a:p>
         </p:txBody>
       </p:sp>
       <p:pic>
         <p:nvPicPr>
-          <p:cNvPr id="5" name="Picture 4" descr="hinh_3_4b_postman_runner.png"/>
+          <p:cNvPr id="4" name="Picture 3" descr="phenikaa_logo.png"/>
           <p:cNvPicPr>
             <a:picLocks noChangeAspect="1"/>
           </p:cNvPicPr>
@@ -10399,7 +11512,239 @@
         </p:blipFill>
         <p:spPr>
           <a:xfrm>
-            <a:off x="6217920" y="1737360"/>
+            <a:off x="10332720" y="228600"/>
+            <a:ext cx="1371600" cy="834887"/>
+          </a:xfrm>
+          <a:prstGeom prst="rect">
+            <a:avLst/>
+          </a:prstGeom>
+        </p:spPr>
+      </p:pic>
+      <p:sp>
+        <p:nvSpPr>
+          <p:cNvPr id="5" name="TextBox 4"/>
+          <p:cNvSpPr txBox="1"/>
+          <p:nvPr/>
+        </p:nvSpPr>
+        <p:spPr>
+          <a:xfrm>
+            <a:off x="10058400" y="6446520"/>
+            <a:ext cx="1645920" cy="320040"/>
+          </a:xfrm>
+          <a:prstGeom prst="rect">
+            <a:avLst/>
+          </a:prstGeom>
+          <a:noFill/>
+        </p:spPr>
+        <p:txBody>
+          <a:bodyPr wrap="none" lIns="0" tIns="0" rIns="0" bIns="0">
+            <a:spAutoFit/>
+          </a:bodyPr>
+          <a:lstStyle/>
+          <a:p>
+            <a:pPr algn="r">
+              <a:defRPr sz="1100" b="1">
+                <a:solidFill>
+                  <a:srgbClr val="78909C"/>
+                </a:solidFill>
+              </a:defRPr>
+            </a:pPr>
+            <a:r>
+              <a:t>09 / 18</a:t>
+            </a:r>
+          </a:p>
+        </p:txBody>
+      </p:sp>
+      <p:sp>
+        <p:nvSpPr>
+          <p:cNvPr id="6" name="TextBox 5"/>
+          <p:cNvSpPr txBox="1"/>
+          <p:nvPr/>
+        </p:nvSpPr>
+        <p:spPr>
+          <a:xfrm>
+            <a:off x="731520" y="1645920"/>
+            <a:ext cx="5303520" cy="4572000"/>
+          </a:xfrm>
+          <a:prstGeom prst="rect">
+            <a:avLst/>
+          </a:prstGeom>
+          <a:noFill/>
+        </p:spPr>
+        <p:txBody>
+          <a:bodyPr wrap="square">
+            <a:spAutoFit/>
+          </a:bodyPr>
+          <a:lstStyle/>
+          <a:p>
+            <a:pPr>
+              <a:spcAft>
+                <a:spcPts val="1000"/>
+              </a:spcAft>
+              <a:defRPr sz="1600" b="1">
+                <a:solidFill>
+                  <a:srgbClr val="1F497D"/>
+                </a:solidFill>
+              </a:defRPr>
+            </a:pPr>
+            <a:r>
+              <a:t>Bộ Kịch Bản Tự Động Hóa API Postman</a:t>
+            </a:r>
+          </a:p>
+          <a:p>
+            <a:pPr>
+              <a:spcAft>
+                <a:spcPts val="400"/>
+              </a:spcAft>
+              <a:defRPr sz="1150">
+                <a:solidFill>
+                  <a:srgbClr val="333333"/>
+                </a:solidFill>
+              </a:defRPr>
+            </a:pPr>
+            <a:r>
+              <a:t>Gồm 10 API cốt lõi chia thành 4 phân nhóm chức năng.</a:t>
+            </a:r>
+          </a:p>
+          <a:p>
+            <a:pPr>
+              <a:spcAft>
+                <a:spcPts val="400"/>
+              </a:spcAft>
+              <a:defRPr sz="1150">
+                <a:solidFill>
+                  <a:srgbClr val="333333"/>
+                </a:solidFill>
+              </a:defRPr>
+            </a:pPr>
+            <a:r>
+              <a:t>17 điều kiện Assertions kiểm tra Status Code, JWT, JSON Schema.</a:t>
+            </a:r>
+          </a:p>
+          <a:p>
+            <a:pPr>
+              <a:spcAft>
+                <a:spcPts val="400"/>
+              </a:spcAft>
+              <a:defRPr sz="1150">
+                <a:solidFill>
+                  <a:srgbClr val="333333"/>
+                </a:solidFill>
+              </a:defRPr>
+            </a:pPr>
+            <a:r>
+              <a:t>KẾT QUẢ THỰC NGHIỆM:</a:t>
+            </a:r>
+          </a:p>
+          <a:p>
+            <a:pPr>
+              <a:spcAft>
+                <a:spcPts val="400"/>
+              </a:spcAft>
+              <a:defRPr sz="1150">
+                <a:solidFill>
+                  <a:srgbClr val="333333"/>
+                </a:solidFill>
+              </a:defRPr>
+            </a:pPr>
+            <a:r>
+              <a:t>  ✔ 10/10 Requests Passed tuyệt đối 100%.</a:t>
+            </a:r>
+          </a:p>
+          <a:p>
+            <a:pPr>
+              <a:spcAft>
+                <a:spcPts val="400"/>
+              </a:spcAft>
+              <a:defRPr sz="1150">
+                <a:solidFill>
+                  <a:srgbClr val="333333"/>
+                </a:solidFill>
+              </a:defRPr>
+            </a:pPr>
+            <a:r>
+              <a:t>  ✔ 17/17 Assertions Passed (0 thất bại).</a:t>
+            </a:r>
+          </a:p>
+          <a:p>
+            <a:pPr>
+              <a:spcAft>
+                <a:spcPts val="400"/>
+              </a:spcAft>
+              <a:defRPr sz="1150">
+                <a:solidFill>
+                  <a:srgbClr val="333333"/>
+                </a:solidFill>
+              </a:defRPr>
+            </a:pPr>
+            <a:r>
+              <a:t>  ✔ Thời gian phản hồi trung bình: 38 ms.</a:t>
+            </a:r>
+          </a:p>
+          <a:p>
+            <a:pPr>
+              <a:spcAft>
+                <a:spcPts val="400"/>
+              </a:spcAft>
+              <a:defRPr sz="1150">
+                <a:solidFill>
+                  <a:srgbClr val="333333"/>
+                </a:solidFill>
+              </a:defRPr>
+            </a:pPr>
+            <a:r>
+              <a:t>  ✔ Thời gian chạy toàn bộ bộ test: 1s 348ms.</a:t>
+            </a:r>
+          </a:p>
+          <a:p>
+            <a:pPr>
+              <a:spcAft>
+                <a:spcPts val="400"/>
+              </a:spcAft>
+              <a:defRPr sz="1150">
+                <a:solidFill>
+                  <a:srgbClr val="333333"/>
+                </a:solidFill>
+              </a:defRPr>
+            </a:pPr>
+            <a:r>
+              <a:t>Chạy tự động không cần cài đặt qua Newman CLI trên CI/CD:</a:t>
+            </a:r>
+          </a:p>
+          <a:p>
+            <a:pPr>
+              <a:spcAft>
+                <a:spcPts val="400"/>
+              </a:spcAft>
+              <a:defRPr sz="1150">
+                <a:solidFill>
+                  <a:srgbClr val="333333"/>
+                </a:solidFill>
+              </a:defRPr>
+            </a:pPr>
+            <a:r>
+              <a:t>cmd /c 'npx newman run MiniBank_API_Automation.postman_collection.json'</a:t>
+            </a:r>
+          </a:p>
+        </p:txBody>
+      </p:sp>
+      <p:pic>
+        <p:nvPicPr>
+          <p:cNvPr id="7" name="Picture 6" descr="hinh_3_4b_postman_runner.png"/>
+          <p:cNvPicPr>
+            <a:picLocks noChangeAspect="1"/>
+          </p:cNvPicPr>
+          <p:nvPr/>
+        </p:nvPicPr>
+        <p:blipFill>
+          <a:blip r:embed="rId3"/>
+          <a:stretch>
+            <a:fillRect/>
+          </a:stretch>
+        </p:blipFill>
+        <p:spPr>
+          <a:xfrm>
+            <a:off x="6217920" y="1645920"/>
             <a:ext cx="5212080" cy="2809637"/>
           </a:xfrm>
           <a:prstGeom prst="rect">
